--- a/ppt/02.C언어-main.pptx
+++ b/ppt/02.C언어-main.pptx
@@ -1,6 +1,6 @@
 
 <file path=ppt/presentation.xml><?xml version="1.0" encoding="utf-8"?>
-<p:presentation xmlns:a="http://schemas.openxmlformats.org/drawingml/2006/main" xmlns:r="http://schemas.openxmlformats.org/officeDocument/2006/relationships" xmlns:p="http://schemas.openxmlformats.org/presentationml/2006/main" saveSubsetFonts="1">
+<p:presentation xmlns:a="http://schemas.openxmlformats.org/drawingml/2006/main" xmlns:r="http://schemas.openxmlformats.org/officeDocument/2006/relationships" xmlns:p="http://schemas.openxmlformats.org/presentationml/2006/main" embedTrueTypeFonts="1" saveSubsetFonts="1">
   <p:sldMasterIdLst>
     <p:sldMasterId id="2147483648" r:id="rId1"/>
   </p:sldMasterIdLst>
@@ -45,6 +45,23 @@
   </p:sldIdLst>
   <p:sldSz cx="9144000" cy="6858000" type="screen4x3"/>
   <p:notesSz cx="6858000" cy="9144000"/>
+  <p:embeddedFontLst>
+    <p:embeddedFont>
+      <p:font typeface="HY견고딕" panose="02030600000101010101" pitchFamily="18" charset="-127"/>
+      <p:regular r:id="rId37"/>
+    </p:embeddedFont>
+    <p:embeddedFont>
+      <p:font typeface="가을체" panose="02030600000101010101" pitchFamily="18" charset="-127"/>
+      <p:regular r:id="rId38"/>
+    </p:embeddedFont>
+    <p:embeddedFont>
+      <p:font typeface="Consolas" panose="020B0609020204030204" pitchFamily="49" charset="0"/>
+      <p:regular r:id="rId39"/>
+      <p:bold r:id="rId40"/>
+      <p:italic r:id="rId41"/>
+      <p:boldItalic r:id="rId42"/>
+    </p:embeddedFont>
+  </p:embeddedFontLst>
   <p:defaultTextStyle>
     <a:defPPr>
       <a:defRPr lang="ko-KR"/>

--- a/ppt/02.C언어-main.pptx
+++ b/ppt/02.C언어-main.pptx
@@ -47,12 +47,9 @@
   <p:notesSz cx="6858000" cy="9144000"/>
   <p:embeddedFontLst>
     <p:embeddedFont>
-      <p:font typeface="HY견고딕" panose="02030600000101010101" pitchFamily="18" charset="-127"/>
+      <p:font typeface="나눔바른고딕" panose="020B0603020101020101" pitchFamily="50" charset="-127"/>
       <p:regular r:id="rId37"/>
-    </p:embeddedFont>
-    <p:embeddedFont>
-      <p:font typeface="가을체" panose="02030600000101010101" pitchFamily="18" charset="-127"/>
-      <p:regular r:id="rId38"/>
+      <p:bold r:id="rId38"/>
     </p:embeddedFont>
     <p:embeddedFont>
       <p:font typeface="Consolas" panose="020B0609020204030204" pitchFamily="49" charset="0"/>
@@ -60,6 +57,14 @@
       <p:bold r:id="rId40"/>
       <p:italic r:id="rId41"/>
       <p:boldItalic r:id="rId42"/>
+    </p:embeddedFont>
+    <p:embeddedFont>
+      <p:font typeface="HY견고딕" panose="02030600000101010101" pitchFamily="18" charset="-127"/>
+      <p:regular r:id="rId43"/>
+    </p:embeddedFont>
+    <p:embeddedFont>
+      <p:font typeface="가을체" panose="02030600000101010101" pitchFamily="18" charset="-127"/>
+      <p:regular r:id="rId44"/>
     </p:embeddedFont>
   </p:embeddedFontLst>
   <p:defaultTextStyle>
@@ -1465,7 +1470,16 @@
         </p:spPr>
         <p:txBody>
           <a:bodyPr/>
-          <a:lstStyle/>
+          <a:lstStyle>
+            <a:lvl1pPr>
+              <a:buSzPct val="80000"/>
+              <a:defRPr/>
+            </a:lvl1pPr>
+            <a:lvl2pPr>
+              <a:buSzPct val="60000"/>
+              <a:defRPr/>
+            </a:lvl2pPr>
+          </a:lstStyle>
           <a:p>
             <a:pPr lvl="0"/>
             <a:r>
@@ -3944,14 +3958,13 @@
           <a:lstStyle/>
           <a:p>
             <a:r>
-              <a:rPr lang="en-US" altLang="ko-KR" b="0" dirty="0"/>
+              <a:rPr lang="en-US" altLang="ko-KR" dirty="0"/>
               <a:t>2.4 </a:t>
             </a:r>
             <a:r>
-              <a:rPr lang="ko-KR" altLang="en-US" b="0" dirty="0"/>
+              <a:rPr lang="ko-KR" altLang="en-US" dirty="0"/>
               <a:t>프로그래밍 구성과 함수</a:t>
             </a:r>
-            <a:endParaRPr lang="ko-KR" altLang="en-US" dirty="0"/>
           </a:p>
         </p:txBody>
       </p:sp>
@@ -3977,111 +3990,111 @@
           <a:lstStyle/>
           <a:p>
             <a:r>
-              <a:rPr lang="ko-KR" altLang="en-US" sz="2000" b="0" dirty="0"/>
+              <a:rPr lang="ko-KR" altLang="en-US" sz="2000" dirty="0"/>
               <a:t>반환형</a:t>
             </a:r>
           </a:p>
           <a:p>
             <a:pPr lvl="1"/>
             <a:r>
-              <a:rPr lang="ko-KR" altLang="en-US" sz="1800" b="0" dirty="0"/>
+              <a:rPr lang="ko-KR" altLang="en-US" sz="1800" dirty="0"/>
               <a:t>함수 실행 후 반환되는 값의 자료형</a:t>
             </a:r>
           </a:p>
           <a:p>
             <a:r>
-              <a:rPr lang="ko-KR" altLang="en-US" sz="2000" b="0" dirty="0"/>
+              <a:rPr lang="ko-KR" altLang="en-US" sz="2000" dirty="0"/>
               <a:t>함수 이름</a:t>
             </a:r>
           </a:p>
           <a:p>
             <a:pPr lvl="1"/>
             <a:r>
-              <a:rPr lang="ko-KR" altLang="en-US" sz="1800" b="0" dirty="0"/>
+              <a:rPr lang="ko-KR" altLang="en-US" sz="1800" dirty="0"/>
               <a:t>함수를 식별하고 호출하기 위한 이름</a:t>
             </a:r>
           </a:p>
           <a:p>
             <a:r>
-              <a:rPr lang="ko-KR" altLang="en-US" sz="2000" b="0" dirty="0"/>
+              <a:rPr lang="ko-KR" altLang="en-US" sz="2000" dirty="0"/>
               <a:t>인수 목록</a:t>
             </a:r>
           </a:p>
           <a:p>
             <a:pPr lvl="1"/>
             <a:r>
-              <a:rPr lang="ko-KR" altLang="en-US" sz="1800" b="0" dirty="0"/>
+              <a:rPr lang="ko-KR" altLang="en-US" sz="1800" dirty="0"/>
               <a:t>함수로 전달되는 값을 저장하는 변수 목록</a:t>
             </a:r>
           </a:p>
           <a:p>
             <a:r>
-              <a:rPr lang="ko-KR" altLang="en-US" sz="2000" b="0" dirty="0"/>
+              <a:rPr lang="ko-KR" altLang="en-US" sz="2000" dirty="0"/>
               <a:t>명령문</a:t>
             </a:r>
           </a:p>
           <a:p>
             <a:pPr lvl="1"/>
             <a:r>
-              <a:rPr lang="ko-KR" altLang="en-US" sz="1800" b="0" dirty="0"/>
+              <a:rPr lang="ko-KR" altLang="en-US" sz="1800" dirty="0"/>
               <a:t>함수 내부에서 실행되는 프로그램 명령</a:t>
             </a:r>
           </a:p>
           <a:p>
             <a:r>
-              <a:rPr lang="en-US" altLang="ko-KR" sz="2000" b="0" dirty="0"/>
+              <a:rPr lang="en-US" altLang="ko-KR" sz="2000" dirty="0"/>
               <a:t>return</a:t>
             </a:r>
           </a:p>
           <a:p>
             <a:pPr lvl="1"/>
             <a:r>
-              <a:rPr lang="ko-KR" altLang="en-US" sz="1800" b="0" dirty="0"/>
+              <a:rPr lang="ko-KR" altLang="en-US" sz="1800" dirty="0"/>
               <a:t>함수 실행을 종료하고 값을 반환</a:t>
             </a:r>
-            <a:endParaRPr lang="en-US" altLang="ko-KR" sz="1800" b="0" dirty="0"/>
+            <a:endParaRPr lang="en-US" altLang="ko-KR" sz="1800" dirty="0"/>
           </a:p>
           <a:p>
             <a:pPr lvl="1"/>
             <a:r>
-              <a:rPr lang="ko-KR" altLang="en-US" sz="1800" b="0" dirty="0"/>
+              <a:rPr lang="ko-KR" altLang="en-US" sz="1800" dirty="0"/>
               <a:t>반환 값이 없으면 반환 값 생략</a:t>
             </a:r>
             <a:r>
-              <a:rPr lang="en-US" altLang="ko-KR" sz="1800" b="0" dirty="0"/>
+              <a:rPr lang="en-US" altLang="ko-KR" sz="1800" dirty="0"/>
               <a:t>. </a:t>
             </a:r>
             <a:r>
-              <a:rPr lang="en-US" altLang="ko-KR" sz="1800" b="0" dirty="0">
+              <a:rPr lang="en-US" altLang="ko-KR" sz="1800" dirty="0">
                 <a:sym typeface="Wingdings" panose="05000000000000000000" pitchFamily="2" charset="2"/>
               </a:rPr>
               <a:t> return ;</a:t>
             </a:r>
-            <a:endParaRPr lang="ko-KR" altLang="en-US" sz="1800" b="0" dirty="0"/>
-          </a:p>
-          <a:p>
-            <a:r>
-              <a:rPr lang="ko-KR" altLang="en-US" sz="2000" b="0" dirty="0"/>
+            <a:endParaRPr lang="ko-KR" altLang="en-US" sz="1800" dirty="0"/>
+          </a:p>
+          <a:p>
+            <a:r>
+              <a:rPr lang="ko-KR" altLang="en-US" sz="2000" dirty="0"/>
               <a:t>반환값</a:t>
             </a:r>
           </a:p>
           <a:p>
             <a:pPr lvl="1"/>
             <a:r>
-              <a:rPr lang="ko-KR" altLang="en-US" sz="1800" b="0" dirty="0"/>
+              <a:rPr lang="ko-KR" altLang="en-US" sz="1800" dirty="0"/>
               <a:t>함수가 호출한 곳으로 전달하는 값</a:t>
             </a:r>
           </a:p>
           <a:p>
             <a:r>
-              <a:rPr lang="ko-KR" altLang="en-US" sz="2000" b="0" dirty="0"/>
+              <a:rPr lang="ko-KR" altLang="en-US" sz="2000" dirty="0"/>
               <a:t>세미콜론</a:t>
             </a:r>
           </a:p>
           <a:p>
             <a:pPr lvl="1"/>
             <a:r>
-              <a:rPr lang="ko-KR" altLang="en-US" sz="1800" b="0" dirty="0"/>
+              <a:rPr lang="ko-KR" altLang="en-US" sz="1800" dirty="0"/>
               <a:t>명령문의 끝을 나타내는 기호</a:t>
             </a:r>
             <a:endParaRPr lang="ko-KR" altLang="en-US" sz="2000" dirty="0"/>
@@ -4171,14 +4184,13 @@
           <a:lstStyle/>
           <a:p>
             <a:r>
-              <a:rPr lang="en-US" altLang="ko-KR" b="0" dirty="0"/>
+              <a:rPr lang="en-US" altLang="ko-KR" dirty="0"/>
               <a:t>2.5 </a:t>
             </a:r>
             <a:r>
-              <a:rPr lang="ko-KR" altLang="en-US" b="0" dirty="0"/>
+              <a:rPr lang="ko-KR" altLang="en-US" dirty="0"/>
               <a:t>컴파일과 빌드</a:t>
             </a:r>
-            <a:endParaRPr lang="ko-KR" altLang="en-US" dirty="0"/>
           </a:p>
         </p:txBody>
       </p:sp>
@@ -4204,74 +4216,74 @@
           <a:lstStyle/>
           <a:p>
             <a:r>
-              <a:rPr lang="ko-KR" altLang="en-US" b="0" dirty="0"/>
+              <a:rPr lang="ko-KR" altLang="en-US" dirty="0"/>
               <a:t>넓은 의미의 컴파일</a:t>
             </a:r>
-            <a:endParaRPr lang="en-US" altLang="ko-KR" b="0" dirty="0"/>
+            <a:endParaRPr lang="en-US" altLang="ko-KR" dirty="0"/>
           </a:p>
           <a:p>
             <a:pPr lvl="1"/>
             <a:r>
-              <a:rPr lang="ko-KR" altLang="en-US" b="0" dirty="0"/>
+              <a:rPr lang="ko-KR" altLang="en-US" dirty="0"/>
               <a:t>전처리 → 컴파일 → 링크 → 실행 파일 생성</a:t>
             </a:r>
-            <a:endParaRPr lang="en-US" altLang="ko-KR" b="0" dirty="0"/>
+            <a:endParaRPr lang="en-US" altLang="ko-KR" dirty="0"/>
           </a:p>
           <a:p>
             <a:pPr lvl="1"/>
             <a:r>
-              <a:rPr lang="ko-KR" altLang="en-US" b="0" dirty="0"/>
+              <a:rPr lang="ko-KR" altLang="en-US" dirty="0"/>
               <a:t>전체 빌드 과정</a:t>
             </a:r>
-            <a:endParaRPr lang="en-US" altLang="ko-KR" b="0" dirty="0"/>
+            <a:endParaRPr lang="en-US" altLang="ko-KR" dirty="0"/>
           </a:p>
           <a:p>
             <a:pPr marL="457200" lvl="1" indent="0">
               <a:buNone/>
             </a:pPr>
-            <a:endParaRPr lang="en-US" altLang="ko-KR" b="0" dirty="0"/>
-          </a:p>
-          <a:p>
-            <a:r>
-              <a:rPr lang="ko-KR" altLang="en-US" b="0" dirty="0"/>
+            <a:endParaRPr lang="en-US" altLang="ko-KR" dirty="0"/>
+          </a:p>
+          <a:p>
+            <a:r>
+              <a:rPr lang="ko-KR" altLang="en-US" dirty="0"/>
               <a:t>좁은 의미의 컴파일</a:t>
             </a:r>
-            <a:endParaRPr lang="en-US" altLang="ko-KR" b="0" dirty="0"/>
+            <a:endParaRPr lang="en-US" altLang="ko-KR" dirty="0"/>
           </a:p>
           <a:p>
             <a:pPr lvl="1"/>
             <a:r>
-              <a:rPr lang="ko-KR" altLang="en-US" b="0" dirty="0"/>
+              <a:rPr lang="ko-KR" altLang="en-US" dirty="0"/>
               <a:t>전처리 →</a:t>
             </a:r>
             <a:r>
-              <a:rPr lang="en-US" altLang="ko-KR" b="0" dirty="0">
+              <a:rPr lang="en-US" altLang="ko-KR" dirty="0">
                 <a:sym typeface="Wingdings" panose="05000000000000000000" pitchFamily="2" charset="2"/>
               </a:rPr>
               <a:t> </a:t>
             </a:r>
             <a:r>
-              <a:rPr lang="ko-KR" altLang="en-US" b="0" dirty="0">
+              <a:rPr lang="ko-KR" altLang="en-US" dirty="0">
                 <a:sym typeface="Wingdings" panose="05000000000000000000" pitchFamily="2" charset="2"/>
               </a:rPr>
               <a:t>컴파일 </a:t>
             </a:r>
             <a:r>
-              <a:rPr lang="ko-KR" altLang="en-US" b="0" dirty="0"/>
+              <a:rPr lang="ko-KR" altLang="en-US" dirty="0"/>
               <a:t>→</a:t>
             </a:r>
             <a:r>
-              <a:rPr lang="en-US" altLang="ko-KR" b="0" dirty="0">
+              <a:rPr lang="en-US" altLang="ko-KR" dirty="0">
                 <a:sym typeface="Wingdings" panose="05000000000000000000" pitchFamily="2" charset="2"/>
               </a:rPr>
               <a:t> </a:t>
             </a:r>
             <a:r>
-              <a:rPr lang="ko-KR" altLang="en-US" b="0" dirty="0"/>
+              <a:rPr lang="ko-KR" altLang="en-US" dirty="0"/>
               <a:t>기계어 목적 파일</a:t>
             </a:r>
             <a:r>
-              <a:rPr lang="en-US" altLang="ko-KR" b="0" dirty="0"/>
+              <a:rPr lang="en-US" altLang="ko-KR" dirty="0"/>
               <a:t>(.obj)</a:t>
             </a:r>
             <a:endParaRPr lang="ko-KR" altLang="en-US" dirty="0"/>
@@ -4367,14 +4379,13 @@
           <a:lstStyle/>
           <a:p>
             <a:r>
-              <a:rPr lang="en-US" altLang="ko-KR" b="0" dirty="0"/>
+              <a:rPr lang="en-US" altLang="ko-KR" dirty="0"/>
               <a:t>2.5 </a:t>
             </a:r>
             <a:r>
-              <a:rPr lang="ko-KR" altLang="en-US" b="0" dirty="0"/>
+              <a:rPr lang="ko-KR" altLang="en-US" dirty="0"/>
               <a:t>컴파일과 빌드</a:t>
             </a:r>
-            <a:endParaRPr lang="ko-KR" altLang="en-US" dirty="0"/>
           </a:p>
         </p:txBody>
       </p:sp>
@@ -4400,10 +4411,9 @@
           <a:lstStyle/>
           <a:p>
             <a:r>
-              <a:rPr lang="ko-KR" altLang="en-US" b="0" dirty="0"/>
+              <a:rPr lang="ko-KR" altLang="en-US" dirty="0"/>
               <a:t>프로그램 빌드 과정</a:t>
             </a:r>
-            <a:endParaRPr lang="ko-KR" altLang="en-US" dirty="0"/>
           </a:p>
         </p:txBody>
       </p:sp>
@@ -4532,22 +4542,21 @@
           <a:lstStyle/>
           <a:p>
             <a:r>
-              <a:rPr lang="en-US" altLang="ko-KR" b="0" dirty="0"/>
+              <a:rPr lang="en-US" altLang="ko-KR" dirty="0"/>
               <a:t>2.5.1 </a:t>
             </a:r>
             <a:r>
-              <a:rPr lang="ko-KR" altLang="en-US" b="0" dirty="0"/>
+              <a:rPr lang="ko-KR" altLang="en-US" dirty="0"/>
               <a:t>전처리</a:t>
             </a:r>
             <a:r>
-              <a:rPr lang="en-US" altLang="ko-KR" b="0" dirty="0"/>
+              <a:rPr lang="en-US" altLang="ko-KR" dirty="0"/>
               <a:t>(Preprocessing) </a:t>
             </a:r>
             <a:r>
-              <a:rPr lang="ko-KR" altLang="en-US" b="0" dirty="0"/>
+              <a:rPr lang="ko-KR" altLang="en-US" dirty="0"/>
               <a:t>단계</a:t>
             </a:r>
-            <a:endParaRPr lang="ko-KR" altLang="en-US" dirty="0"/>
           </a:p>
         </p:txBody>
       </p:sp>
@@ -4573,10 +4582,10 @@
           <a:lstStyle/>
           <a:p>
             <a:r>
-              <a:rPr lang="ko-KR" altLang="en-US" sz="2000" b="0" dirty="0"/>
+              <a:rPr lang="ko-KR" altLang="en-US" sz="2000" dirty="0"/>
               <a:t>전처리문</a:t>
             </a:r>
-            <a:endParaRPr lang="en-US" altLang="ko-KR" sz="2000" b="0" dirty="0"/>
+            <a:endParaRPr lang="en-US" altLang="ko-KR" sz="2000" dirty="0"/>
           </a:p>
           <a:p>
             <a:pPr lvl="1"/>
@@ -4589,145 +4598,145 @@
               <a:t>"#"</a:t>
             </a:r>
             <a:r>
-              <a:rPr lang="en-US" altLang="ko-KR" sz="1800" b="0" dirty="0"/>
+              <a:rPr lang="en-US" altLang="ko-KR" sz="1800" dirty="0"/>
               <a:t> </a:t>
             </a:r>
             <a:r>
-              <a:rPr lang="ko-KR" altLang="en-US" sz="1800" b="0" dirty="0"/>
+              <a:rPr lang="ko-KR" altLang="en-US" sz="1800" dirty="0"/>
               <a:t>으로</a:t>
             </a:r>
             <a:r>
-              <a:rPr lang="en-US" altLang="ko-KR" sz="1800" b="0" dirty="0"/>
+              <a:rPr lang="en-US" altLang="ko-KR" sz="1800" dirty="0"/>
               <a:t> </a:t>
             </a:r>
             <a:r>
-              <a:rPr lang="ko-KR" altLang="en-US" sz="1800" b="0" dirty="0"/>
+              <a:rPr lang="ko-KR" altLang="en-US" sz="1800" dirty="0"/>
               <a:t>시작</a:t>
             </a:r>
             <a:r>
-              <a:rPr lang="en-US" altLang="ko-KR" sz="1800" b="0" dirty="0"/>
+              <a:rPr lang="en-US" altLang="ko-KR" sz="1800" dirty="0"/>
               <a:t>. Directive</a:t>
             </a:r>
           </a:p>
           <a:p>
             <a:pPr lvl="1"/>
-            <a:endParaRPr lang="en-US" altLang="ko-KR" sz="2000" b="0" dirty="0"/>
-          </a:p>
-          <a:p>
-            <a:r>
-              <a:rPr lang="en-US" altLang="ko-KR" sz="2000" b="0" dirty="0"/>
+            <a:endParaRPr lang="en-US" altLang="ko-KR" sz="2000" dirty="0"/>
+          </a:p>
+          <a:p>
+            <a:r>
+              <a:rPr lang="en-US" altLang="ko-KR" sz="2000" dirty="0"/>
               <a:t>#include </a:t>
             </a:r>
             <a:r>
-              <a:rPr lang="ko-KR" altLang="en-US" sz="2000" b="0" dirty="0"/>
+              <a:rPr lang="ko-KR" altLang="en-US" sz="2000" dirty="0"/>
               <a:t>처리</a:t>
             </a:r>
-            <a:endParaRPr lang="en-US" altLang="ko-KR" sz="2000" b="0" dirty="0"/>
+            <a:endParaRPr lang="en-US" altLang="ko-KR" sz="2000" dirty="0"/>
           </a:p>
           <a:p>
             <a:pPr lvl="1"/>
             <a:r>
-              <a:rPr lang="ko-KR" altLang="en-US" sz="1800" b="0" dirty="0"/>
+              <a:rPr lang="ko-KR" altLang="en-US" sz="1800" dirty="0"/>
               <a:t>지정된 헤더 파일의 내용을 현재 소스 코드에 삽입</a:t>
             </a:r>
-            <a:endParaRPr lang="en-US" altLang="ko-KR" sz="1800" b="0" dirty="0"/>
+            <a:endParaRPr lang="en-US" altLang="ko-KR" sz="1800" dirty="0"/>
           </a:p>
           <a:p>
             <a:pPr lvl="2"/>
-            <a:endParaRPr lang="en-US" altLang="ko-KR" sz="1400" b="0" dirty="0"/>
-          </a:p>
-          <a:p>
-            <a:r>
-              <a:rPr lang="ko-KR" altLang="en-US" sz="2000" b="0" dirty="0"/>
+            <a:endParaRPr lang="en-US" altLang="ko-KR" sz="1400" dirty="0"/>
+          </a:p>
+          <a:p>
+            <a:r>
+              <a:rPr lang="ko-KR" altLang="en-US" sz="2000" dirty="0"/>
               <a:t>매크로 확장</a:t>
             </a:r>
             <a:r>
-              <a:rPr lang="en-US" altLang="ko-KR" sz="2000" b="0" dirty="0"/>
+              <a:rPr lang="en-US" altLang="ko-KR" sz="2000" dirty="0"/>
               <a:t>(#define)</a:t>
             </a:r>
           </a:p>
           <a:p>
             <a:pPr lvl="1"/>
             <a:r>
-              <a:rPr lang="ko-KR" altLang="en-US" sz="1800" b="0" dirty="0"/>
+              <a:rPr lang="ko-KR" altLang="en-US" sz="1800" dirty="0"/>
               <a:t>정의된 매크로를 실제 값이나 코드 형태로 치환</a:t>
             </a:r>
-            <a:endParaRPr lang="en-US" altLang="ko-KR" sz="1800" b="0" dirty="0"/>
+            <a:endParaRPr lang="en-US" altLang="ko-KR" sz="1800" dirty="0"/>
           </a:p>
           <a:p>
             <a:pPr lvl="2"/>
-            <a:endParaRPr lang="en-US" altLang="ko-KR" sz="1400" b="0" dirty="0"/>
-          </a:p>
-          <a:p>
-            <a:r>
-              <a:rPr lang="ko-KR" altLang="en-US" sz="2000" b="0" dirty="0"/>
+            <a:endParaRPr lang="en-US" altLang="ko-KR" sz="1400" dirty="0"/>
+          </a:p>
+          <a:p>
+            <a:r>
+              <a:rPr lang="ko-KR" altLang="en-US" sz="2000" dirty="0"/>
               <a:t>조건부 컴파일</a:t>
             </a:r>
             <a:r>
-              <a:rPr lang="en-US" altLang="ko-KR" sz="2000" b="0" dirty="0"/>
+              <a:rPr lang="en-US" altLang="ko-KR" sz="2000" dirty="0"/>
               <a:t>(#if, #ifdef, #ifndef, #elif)</a:t>
             </a:r>
           </a:p>
           <a:p>
             <a:pPr lvl="1"/>
             <a:r>
-              <a:rPr lang="ko-KR" altLang="en-US" sz="1800" b="0" dirty="0"/>
+              <a:rPr lang="ko-KR" altLang="en-US" sz="1800" dirty="0"/>
               <a:t>지정된 조건에 따라 특정 코드 블록을 포함 또는 제외</a:t>
             </a:r>
-            <a:endParaRPr lang="en-US" altLang="ko-KR" sz="1800" b="0" dirty="0"/>
+            <a:endParaRPr lang="en-US" altLang="ko-KR" sz="1800" dirty="0"/>
           </a:p>
           <a:p>
             <a:pPr lvl="2"/>
-            <a:endParaRPr lang="en-US" altLang="ko-KR" sz="1400" b="0" dirty="0"/>
-          </a:p>
-          <a:p>
-            <a:r>
-              <a:rPr lang="ko-KR" altLang="en-US" sz="2000" b="0" dirty="0"/>
+            <a:endParaRPr lang="en-US" altLang="ko-KR" sz="1400" dirty="0"/>
+          </a:p>
+          <a:p>
+            <a:r>
+              <a:rPr lang="ko-KR" altLang="en-US" sz="2000" dirty="0"/>
               <a:t>주석 제거</a:t>
             </a:r>
-            <a:endParaRPr lang="en-US" altLang="ko-KR" sz="2000" b="0" dirty="0"/>
+            <a:endParaRPr lang="en-US" altLang="ko-KR" sz="2000" dirty="0"/>
           </a:p>
           <a:p>
             <a:pPr lvl="1"/>
             <a:r>
-              <a:rPr lang="ko-KR" altLang="en-US" sz="1800" b="0" dirty="0"/>
+              <a:rPr lang="ko-KR" altLang="en-US" sz="1800" dirty="0"/>
               <a:t>주석 삭제</a:t>
             </a:r>
-            <a:endParaRPr lang="en-US" altLang="ko-KR" sz="1800" b="0" dirty="0"/>
+            <a:endParaRPr lang="en-US" altLang="ko-KR" sz="1800" dirty="0"/>
           </a:p>
           <a:p>
             <a:pPr lvl="2"/>
-            <a:endParaRPr lang="en-US" altLang="ko-KR" sz="1400" b="0" dirty="0"/>
-          </a:p>
-          <a:p>
-            <a:r>
-              <a:rPr lang="ko-KR" altLang="en-US" sz="2000" b="0" dirty="0"/>
+            <a:endParaRPr lang="en-US" altLang="ko-KR" sz="1400" dirty="0"/>
+          </a:p>
+          <a:p>
+            <a:r>
+              <a:rPr lang="ko-KR" altLang="en-US" sz="2000" dirty="0"/>
               <a:t>기타 지시문 처리</a:t>
             </a:r>
             <a:r>
-              <a:rPr lang="en-US" altLang="ko-KR" sz="2000" b="0" dirty="0"/>
+              <a:rPr lang="en-US" altLang="ko-KR" sz="2000" dirty="0"/>
               <a:t>(#pragma, #line </a:t>
             </a:r>
             <a:r>
-              <a:rPr lang="ko-KR" altLang="en-US" sz="2000" b="0" dirty="0"/>
+              <a:rPr lang="ko-KR" altLang="en-US" sz="2000" dirty="0"/>
               <a:t>등</a:t>
             </a:r>
             <a:r>
-              <a:rPr lang="en-US" altLang="ko-KR" sz="2000" b="0" dirty="0"/>
+              <a:rPr lang="en-US" altLang="ko-KR" sz="2000" dirty="0"/>
               <a:t>)</a:t>
             </a:r>
           </a:p>
           <a:p>
             <a:pPr lvl="1"/>
             <a:r>
-              <a:rPr lang="ko-KR" altLang="en-US" sz="1800" b="0" dirty="0"/>
+              <a:rPr lang="ko-KR" altLang="en-US" sz="1800" dirty="0"/>
               <a:t>컴파일러에 전달할 추가 지시나 설정을 처리</a:t>
             </a:r>
-            <a:endParaRPr lang="en-US" altLang="ko-KR" sz="1800" b="0" dirty="0"/>
+            <a:endParaRPr lang="en-US" altLang="ko-KR" sz="1800" dirty="0"/>
           </a:p>
           <a:p>
             <a:pPr lvl="2"/>
-            <a:endParaRPr lang="en-US" altLang="ko-KR" sz="1600" b="0" dirty="0"/>
+            <a:endParaRPr lang="en-US" altLang="ko-KR" sz="1600" dirty="0"/>
           </a:p>
         </p:txBody>
       </p:sp>
@@ -4820,22 +4829,21 @@
           <a:lstStyle/>
           <a:p>
             <a:r>
-              <a:rPr lang="en-US" altLang="ko-KR" b="0" dirty="0"/>
+              <a:rPr lang="en-US" altLang="ko-KR" dirty="0"/>
               <a:t>2.5.1 </a:t>
             </a:r>
             <a:r>
-              <a:rPr lang="ko-KR" altLang="en-US" b="0" dirty="0"/>
+              <a:rPr lang="ko-KR" altLang="en-US" dirty="0"/>
               <a:t>전처리</a:t>
             </a:r>
             <a:r>
-              <a:rPr lang="en-US" altLang="ko-KR" b="0" dirty="0"/>
+              <a:rPr lang="en-US" altLang="ko-KR" dirty="0"/>
               <a:t>(Preprocessing) </a:t>
             </a:r>
             <a:r>
-              <a:rPr lang="ko-KR" altLang="en-US" b="0" dirty="0"/>
+              <a:rPr lang="ko-KR" altLang="en-US" dirty="0"/>
               <a:t>단계</a:t>
             </a:r>
-            <a:endParaRPr lang="ko-KR" altLang="en-US" dirty="0"/>
           </a:p>
         </p:txBody>
       </p:sp>
@@ -4861,46 +4869,46 @@
           <a:lstStyle/>
           <a:p>
             <a:r>
-              <a:rPr lang="en-US" altLang="ko-KR" b="0" dirty="0"/>
+              <a:rPr lang="en-US" altLang="ko-KR" dirty="0"/>
               <a:t>Visual Studio</a:t>
             </a:r>
             <a:r>
-              <a:rPr lang="ko-KR" altLang="en-US" b="0" dirty="0"/>
+              <a:rPr lang="ko-KR" altLang="en-US" dirty="0"/>
               <a:t>에서 전처리 결과 확인</a:t>
             </a:r>
-            <a:endParaRPr lang="en-US" altLang="ko-KR" b="0" dirty="0"/>
+            <a:endParaRPr lang="en-US" altLang="ko-KR" dirty="0"/>
           </a:p>
           <a:p>
             <a:pPr lvl="1"/>
             <a:r>
-              <a:rPr lang="ko-KR" altLang="en-US" b="0" dirty="0"/>
+              <a:rPr lang="ko-KR" altLang="en-US" dirty="0"/>
               <a:t>프로젝트 속성 → </a:t>
             </a:r>
             <a:r>
-              <a:rPr lang="en-US" altLang="ko-KR" b="0" dirty="0"/>
+              <a:rPr lang="en-US" altLang="ko-KR" dirty="0"/>
               <a:t>C/C++ → </a:t>
             </a:r>
             <a:r>
-              <a:rPr lang="ko-KR" altLang="en-US" b="0" dirty="0"/>
+              <a:rPr lang="ko-KR" altLang="en-US" dirty="0"/>
               <a:t>전처리기 →</a:t>
             </a:r>
             <a:br>
-              <a:rPr lang="en-US" altLang="ko-KR" b="0" dirty="0"/>
+              <a:rPr lang="en-US" altLang="ko-KR" dirty="0"/>
             </a:br>
             <a:r>
-              <a:rPr lang="ko-KR" altLang="en-US" b="0" dirty="0"/>
+              <a:rPr lang="ko-KR" altLang="en-US" dirty="0"/>
               <a:t>파일로 전처리 </a:t>
             </a:r>
             <a:r>
-              <a:rPr lang="en-US" altLang="ko-KR" b="0" dirty="0"/>
+              <a:rPr lang="en-US" altLang="ko-KR" dirty="0"/>
               <a:t>(Preprocess to a File) → </a:t>
             </a:r>
             <a:r>
-              <a:rPr lang="ko-KR" altLang="en-US" b="0" dirty="0"/>
+              <a:rPr lang="ko-KR" altLang="en-US" dirty="0"/>
               <a:t>예</a:t>
             </a:r>
             <a:r>
-              <a:rPr lang="en-US" altLang="ko-KR" b="0" dirty="0"/>
+              <a:rPr lang="en-US" altLang="ko-KR" dirty="0"/>
               <a:t>(/P)</a:t>
             </a:r>
           </a:p>
@@ -5146,22 +5154,21 @@
           <a:lstStyle/>
           <a:p>
             <a:r>
-              <a:rPr lang="en-US" altLang="ko-KR" b="0" dirty="0"/>
+              <a:rPr lang="en-US" altLang="ko-KR" dirty="0"/>
               <a:t>2.5.1 </a:t>
             </a:r>
             <a:r>
-              <a:rPr lang="ko-KR" altLang="en-US" b="0" dirty="0"/>
+              <a:rPr lang="ko-KR" altLang="en-US" dirty="0"/>
               <a:t>전처리</a:t>
             </a:r>
             <a:r>
-              <a:rPr lang="en-US" altLang="ko-KR" b="0" dirty="0"/>
+              <a:rPr lang="en-US" altLang="ko-KR" dirty="0"/>
               <a:t>(Preprocessing) </a:t>
             </a:r>
             <a:r>
-              <a:rPr lang="ko-KR" altLang="en-US" b="0" dirty="0"/>
+              <a:rPr lang="ko-KR" altLang="en-US" dirty="0"/>
               <a:t>단계</a:t>
             </a:r>
-            <a:endParaRPr lang="ko-KR" altLang="en-US" dirty="0"/>
           </a:p>
         </p:txBody>
       </p:sp>
@@ -5187,10 +5194,10 @@
           <a:lstStyle/>
           <a:p>
             <a:r>
-              <a:rPr lang="ko-KR" altLang="en-US" b="0" dirty="0"/>
+              <a:rPr lang="ko-KR" altLang="en-US" dirty="0"/>
               <a:t>전처리 전후 비교</a:t>
             </a:r>
-            <a:endParaRPr lang="en-US" altLang="ko-KR" b="0" dirty="0"/>
+            <a:endParaRPr lang="en-US" altLang="ko-KR" dirty="0"/>
           </a:p>
         </p:txBody>
       </p:sp>
@@ -5448,22 +5455,21 @@
           <a:lstStyle/>
           <a:p>
             <a:r>
-              <a:rPr lang="en-US" altLang="ko-KR" b="0" dirty="0"/>
+              <a:rPr lang="en-US" altLang="ko-KR" dirty="0"/>
               <a:t>2.5.2 </a:t>
             </a:r>
             <a:r>
-              <a:rPr lang="ko-KR" altLang="en-US" b="0" dirty="0"/>
+              <a:rPr lang="ko-KR" altLang="en-US" dirty="0"/>
               <a:t>컴파일</a:t>
             </a:r>
             <a:r>
-              <a:rPr lang="en-US" altLang="ko-KR" b="0" dirty="0"/>
+              <a:rPr lang="en-US" altLang="ko-KR" dirty="0"/>
               <a:t>(Compilation) </a:t>
             </a:r>
             <a:r>
-              <a:rPr lang="ko-KR" altLang="en-US" b="0" dirty="0"/>
+              <a:rPr lang="ko-KR" altLang="en-US" dirty="0"/>
               <a:t>과정</a:t>
             </a:r>
-            <a:endParaRPr lang="ko-KR" altLang="en-US" dirty="0"/>
           </a:p>
         </p:txBody>
       </p:sp>
@@ -5489,114 +5495,114 @@
           <a:lstStyle/>
           <a:p>
             <a:r>
-              <a:rPr lang="ko-KR" altLang="en-US" b="0" dirty="0"/>
+              <a:rPr lang="ko-KR" altLang="en-US" dirty="0"/>
               <a:t>중간 표현</a:t>
             </a:r>
             <a:r>
-              <a:rPr lang="en-US" altLang="ko-KR" b="0" dirty="0"/>
+              <a:rPr lang="en-US" altLang="ko-KR" dirty="0"/>
               <a:t>(Intermediate Representation, IR)</a:t>
             </a:r>
           </a:p>
           <a:p>
             <a:pPr lvl="1"/>
             <a:r>
-              <a:rPr lang="ko-KR" altLang="en-US" b="0" dirty="0"/>
+              <a:rPr lang="ko-KR" altLang="en-US" dirty="0"/>
               <a:t>최적화를 위해 사용하는 내부 코드 표현</a:t>
             </a:r>
           </a:p>
           <a:p>
-            <a:endParaRPr lang="ko-KR" altLang="en-US" b="0" dirty="0"/>
-          </a:p>
-          <a:p>
-            <a:r>
-              <a:rPr lang="ko-KR" altLang="en-US" b="0" dirty="0"/>
+            <a:endParaRPr lang="ko-KR" altLang="en-US" dirty="0"/>
+          </a:p>
+          <a:p>
+            <a:r>
+              <a:rPr lang="ko-KR" altLang="en-US" dirty="0"/>
               <a:t>최적화</a:t>
             </a:r>
             <a:r>
-              <a:rPr lang="en-US" altLang="ko-KR" b="0" dirty="0"/>
+              <a:rPr lang="en-US" altLang="ko-KR" dirty="0"/>
               <a:t>(Optimization)</a:t>
             </a:r>
           </a:p>
           <a:p>
             <a:pPr lvl="1"/>
             <a:r>
-              <a:rPr lang="ko-KR" altLang="en-US" b="0" dirty="0"/>
+              <a:rPr lang="ko-KR" altLang="en-US" dirty="0"/>
               <a:t>불필요한 연산 제거 및 코드 개선</a:t>
             </a:r>
-            <a:endParaRPr lang="en-US" altLang="ko-KR" b="0" dirty="0"/>
+            <a:endParaRPr lang="en-US" altLang="ko-KR" dirty="0"/>
           </a:p>
           <a:p>
             <a:pPr lvl="1"/>
             <a:r>
-              <a:rPr lang="ko-KR" altLang="en-US" b="0" dirty="0"/>
+              <a:rPr lang="ko-KR" altLang="en-US" dirty="0"/>
               <a:t>최적화 옵션</a:t>
             </a:r>
-            <a:endParaRPr lang="en-US" altLang="ko-KR" b="0" dirty="0"/>
+            <a:endParaRPr lang="en-US" altLang="ko-KR" dirty="0"/>
           </a:p>
           <a:p>
             <a:pPr marL="914400" lvl="2" indent="0">
               <a:buNone/>
             </a:pPr>
             <a:r>
-              <a:rPr lang="en-US" altLang="ko-KR" b="0" dirty="0">
+              <a:rPr lang="en-US" altLang="ko-KR" dirty="0">
                 <a:latin typeface="Consolas" panose="020B0609020204030204" pitchFamily="49" charset="0"/>
               </a:rPr>
               <a:t>-O0(/Od) </a:t>
             </a:r>
             <a:r>
-              <a:rPr lang="ko-KR" altLang="en-US" b="0" dirty="0">
+              <a:rPr lang="ko-KR" altLang="en-US" dirty="0">
                 <a:latin typeface="Consolas" panose="020B0609020204030204" pitchFamily="49" charset="0"/>
               </a:rPr>
               <a:t>디버깅용</a:t>
             </a:r>
             <a:br>
-              <a:rPr lang="en-US" altLang="ko-KR" b="0" dirty="0">
+              <a:rPr lang="en-US" altLang="ko-KR" dirty="0">
                 <a:latin typeface="Consolas" panose="020B0609020204030204" pitchFamily="49" charset="0"/>
               </a:rPr>
             </a:br>
             <a:r>
-              <a:rPr lang="en-US" altLang="ko-KR" b="0" dirty="0">
+              <a:rPr lang="en-US" altLang="ko-KR" dirty="0">
                 <a:latin typeface="Consolas" panose="020B0609020204030204" pitchFamily="49" charset="0"/>
               </a:rPr>
               <a:t>-O1(/O1) </a:t>
             </a:r>
             <a:r>
-              <a:rPr lang="ko-KR" altLang="en-US" b="0" dirty="0">
+              <a:rPr lang="ko-KR" altLang="en-US" dirty="0">
                 <a:latin typeface="Consolas" panose="020B0609020204030204" pitchFamily="49" charset="0"/>
               </a:rPr>
               <a:t>기본 최적화</a:t>
             </a:r>
             <a:br>
-              <a:rPr lang="en-US" altLang="ko-KR" b="0" dirty="0">
+              <a:rPr lang="en-US" altLang="ko-KR" dirty="0">
                 <a:latin typeface="Consolas" panose="020B0609020204030204" pitchFamily="49" charset="0"/>
               </a:rPr>
             </a:br>
             <a:r>
-              <a:rPr lang="en-US" altLang="ko-KR" b="0" dirty="0">
+              <a:rPr lang="en-US" altLang="ko-KR" dirty="0">
                 <a:latin typeface="Consolas" panose="020B0609020204030204" pitchFamily="49" charset="0"/>
               </a:rPr>
               <a:t>-O2(/O2) </a:t>
             </a:r>
             <a:r>
-              <a:rPr lang="ko-KR" altLang="en-US" b="0" dirty="0">
+              <a:rPr lang="ko-KR" altLang="en-US" dirty="0">
                 <a:latin typeface="Consolas" panose="020B0609020204030204" pitchFamily="49" charset="0"/>
               </a:rPr>
               <a:t>속도 최적화</a:t>
             </a:r>
             <a:r>
-              <a:rPr lang="en-US" altLang="ko-KR" b="0" dirty="0">
+              <a:rPr lang="en-US" altLang="ko-KR" dirty="0">
                 <a:latin typeface="Consolas" panose="020B0609020204030204" pitchFamily="49" charset="0"/>
               </a:rPr>
               <a:t>(</a:t>
             </a:r>
             <a:r>
-              <a:rPr lang="ko-KR" altLang="en-US" b="0" dirty="0">
+              <a:rPr lang="ko-KR" altLang="en-US" dirty="0">
                 <a:latin typeface="Consolas" panose="020B0609020204030204" pitchFamily="49" charset="0"/>
               </a:rPr>
               <a:t>릴리즈 빌드</a:t>
             </a:r>
             <a:r>
-              <a:rPr lang="en-US" altLang="ko-KR" b="0" dirty="0">
+              <a:rPr lang="en-US" altLang="ko-KR" dirty="0">
                 <a:latin typeface="Consolas" panose="020B0609020204030204" pitchFamily="49" charset="0"/>
               </a:rPr>
               <a:t>)</a:t>
@@ -5606,45 +5612,44 @@
             <a:pPr marL="914400" lvl="2" indent="0">
               <a:buNone/>
             </a:pPr>
-            <a:endParaRPr lang="ko-KR" altLang="en-US" b="0" dirty="0"/>
-          </a:p>
-          <a:p>
-            <a:r>
-              <a:rPr lang="ko-KR" altLang="en-US" b="0" dirty="0"/>
+            <a:endParaRPr lang="ko-KR" altLang="en-US" dirty="0"/>
+          </a:p>
+          <a:p>
+            <a:r>
+              <a:rPr lang="ko-KR" altLang="en-US" dirty="0"/>
               <a:t>기계어 변환</a:t>
             </a:r>
             <a:r>
-              <a:rPr lang="en-US" altLang="ko-KR" b="0" dirty="0"/>
+              <a:rPr lang="en-US" altLang="ko-KR" dirty="0"/>
               <a:t>(Code Generation)</a:t>
             </a:r>
           </a:p>
           <a:p>
             <a:pPr lvl="1"/>
             <a:r>
-              <a:rPr lang="en-US" altLang="ko-KR" b="0" dirty="0"/>
+              <a:rPr lang="en-US" altLang="ko-KR" dirty="0"/>
               <a:t>CPU </a:t>
             </a:r>
             <a:r>
-              <a:rPr lang="ko-KR" altLang="en-US" b="0" dirty="0"/>
+              <a:rPr lang="ko-KR" altLang="en-US" dirty="0"/>
               <a:t>아키텍처</a:t>
             </a:r>
             <a:r>
-              <a:rPr lang="en-US" altLang="ko-KR" b="0" dirty="0"/>
+              <a:rPr lang="en-US" altLang="ko-KR" dirty="0"/>
               <a:t>(x86, ARM </a:t>
             </a:r>
             <a:r>
-              <a:rPr lang="ko-KR" altLang="en-US" b="0" dirty="0"/>
+              <a:rPr lang="ko-KR" altLang="en-US" dirty="0"/>
               <a:t>등</a:t>
             </a:r>
             <a:r>
-              <a:rPr lang="en-US" altLang="ko-KR" b="0" dirty="0"/>
+              <a:rPr lang="en-US" altLang="ko-KR" dirty="0"/>
               <a:t>)</a:t>
             </a:r>
             <a:r>
-              <a:rPr lang="ko-KR" altLang="en-US" b="0" dirty="0"/>
+              <a:rPr lang="ko-KR" altLang="en-US" dirty="0"/>
               <a:t>에 맞는 기계어 생성</a:t>
             </a:r>
-            <a:endParaRPr lang="ko-KR" altLang="en-US" dirty="0"/>
           </a:p>
         </p:txBody>
       </p:sp>
@@ -5731,15 +5736,15 @@
           <a:lstStyle/>
           <a:p>
             <a:r>
-              <a:rPr lang="en-US" altLang="ko-KR" b="0" dirty="0"/>
+              <a:rPr lang="en-US" altLang="ko-KR" dirty="0"/>
               <a:t>2.5.3 </a:t>
             </a:r>
             <a:r>
-              <a:rPr lang="ko-KR" altLang="en-US" b="0" dirty="0"/>
+              <a:rPr lang="ko-KR" altLang="en-US" dirty="0"/>
               <a:t>링킹</a:t>
             </a:r>
             <a:r>
-              <a:rPr lang="en-US" altLang="ko-KR" b="0" dirty="0"/>
+              <a:rPr lang="en-US" altLang="ko-KR" dirty="0"/>
               <a:t>(Linking)</a:t>
             </a:r>
             <a:endParaRPr lang="ko-KR" altLang="en-US" dirty="0"/>
@@ -5768,191 +5773,191 @@
           <a:lstStyle/>
           <a:p>
             <a:r>
-              <a:rPr lang="ko-KR" altLang="en-US" sz="2000" b="0" dirty="0"/>
+              <a:rPr lang="ko-KR" altLang="en-US" sz="2000" dirty="0"/>
               <a:t>링커</a:t>
             </a:r>
             <a:r>
-              <a:rPr lang="en-US" altLang="ko-KR" sz="2000" b="0" dirty="0"/>
+              <a:rPr lang="en-US" altLang="ko-KR" sz="2000" dirty="0"/>
               <a:t>(Linker)</a:t>
             </a:r>
           </a:p>
           <a:p>
             <a:pPr lvl="1"/>
             <a:r>
-              <a:rPr lang="ko-KR" altLang="en-US" sz="1800" b="0" dirty="0">
+              <a:rPr lang="ko-KR" altLang="en-US" sz="1800" dirty="0">
                 <a:latin typeface="+mn-ea"/>
               </a:rPr>
               <a:t>목적 파일</a:t>
             </a:r>
             <a:r>
-              <a:rPr lang="en-US" altLang="ko-KR" sz="1800" b="0" dirty="0">
+              <a:rPr lang="en-US" altLang="ko-KR" sz="1800" dirty="0">
                 <a:latin typeface="+mn-ea"/>
               </a:rPr>
               <a:t>(.obj) + </a:t>
             </a:r>
             <a:r>
-              <a:rPr lang="ko-KR" altLang="en-US" sz="1800" b="0" dirty="0">
+              <a:rPr lang="ko-KR" altLang="en-US" sz="1800" dirty="0">
                 <a:latin typeface="+mn-ea"/>
               </a:rPr>
               <a:t>정적 라이브러리 결합 </a:t>
             </a:r>
             <a:r>
-              <a:rPr lang="ko-KR" altLang="en-US" sz="1800" b="0" dirty="0"/>
+              <a:rPr lang="ko-KR" altLang="en-US" sz="1800" dirty="0"/>
               <a:t>→</a:t>
             </a:r>
             <a:r>
-              <a:rPr lang="en-US" altLang="ko-KR" sz="1800" b="0" dirty="0">
+              <a:rPr lang="en-US" altLang="ko-KR" sz="1800" dirty="0">
                 <a:latin typeface="+mn-ea"/>
               </a:rPr>
               <a:t> </a:t>
             </a:r>
             <a:r>
-              <a:rPr lang="ko-KR" altLang="en-US" sz="1800" b="0" dirty="0">
+              <a:rPr lang="ko-KR" altLang="en-US" sz="1800" dirty="0">
                 <a:latin typeface="+mn-ea"/>
               </a:rPr>
               <a:t>실행 프로그램</a:t>
             </a:r>
             <a:r>
-              <a:rPr lang="en-US" altLang="ko-KR" sz="1800" b="0" dirty="0">
+              <a:rPr lang="en-US" altLang="ko-KR" sz="1800" dirty="0">
                 <a:latin typeface="+mn-ea"/>
               </a:rPr>
               <a:t>(.exe) </a:t>
             </a:r>
             <a:r>
-              <a:rPr lang="ko-KR" altLang="en-US" sz="1800" b="0" dirty="0">
+              <a:rPr lang="ko-KR" altLang="en-US" sz="1800" dirty="0">
                 <a:latin typeface="+mn-ea"/>
               </a:rPr>
               <a:t>생성</a:t>
             </a:r>
-            <a:endParaRPr lang="en-US" altLang="ko-KR" sz="1800" b="0" dirty="0">
+            <a:endParaRPr lang="en-US" altLang="ko-KR" sz="1800" dirty="0">
               <a:latin typeface="+mn-ea"/>
             </a:endParaRPr>
           </a:p>
           <a:p>
             <a:pPr lvl="2"/>
-            <a:endParaRPr lang="en-US" altLang="ko-KR" sz="1400" b="0" dirty="0"/>
-          </a:p>
-          <a:p>
-            <a:r>
-              <a:rPr lang="ko-KR" altLang="en-US" sz="2000" b="0" dirty="0"/>
+            <a:endParaRPr lang="en-US" altLang="ko-KR" sz="1400" dirty="0"/>
+          </a:p>
+          <a:p>
+            <a:r>
+              <a:rPr lang="ko-KR" altLang="en-US" sz="2000" dirty="0"/>
               <a:t>정적 링크</a:t>
             </a:r>
             <a:r>
-              <a:rPr lang="en-US" altLang="ko-KR" sz="2000" b="0" dirty="0"/>
+              <a:rPr lang="en-US" altLang="ko-KR" sz="2000" dirty="0"/>
               <a:t>(Static Linking)</a:t>
             </a:r>
           </a:p>
           <a:p>
             <a:pPr lvl="1"/>
             <a:r>
-              <a:rPr lang="ko-KR" altLang="en-US" sz="1800" b="0" dirty="0"/>
+              <a:rPr lang="ko-KR" altLang="en-US" sz="1800" dirty="0"/>
               <a:t>프로그램 실행에 필요한 외부 코드</a:t>
             </a:r>
             <a:r>
-              <a:rPr lang="en-US" altLang="ko-KR" sz="1800" b="0" dirty="0"/>
+              <a:rPr lang="en-US" altLang="ko-KR" sz="1800" dirty="0"/>
               <a:t>(</a:t>
             </a:r>
             <a:r>
-              <a:rPr lang="ko-KR" altLang="en-US" sz="1800" b="0" dirty="0"/>
+              <a:rPr lang="ko-KR" altLang="en-US" sz="1800" dirty="0"/>
               <a:t>라이브러리</a:t>
             </a:r>
             <a:r>
-              <a:rPr lang="en-US" altLang="ko-KR" sz="1800" b="0" dirty="0"/>
+              <a:rPr lang="en-US" altLang="ko-KR" sz="1800" dirty="0"/>
               <a:t>)</a:t>
             </a:r>
             <a:r>
-              <a:rPr lang="ko-KR" altLang="en-US" sz="1800" b="0" dirty="0"/>
+              <a:rPr lang="ko-KR" altLang="en-US" sz="1800" dirty="0"/>
               <a:t>를 실행 파일 내부에 포함</a:t>
             </a:r>
-            <a:endParaRPr lang="en-US" altLang="ko-KR" sz="1800" b="0" dirty="0"/>
+            <a:endParaRPr lang="en-US" altLang="ko-KR" sz="1800" dirty="0"/>
           </a:p>
           <a:p>
             <a:pPr lvl="2"/>
-            <a:endParaRPr lang="en-US" altLang="ko-KR" sz="1400" b="0" dirty="0"/>
-          </a:p>
-          <a:p>
-            <a:r>
-              <a:rPr lang="ko-KR" altLang="en-US" sz="2000" b="0" dirty="0"/>
+            <a:endParaRPr lang="en-US" altLang="ko-KR" sz="1400" dirty="0"/>
+          </a:p>
+          <a:p>
+            <a:r>
+              <a:rPr lang="ko-KR" altLang="en-US" sz="2000" dirty="0"/>
               <a:t>심볼 해결</a:t>
             </a:r>
             <a:r>
-              <a:rPr lang="en-US" altLang="ko-KR" sz="2000" b="0" dirty="0"/>
+              <a:rPr lang="en-US" altLang="ko-KR" sz="2000" dirty="0"/>
               <a:t>(Symbol Resolution)</a:t>
             </a:r>
           </a:p>
           <a:p>
             <a:pPr lvl="1"/>
             <a:r>
-              <a:rPr lang="ko-KR" altLang="en-US" sz="1800" b="0" dirty="0"/>
+              <a:rPr lang="ko-KR" altLang="en-US" sz="1800" dirty="0"/>
               <a:t>함수와 변수의 정의와 참조가 올바르게 연결</a:t>
             </a:r>
-            <a:endParaRPr lang="en-US" altLang="ko-KR" sz="1800" b="0" dirty="0"/>
+            <a:endParaRPr lang="en-US" altLang="ko-KR" sz="1800" dirty="0"/>
           </a:p>
           <a:p>
             <a:pPr lvl="2"/>
-            <a:endParaRPr lang="en-US" altLang="ko-KR" sz="1400" b="0" dirty="0"/>
-          </a:p>
-          <a:p>
-            <a:r>
-              <a:rPr lang="ko-KR" altLang="en-US" sz="2000" b="0" dirty="0"/>
+            <a:endParaRPr lang="en-US" altLang="ko-KR" sz="1400" dirty="0"/>
+          </a:p>
+          <a:p>
+            <a:r>
+              <a:rPr lang="ko-KR" altLang="en-US" sz="2000" dirty="0"/>
               <a:t>주소 재배치</a:t>
             </a:r>
             <a:r>
-              <a:rPr lang="en-US" altLang="ko-KR" sz="2000" b="0" dirty="0"/>
+              <a:rPr lang="en-US" altLang="ko-KR" sz="2000" dirty="0"/>
               <a:t>(Relocation)</a:t>
             </a:r>
           </a:p>
           <a:p>
             <a:pPr lvl="1"/>
             <a:r>
-              <a:rPr lang="ko-KR" altLang="en-US" sz="1800" b="0" dirty="0"/>
+              <a:rPr lang="ko-KR" altLang="en-US" sz="1800" dirty="0"/>
               <a:t>프로그램이 메모리에 배치될 때 실제 주소로 수정</a:t>
             </a:r>
-            <a:endParaRPr lang="en-US" altLang="ko-KR" sz="1800" b="0" dirty="0"/>
+            <a:endParaRPr lang="en-US" altLang="ko-KR" sz="1800" dirty="0"/>
           </a:p>
           <a:p>
             <a:pPr lvl="2"/>
-            <a:endParaRPr lang="en-US" altLang="ko-KR" sz="1400" b="0" dirty="0"/>
-          </a:p>
-          <a:p>
-            <a:r>
-              <a:rPr lang="ko-KR" altLang="en-US" sz="2000" b="0" dirty="0"/>
+            <a:endParaRPr lang="en-US" altLang="ko-KR" sz="1400" dirty="0"/>
+          </a:p>
+          <a:p>
+            <a:r>
+              <a:rPr lang="ko-KR" altLang="en-US" sz="2000" dirty="0"/>
               <a:t>동적 링크 정보 저장</a:t>
             </a:r>
-            <a:endParaRPr lang="en-US" altLang="ko-KR" sz="2000" b="0" dirty="0"/>
+            <a:endParaRPr lang="en-US" altLang="ko-KR" sz="2000" dirty="0"/>
           </a:p>
           <a:p>
             <a:pPr lvl="1"/>
             <a:r>
-              <a:rPr lang="ko-KR" altLang="en-US" sz="1800" b="0" dirty="0"/>
+              <a:rPr lang="ko-KR" altLang="en-US" sz="1800" dirty="0"/>
               <a:t>실행 시 필요한 동적 라이브러리 정보를 실행 파일에 기록</a:t>
             </a:r>
-            <a:endParaRPr lang="en-US" altLang="ko-KR" sz="1800" b="0" dirty="0"/>
+            <a:endParaRPr lang="en-US" altLang="ko-KR" sz="1800" dirty="0"/>
           </a:p>
           <a:p>
             <a:pPr lvl="2"/>
-            <a:endParaRPr lang="en-US" altLang="ko-KR" sz="1400" b="0" dirty="0"/>
-          </a:p>
-          <a:p>
-            <a:r>
-              <a:rPr lang="ko-KR" altLang="en-US" sz="2000" b="0" dirty="0"/>
+            <a:endParaRPr lang="en-US" altLang="ko-KR" sz="1400" dirty="0"/>
+          </a:p>
+          <a:p>
+            <a:r>
+              <a:rPr lang="ko-KR" altLang="en-US" sz="2000" dirty="0"/>
               <a:t>링크 타임 최적화</a:t>
             </a:r>
             <a:r>
-              <a:rPr lang="en-US" altLang="ko-KR" sz="2000" b="0" dirty="0"/>
+              <a:rPr lang="en-US" altLang="ko-KR" sz="2000" dirty="0"/>
               <a:t>(LTO)</a:t>
             </a:r>
           </a:p>
           <a:p>
             <a:pPr lvl="1"/>
             <a:r>
-              <a:rPr lang="ko-KR" altLang="en-US" sz="1800" b="0" dirty="0"/>
+              <a:rPr lang="ko-KR" altLang="en-US" sz="1800" dirty="0"/>
               <a:t>불필요한 연산 제거 및 코드 실행 효율 개선</a:t>
             </a:r>
-            <a:endParaRPr lang="en-US" altLang="ko-KR" sz="1800" b="0" dirty="0"/>
-          </a:p>
-          <a:p>
-            <a:endParaRPr lang="ko-KR" altLang="en-US" sz="2400" b="0" dirty="0"/>
+            <a:endParaRPr lang="en-US" altLang="ko-KR" sz="1800" dirty="0"/>
+          </a:p>
+          <a:p>
+            <a:endParaRPr lang="ko-KR" altLang="en-US" sz="2400" dirty="0"/>
           </a:p>
         </p:txBody>
       </p:sp>
@@ -6045,7 +6050,7 @@
           <a:lstStyle/>
           <a:p>
             <a:r>
-              <a:rPr lang="en-US" altLang="ko-KR" b="0" dirty="0"/>
+              <a:rPr lang="en-US" altLang="ko-KR" dirty="0"/>
               <a:t>2.5.3.1 Static Linking vs Dynamic Linking</a:t>
             </a:r>
             <a:endParaRPr lang="ko-KR" altLang="en-US" dirty="0"/>
@@ -6074,121 +6079,121 @@
           <a:lstStyle/>
           <a:p>
             <a:r>
-              <a:rPr lang="en-US" altLang="ko-KR" sz="2400" b="0" dirty="0"/>
+              <a:rPr lang="en-US" altLang="ko-KR" sz="2400" dirty="0"/>
               <a:t>Static Linking</a:t>
             </a:r>
           </a:p>
           <a:p>
             <a:pPr lvl="1"/>
             <a:r>
-              <a:rPr lang="ko-KR" altLang="en-US" sz="2000" b="0" dirty="0"/>
+              <a:rPr lang="ko-KR" altLang="en-US" sz="2000" dirty="0"/>
               <a:t>빌드 시 링크 </a:t>
             </a:r>
-            <a:endParaRPr lang="en-US" altLang="ko-KR" sz="2000" b="0" dirty="0"/>
+            <a:endParaRPr lang="en-US" altLang="ko-KR" sz="2000" dirty="0"/>
           </a:p>
           <a:p>
             <a:pPr lvl="1"/>
             <a:r>
-              <a:rPr lang="ko-KR" altLang="en-US" sz="2000" b="0" dirty="0"/>
+              <a:rPr lang="ko-KR" altLang="en-US" sz="2000" dirty="0"/>
               <a:t>라이브러리 코드가 실행 파일에 포함</a:t>
             </a:r>
           </a:p>
           <a:p>
             <a:pPr lvl="1"/>
             <a:r>
-              <a:rPr lang="ko-KR" altLang="en-US" sz="2000" b="0" dirty="0"/>
+              <a:rPr lang="ko-KR" altLang="en-US" sz="2000" dirty="0"/>
               <a:t>실행 파일 크기 증가</a:t>
             </a:r>
           </a:p>
           <a:p>
             <a:pPr lvl="1"/>
             <a:r>
-              <a:rPr lang="ko-KR" altLang="en-US" sz="2000" b="0" dirty="0"/>
+              <a:rPr lang="ko-KR" altLang="en-US" sz="2000" dirty="0"/>
               <a:t>배포 간단</a:t>
             </a:r>
-            <a:endParaRPr lang="en-US" altLang="ko-KR" sz="2000" b="0" dirty="0"/>
+            <a:endParaRPr lang="en-US" altLang="ko-KR" sz="2000" dirty="0"/>
           </a:p>
           <a:p>
             <a:pPr lvl="1"/>
-            <a:endParaRPr lang="en-US" altLang="ko-KR" sz="2000" b="0" dirty="0"/>
-          </a:p>
-          <a:p>
-            <a:r>
-              <a:rPr lang="ko-KR" altLang="en-US" sz="2400" b="0" dirty="0"/>
+            <a:endParaRPr lang="en-US" altLang="ko-KR" sz="2000" dirty="0"/>
+          </a:p>
+          <a:p>
+            <a:r>
+              <a:rPr lang="ko-KR" altLang="en-US" sz="2400" dirty="0"/>
               <a:t>링커에 라이브러리 추가 방법</a:t>
             </a:r>
           </a:p>
           <a:p>
             <a:pPr lvl="1"/>
             <a:r>
-              <a:rPr lang="en-US" altLang="ko-KR" sz="2000" b="0" dirty="0"/>
+              <a:rPr lang="en-US" altLang="ko-KR" sz="2000" dirty="0"/>
               <a:t>Windows</a:t>
             </a:r>
           </a:p>
           <a:p>
             <a:pPr lvl="2"/>
             <a:r>
-              <a:rPr lang="en-US" altLang="ko-KR" sz="1600" b="0" dirty="0"/>
+              <a:rPr lang="en-US" altLang="ko-KR" sz="1600" dirty="0"/>
               <a:t>pragma Directive </a:t>
             </a:r>
             <a:r>
-              <a:rPr lang="ko-KR" altLang="en-US" sz="1600" b="0" dirty="0"/>
+              <a:rPr lang="ko-KR" altLang="en-US" sz="1600" dirty="0"/>
               <a:t>사용</a:t>
             </a:r>
           </a:p>
           <a:p>
             <a:pPr lvl="3"/>
             <a:r>
-              <a:rPr lang="en-US" altLang="ko-KR" sz="1400" b="0" dirty="0"/>
+              <a:rPr lang="en-US" altLang="ko-KR" sz="1400" dirty="0"/>
               <a:t>#pragma comment(lib, "xxx.lib")</a:t>
             </a:r>
           </a:p>
           <a:p>
             <a:pPr lvl="2"/>
             <a:r>
-              <a:rPr lang="en-US" altLang="ko-KR" sz="1600" b="0" dirty="0"/>
+              <a:rPr lang="en-US" altLang="ko-KR" sz="1600" dirty="0"/>
               <a:t>Visual Studio </a:t>
             </a:r>
             <a:r>
-              <a:rPr lang="ko-KR" altLang="en-US" sz="1600" b="0" dirty="0"/>
+              <a:rPr lang="ko-KR" altLang="en-US" sz="1600" dirty="0"/>
               <a:t>프로젝트 설정</a:t>
             </a:r>
-            <a:endParaRPr lang="en-US" altLang="ko-KR" sz="1600" b="0" dirty="0"/>
+            <a:endParaRPr lang="en-US" altLang="ko-KR" sz="1600" dirty="0"/>
           </a:p>
           <a:p>
             <a:pPr lvl="2"/>
-            <a:endParaRPr lang="en-US" altLang="ko-KR" sz="1600" b="0" dirty="0"/>
+            <a:endParaRPr lang="en-US" altLang="ko-KR" sz="1600" dirty="0"/>
           </a:p>
           <a:p>
             <a:pPr lvl="2"/>
-            <a:endParaRPr lang="en-US" altLang="ko-KR" sz="1600" b="0" dirty="0"/>
+            <a:endParaRPr lang="en-US" altLang="ko-KR" sz="1600" dirty="0"/>
           </a:p>
           <a:p>
             <a:pPr lvl="2"/>
-            <a:endParaRPr lang="ko-KR" altLang="en-US" sz="1600" b="0" dirty="0"/>
+            <a:endParaRPr lang="ko-KR" altLang="en-US" sz="1600" dirty="0"/>
           </a:p>
           <a:p>
             <a:pPr lvl="1"/>
             <a:r>
-              <a:rPr lang="en-US" altLang="ko-KR" sz="2000" b="0" dirty="0"/>
+              <a:rPr lang="en-US" altLang="ko-KR" sz="2000" dirty="0"/>
               <a:t>Android</a:t>
             </a:r>
           </a:p>
           <a:p>
             <a:pPr lvl="2"/>
             <a:r>
-              <a:rPr lang="en-US" altLang="ko-KR" sz="1600" b="0" dirty="0"/>
+              <a:rPr lang="en-US" altLang="ko-KR" sz="1600" dirty="0"/>
               <a:t>.mk </a:t>
             </a:r>
             <a:r>
-              <a:rPr lang="ko-KR" altLang="en-US" sz="1600" b="0" dirty="0"/>
+              <a:rPr lang="ko-KR" altLang="en-US" sz="1600" dirty="0"/>
               <a:t>파일</a:t>
             </a:r>
             <a:r>
-              <a:rPr lang="en-US" altLang="ko-KR" sz="1600" b="0" dirty="0"/>
+              <a:rPr lang="en-US" altLang="ko-KR" sz="1600" dirty="0"/>
               <a:t>: LOCAL_STATIC_LIBRARIES := libmath</a:t>
             </a:r>
-            <a:endParaRPr lang="ko-KR" altLang="en-US" sz="2200" b="0" dirty="0"/>
+            <a:endParaRPr lang="ko-KR" altLang="en-US" sz="2200" dirty="0"/>
           </a:p>
         </p:txBody>
       </p:sp>
@@ -6317,7 +6322,7 @@
           <a:lstStyle/>
           <a:p>
             <a:r>
-              <a:rPr lang="en-US" altLang="ko-KR" b="0" dirty="0"/>
+              <a:rPr lang="en-US" altLang="ko-KR" dirty="0"/>
               <a:t>2.5.3.1 Static Linking vs Dynamic Linking</a:t>
             </a:r>
             <a:endParaRPr lang="ko-KR" altLang="en-US" dirty="0"/>
@@ -6346,159 +6351,159 @@
           <a:lstStyle/>
           <a:p>
             <a:r>
-              <a:rPr lang="en-US" altLang="ko-KR" sz="2400" b="0" dirty="0"/>
+              <a:rPr lang="en-US" altLang="ko-KR" sz="2400" dirty="0"/>
               <a:t>Dynamic Linking</a:t>
             </a:r>
           </a:p>
           <a:p>
             <a:pPr lvl="1"/>
             <a:r>
-              <a:rPr lang="ko-KR" altLang="en-US" sz="2000" b="0" dirty="0"/>
+              <a:rPr lang="ko-KR" altLang="en-US" sz="2000" dirty="0"/>
               <a:t>실행 시 링크</a:t>
             </a:r>
-            <a:endParaRPr lang="en-US" altLang="ko-KR" sz="2000" b="0" dirty="0"/>
+            <a:endParaRPr lang="en-US" altLang="ko-KR" sz="2000" dirty="0"/>
           </a:p>
           <a:p>
             <a:pPr lvl="1"/>
             <a:r>
-              <a:rPr lang="ko-KR" altLang="en-US" sz="2000" b="0" dirty="0"/>
+              <a:rPr lang="ko-KR" altLang="en-US" sz="2000" dirty="0"/>
               <a:t>실행 시 </a:t>
             </a:r>
             <a:r>
-              <a:rPr lang="en-US" altLang="ko-KR" sz="2000" b="0" dirty="0"/>
+              <a:rPr lang="en-US" altLang="ko-KR" sz="2000" dirty="0"/>
               <a:t>DLL/Shared Library </a:t>
             </a:r>
             <a:r>
-              <a:rPr lang="ko-KR" altLang="en-US" sz="2000" b="0" dirty="0"/>
+              <a:rPr lang="ko-KR" altLang="en-US" sz="2000" dirty="0"/>
               <a:t>를 로드</a:t>
             </a:r>
           </a:p>
           <a:p>
             <a:pPr lvl="1"/>
             <a:r>
-              <a:rPr lang="ko-KR" altLang="en-US" sz="2000" b="0" dirty="0"/>
+              <a:rPr lang="ko-KR" altLang="en-US" sz="2000" dirty="0"/>
               <a:t>실행 파일 크기 작음</a:t>
             </a:r>
           </a:p>
           <a:p>
             <a:pPr lvl="1"/>
             <a:r>
-              <a:rPr lang="ko-KR" altLang="en-US" sz="2000" b="0" dirty="0"/>
+              <a:rPr lang="ko-KR" altLang="en-US" sz="2000" dirty="0"/>
               <a:t>여러 프로그램이 라이브러리 공유</a:t>
             </a:r>
-            <a:endParaRPr lang="en-US" altLang="ko-KR" sz="2000" b="0" dirty="0"/>
+            <a:endParaRPr lang="en-US" altLang="ko-KR" sz="2000" dirty="0"/>
           </a:p>
           <a:p>
             <a:pPr lvl="3"/>
-            <a:endParaRPr lang="en-US" altLang="ko-KR" sz="1400" b="0" dirty="0"/>
-          </a:p>
-          <a:p>
-            <a:r>
-              <a:rPr lang="ko-KR" altLang="en-US" sz="2400" b="0" dirty="0"/>
+            <a:endParaRPr lang="en-US" altLang="ko-KR" sz="1400" dirty="0"/>
+          </a:p>
+          <a:p>
+            <a:r>
+              <a:rPr lang="ko-KR" altLang="en-US" sz="2400" dirty="0"/>
               <a:t>암시적 동적 링킹 </a:t>
             </a:r>
             <a:r>
-              <a:rPr lang="en-US" altLang="ko-KR" sz="2400" b="0" dirty="0"/>
+              <a:rPr lang="en-US" altLang="ko-KR" sz="2400" dirty="0"/>
               <a:t>(Implicit Linking)</a:t>
             </a:r>
           </a:p>
           <a:p>
             <a:pPr lvl="1"/>
             <a:r>
-              <a:rPr lang="ko-KR" altLang="en-US" sz="2000" b="0" dirty="0"/>
+              <a:rPr lang="ko-KR" altLang="en-US" sz="2000" dirty="0"/>
               <a:t>프로그램 시작 시 </a:t>
             </a:r>
             <a:r>
-              <a:rPr lang="en-US" altLang="ko-KR" sz="2000" b="0" dirty="0"/>
+              <a:rPr lang="en-US" altLang="ko-KR" sz="2000" dirty="0"/>
               <a:t>OS</a:t>
             </a:r>
             <a:r>
-              <a:rPr lang="ko-KR" altLang="en-US" sz="2000" b="0" dirty="0"/>
+              <a:rPr lang="ko-KR" altLang="en-US" sz="2000" dirty="0"/>
               <a:t>가 </a:t>
             </a:r>
             <a:r>
-              <a:rPr lang="en-US" altLang="ko-KR" sz="2000" b="0" dirty="0"/>
+              <a:rPr lang="en-US" altLang="ko-KR" sz="2000" dirty="0"/>
               <a:t>DLL</a:t>
             </a:r>
             <a:r>
-              <a:rPr lang="ko-KR" altLang="en-US" sz="2000" b="0" dirty="0"/>
+              <a:rPr lang="ko-KR" altLang="en-US" sz="2000" dirty="0"/>
               <a:t>을 자동 로드</a:t>
             </a:r>
           </a:p>
           <a:p>
             <a:pPr lvl="1"/>
             <a:r>
-              <a:rPr lang="ko-KR" altLang="en-US" sz="2000" b="0" dirty="0"/>
+              <a:rPr lang="ko-KR" altLang="en-US" sz="2000" dirty="0"/>
               <a:t>실행 파일의 </a:t>
             </a:r>
             <a:r>
-              <a:rPr lang="en-US" altLang="ko-KR" sz="2000" b="0" dirty="0"/>
+              <a:rPr lang="en-US" altLang="ko-KR" sz="2000" dirty="0"/>
               <a:t>Import Table</a:t>
             </a:r>
             <a:r>
-              <a:rPr lang="ko-KR" altLang="en-US" sz="2000" b="0" dirty="0"/>
+              <a:rPr lang="ko-KR" altLang="en-US" sz="2000" dirty="0"/>
               <a:t>을 이용</a:t>
             </a:r>
           </a:p>
           <a:p>
             <a:pPr lvl="3"/>
-            <a:endParaRPr lang="en-US" altLang="ko-KR" sz="1400" b="0" dirty="0"/>
-          </a:p>
-          <a:p>
-            <a:r>
-              <a:rPr lang="ko-KR" altLang="en-US" sz="2400" b="0" dirty="0"/>
+            <a:endParaRPr lang="en-US" altLang="ko-KR" sz="1400" dirty="0"/>
+          </a:p>
+          <a:p>
+            <a:r>
+              <a:rPr lang="ko-KR" altLang="en-US" sz="2400" dirty="0"/>
               <a:t>명시적 동적 링킹 </a:t>
             </a:r>
             <a:r>
-              <a:rPr lang="en-US" altLang="ko-KR" sz="2400" b="0" dirty="0"/>
+              <a:rPr lang="en-US" altLang="ko-KR" sz="2400" dirty="0"/>
               <a:t>(Explicit Linking)</a:t>
             </a:r>
           </a:p>
           <a:p>
             <a:pPr lvl="1"/>
             <a:r>
-              <a:rPr lang="ko-KR" altLang="en-US" sz="2000" b="0" dirty="0"/>
+              <a:rPr lang="ko-KR" altLang="en-US" sz="2000" dirty="0"/>
               <a:t>프로그램이 직접 </a:t>
             </a:r>
             <a:r>
-              <a:rPr lang="en-US" altLang="ko-KR" sz="2000" b="0" dirty="0"/>
+              <a:rPr lang="en-US" altLang="ko-KR" sz="2000" dirty="0"/>
               <a:t>DLL/Shared Library </a:t>
             </a:r>
             <a:r>
-              <a:rPr lang="ko-KR" altLang="en-US" sz="2000" b="0" dirty="0"/>
+              <a:rPr lang="ko-KR" altLang="en-US" sz="2000" dirty="0"/>
               <a:t>를 로드</a:t>
             </a:r>
-            <a:endParaRPr lang="en-US" altLang="ko-KR" sz="2000" b="0" dirty="0"/>
+            <a:endParaRPr lang="en-US" altLang="ko-KR" sz="2000" dirty="0"/>
           </a:p>
           <a:p>
             <a:pPr lvl="1"/>
             <a:r>
-              <a:rPr lang="en-US" altLang="ko-KR" sz="2000" b="0" dirty="0"/>
+              <a:rPr lang="en-US" altLang="ko-KR" sz="2000" dirty="0"/>
               <a:t>Windows</a:t>
             </a:r>
-            <a:endParaRPr lang="ko-KR" altLang="en-US" sz="2000" b="0" dirty="0"/>
+            <a:endParaRPr lang="ko-KR" altLang="en-US" sz="2000" dirty="0"/>
           </a:p>
           <a:p>
             <a:pPr lvl="2"/>
             <a:r>
-              <a:rPr lang="en-US" altLang="ko-KR" sz="1600" b="0" dirty="0"/>
+              <a:rPr lang="en-US" altLang="ko-KR" sz="1600" dirty="0"/>
               <a:t>LoadLibrary("xxx.dll");</a:t>
             </a:r>
           </a:p>
           <a:p>
             <a:pPr lvl="1"/>
             <a:r>
-              <a:rPr lang="en-US" altLang="ko-KR" sz="2000" b="0" dirty="0"/>
+              <a:rPr lang="en-US" altLang="ko-KR" sz="2000" dirty="0"/>
               <a:t>NDK/IOS</a:t>
             </a:r>
           </a:p>
           <a:p>
             <a:pPr lvl="2"/>
             <a:r>
-              <a:rPr lang="en-US" altLang="ko-KR" sz="1200" b="0" dirty="0"/>
+              <a:rPr lang="en-US" altLang="ko-KR" sz="1200" dirty="0"/>
               <a:t>dlopen("libxxx.so", RTLD_LAZY)</a:t>
             </a:r>
-            <a:endParaRPr lang="ko-KR" altLang="en-US" sz="1200" b="0" dirty="0"/>
+            <a:endParaRPr lang="ko-KR" altLang="en-US" sz="1200" dirty="0"/>
           </a:p>
         </p:txBody>
       </p:sp>
@@ -6837,11 +6842,11 @@
           <a:p>
             <a:pPr eaLnBrk="1" hangingPunct="1"/>
             <a:r>
-              <a:rPr lang="en-US" altLang="ko-KR" b="0" dirty="0"/>
+              <a:rPr lang="en-US" altLang="ko-KR" dirty="0"/>
               <a:t>2.1 main </a:t>
             </a:r>
             <a:r>
-              <a:rPr lang="ko-KR" altLang="en-US" b="0" dirty="0"/>
+              <a:rPr lang="ko-KR" altLang="en-US" dirty="0"/>
               <a:t>함수 호출 과정</a:t>
             </a:r>
             <a:endParaRPr lang="ko-KR" altLang="en-US" sz="2400" dirty="0"/>
@@ -6876,54 +6881,54 @@
           <a:p>
             <a:pPr eaLnBrk="1" hangingPunct="1"/>
             <a:r>
-              <a:rPr lang="en-US" altLang="ko-KR" b="0" dirty="0"/>
+              <a:rPr lang="en-US" altLang="ko-KR" dirty="0"/>
               <a:t>Windows OS</a:t>
             </a:r>
             <a:r>
-              <a:rPr lang="ko-KR" altLang="en-US" b="0" dirty="0"/>
+              <a:rPr lang="ko-KR" altLang="en-US" dirty="0"/>
               <a:t>에서 </a:t>
             </a:r>
             <a:r>
-              <a:rPr lang="en-US" altLang="ko-KR" b="0" dirty="0"/>
+              <a:rPr lang="en-US" altLang="ko-KR" dirty="0"/>
               <a:t>main </a:t>
             </a:r>
             <a:r>
-              <a:rPr lang="ko-KR" altLang="en-US" b="0" dirty="0"/>
+              <a:rPr lang="ko-KR" altLang="en-US" dirty="0"/>
               <a:t>함수가 호출되는 과정</a:t>
             </a:r>
-            <a:endParaRPr lang="en-US" altLang="ko-KR" b="0" dirty="0"/>
+            <a:endParaRPr lang="en-US" altLang="ko-KR" dirty="0"/>
           </a:p>
           <a:p>
             <a:pPr lvl="1" eaLnBrk="1" hangingPunct="1"/>
             <a:r>
-              <a:rPr lang="ko-KR" altLang="en-US" sz="2000" b="0" dirty="0"/>
+              <a:rPr lang="ko-KR" altLang="en-US" sz="2000" dirty="0"/>
               <a:t>운영체제 → </a:t>
             </a:r>
             <a:r>
-              <a:rPr lang="en-US" altLang="ko-KR" sz="2000" b="0" dirty="0"/>
+              <a:rPr lang="en-US" altLang="ko-KR" sz="2000" dirty="0"/>
               <a:t>CRT </a:t>
             </a:r>
             <a:r>
-              <a:rPr lang="ko-KR" altLang="en-US" sz="2000" b="0" dirty="0"/>
+              <a:rPr lang="ko-KR" altLang="en-US" sz="2000" dirty="0"/>
               <a:t>초기화 → </a:t>
             </a:r>
             <a:r>
-              <a:rPr lang="en-US" altLang="ko-KR" sz="2000" b="0" dirty="0"/>
+              <a:rPr lang="en-US" altLang="ko-KR" sz="2000" dirty="0"/>
               <a:t>main </a:t>
             </a:r>
             <a:r>
-              <a:rPr lang="ko-KR" altLang="en-US" sz="2000" b="0" dirty="0"/>
+              <a:rPr lang="ko-KR" altLang="en-US" sz="2000" dirty="0"/>
               <a:t>호출 → </a:t>
             </a:r>
             <a:r>
-              <a:rPr lang="en-US" altLang="ko-KR" sz="2000" b="0" dirty="0"/>
+              <a:rPr lang="en-US" altLang="ko-KR" sz="2000" dirty="0"/>
               <a:t>CRT </a:t>
             </a:r>
             <a:r>
-              <a:rPr lang="ko-KR" altLang="en-US" sz="2000" b="0" dirty="0"/>
+              <a:rPr lang="ko-KR" altLang="en-US" sz="2000" dirty="0"/>
               <a:t>종료 → 운영체제</a:t>
             </a:r>
-            <a:endParaRPr lang="en-US" altLang="ko-KR" sz="2000" b="0" dirty="0"/>
+            <a:endParaRPr lang="en-US" altLang="ko-KR" sz="2000" dirty="0"/>
           </a:p>
         </p:txBody>
       </p:sp>
@@ -7021,15 +7026,15 @@
           <a:lstStyle/>
           <a:p>
             <a:r>
-              <a:rPr lang="en-US" altLang="ko-KR" b="0" dirty="0"/>
+              <a:rPr lang="en-US" altLang="ko-KR" dirty="0"/>
               <a:t>2.5.4 Windows </a:t>
             </a:r>
             <a:r>
-              <a:rPr lang="ko-KR" altLang="en-US" b="0" dirty="0"/>
+              <a:rPr lang="ko-KR" altLang="en-US" dirty="0"/>
               <a:t>빌드 완성 </a:t>
             </a:r>
             <a:r>
-              <a:rPr lang="en-US" altLang="ko-KR" b="0" dirty="0"/>
+              <a:rPr lang="en-US" altLang="ko-KR" dirty="0"/>
               <a:t>(Final Build)</a:t>
             </a:r>
             <a:endParaRPr lang="ko-KR" altLang="en-US" dirty="0"/>
@@ -7058,135 +7063,135 @@
           <a:lstStyle/>
           <a:p>
             <a:r>
-              <a:rPr lang="ko-KR" altLang="en-US" sz="1800" b="0" dirty="0"/>
+              <a:rPr lang="ko-KR" altLang="en-US" sz="1800" dirty="0"/>
               <a:t>빌드</a:t>
             </a:r>
             <a:r>
-              <a:rPr lang="en-US" altLang="ko-KR" sz="1800" b="0" dirty="0"/>
+              <a:rPr lang="en-US" altLang="ko-KR" sz="1800" dirty="0"/>
               <a:t>(Build)</a:t>
             </a:r>
           </a:p>
           <a:p>
             <a:pPr lvl="1"/>
             <a:r>
-              <a:rPr lang="ko-KR" altLang="en-US" sz="1600" b="0" dirty="0"/>
+              <a:rPr lang="ko-KR" altLang="en-US" sz="1600" dirty="0"/>
               <a:t>전처리 → 컴파일 → 링크 → </a:t>
             </a:r>
             <a:r>
-              <a:rPr lang="en-US" altLang="ko-KR" sz="1600" b="0" dirty="0"/>
+              <a:rPr lang="en-US" altLang="ko-KR" sz="1600" dirty="0"/>
               <a:t>exe</a:t>
             </a:r>
-            <a:endParaRPr lang="ko-KR" altLang="en-US" sz="1600" b="0" dirty="0"/>
+            <a:endParaRPr lang="ko-KR" altLang="en-US" sz="1600" dirty="0"/>
           </a:p>
           <a:p>
             <a:pPr lvl="1"/>
             <a:r>
-              <a:rPr lang="ko-KR" altLang="en-US" sz="1600" b="0" dirty="0"/>
+              <a:rPr lang="ko-KR" altLang="en-US" sz="1600" dirty="0"/>
               <a:t>실행 가능한 프로그램 생성</a:t>
             </a:r>
           </a:p>
           <a:p>
-            <a:endParaRPr lang="ko-KR" altLang="en-US" sz="1800" b="0" dirty="0"/>
-          </a:p>
-          <a:p>
-            <a:r>
-              <a:rPr lang="ko-KR" altLang="en-US" sz="1800" b="0" dirty="0"/>
+            <a:endParaRPr lang="ko-KR" altLang="en-US" sz="1800" dirty="0"/>
+          </a:p>
+          <a:p>
+            <a:r>
+              <a:rPr lang="ko-KR" altLang="en-US" sz="1800" dirty="0"/>
               <a:t>빌드에 포함되는 요소</a:t>
             </a:r>
           </a:p>
           <a:p>
             <a:pPr lvl="1"/>
             <a:r>
-              <a:rPr lang="ko-KR" altLang="en-US" sz="1600" b="0" dirty="0"/>
+              <a:rPr lang="ko-KR" altLang="en-US" sz="1600" dirty="0"/>
               <a:t>소스 코드</a:t>
             </a:r>
           </a:p>
           <a:p>
             <a:pPr lvl="1"/>
             <a:r>
-              <a:rPr lang="ko-KR" altLang="en-US" sz="1600" b="0" dirty="0"/>
+              <a:rPr lang="ko-KR" altLang="en-US" sz="1600" dirty="0"/>
               <a:t>라이브러리</a:t>
             </a:r>
           </a:p>
           <a:p>
             <a:pPr lvl="1"/>
             <a:r>
-              <a:rPr lang="ko-KR" altLang="en-US" sz="1600" b="0" dirty="0"/>
+              <a:rPr lang="ko-KR" altLang="en-US" sz="1600" dirty="0"/>
               <a:t>리소스</a:t>
             </a:r>
             <a:r>
-              <a:rPr lang="en-US" altLang="ko-KR" sz="1600" b="0" dirty="0"/>
+              <a:rPr lang="en-US" altLang="ko-KR" sz="1600" dirty="0"/>
               <a:t>(</a:t>
             </a:r>
             <a:r>
-              <a:rPr lang="ko-KR" altLang="en-US" sz="1600" b="0" dirty="0"/>
+              <a:rPr lang="ko-KR" altLang="en-US" sz="1600" dirty="0"/>
               <a:t>이미지</a:t>
             </a:r>
             <a:r>
-              <a:rPr lang="en-US" altLang="ko-KR" sz="1600" b="0" dirty="0"/>
+              <a:rPr lang="en-US" altLang="ko-KR" sz="1600" dirty="0"/>
               <a:t>, </a:t>
             </a:r>
             <a:r>
-              <a:rPr lang="ko-KR" altLang="en-US" sz="1600" b="0" dirty="0"/>
+              <a:rPr lang="ko-KR" altLang="en-US" sz="1600" dirty="0"/>
               <a:t>폰트</a:t>
             </a:r>
             <a:r>
-              <a:rPr lang="en-US" altLang="ko-KR" sz="1600" b="0" dirty="0"/>
+              <a:rPr lang="en-US" altLang="ko-KR" sz="1600" dirty="0"/>
               <a:t>, </a:t>
             </a:r>
             <a:r>
-              <a:rPr lang="ko-KR" altLang="en-US" sz="1600" b="0" dirty="0"/>
+              <a:rPr lang="ko-KR" altLang="en-US" sz="1600" dirty="0"/>
               <a:t>사운드 등</a:t>
             </a:r>
             <a:r>
-              <a:rPr lang="en-US" altLang="ko-KR" sz="1600" b="0" dirty="0"/>
+              <a:rPr lang="en-US" altLang="ko-KR" sz="1600" dirty="0"/>
               <a:t>)</a:t>
             </a:r>
           </a:p>
           <a:p>
-            <a:endParaRPr lang="en-US" altLang="ko-KR" sz="1800" b="0" dirty="0"/>
-          </a:p>
-          <a:p>
-            <a:r>
-              <a:rPr lang="en-US" altLang="ko-KR" sz="1800" b="0" dirty="0"/>
+            <a:endParaRPr lang="en-US" altLang="ko-KR" sz="1800" dirty="0"/>
+          </a:p>
+          <a:p>
+            <a:r>
+              <a:rPr lang="en-US" altLang="ko-KR" sz="1800" dirty="0"/>
               <a:t>Windows </a:t>
             </a:r>
             <a:r>
-              <a:rPr lang="ko-KR" altLang="en-US" sz="1800" b="0" dirty="0"/>
+              <a:rPr lang="ko-KR" altLang="en-US" sz="1800" dirty="0"/>
               <a:t>리소스 처리</a:t>
             </a:r>
           </a:p>
           <a:p>
             <a:pPr lvl="1"/>
             <a:r>
-              <a:rPr lang="en-US" altLang="ko-KR" sz="1600" b="0" dirty="0"/>
+              <a:rPr lang="en-US" altLang="ko-KR" sz="1600" dirty="0"/>
               <a:t>.rc → .res → </a:t>
             </a:r>
             <a:r>
-              <a:rPr lang="ko-KR" altLang="en-US" sz="1600" b="0" dirty="0"/>
+              <a:rPr lang="ko-KR" altLang="en-US" sz="1600" dirty="0"/>
               <a:t>실행 파일 포함</a:t>
             </a:r>
           </a:p>
           <a:p>
-            <a:endParaRPr lang="ko-KR" altLang="en-US" sz="1800" b="0" dirty="0"/>
-          </a:p>
-          <a:p>
-            <a:r>
-              <a:rPr lang="ko-KR" altLang="en-US" sz="1800" b="0" dirty="0"/>
+            <a:endParaRPr lang="ko-KR" altLang="en-US" sz="1800" dirty="0"/>
+          </a:p>
+          <a:p>
+            <a:r>
+              <a:rPr lang="ko-KR" altLang="en-US" sz="1800" dirty="0"/>
               <a:t>결과</a:t>
             </a:r>
           </a:p>
           <a:p>
             <a:pPr lvl="1"/>
             <a:r>
-              <a:rPr lang="en-US" altLang="ko-KR" sz="1600" b="0" dirty="0"/>
+              <a:rPr lang="en-US" altLang="ko-KR" sz="1600" dirty="0"/>
               <a:t>.exe + </a:t>
             </a:r>
             <a:r>
-              <a:rPr lang="ko-KR" altLang="en-US" sz="1600" b="0" dirty="0"/>
+              <a:rPr lang="ko-KR" altLang="en-US" sz="1600" dirty="0"/>
               <a:t>실행 리소스</a:t>
             </a:r>
-            <a:endParaRPr lang="ko-KR" altLang="en-US" sz="2000" b="0" dirty="0"/>
+            <a:endParaRPr lang="ko-KR" altLang="en-US" sz="2000" dirty="0"/>
           </a:p>
         </p:txBody>
       </p:sp>
@@ -7309,14 +7314,13 @@
           <a:lstStyle/>
           <a:p>
             <a:r>
-              <a:rPr lang="en-US" altLang="ko-KR" b="0" dirty="0"/>
+              <a:rPr lang="en-US" altLang="ko-KR" dirty="0"/>
               <a:t>2.5.4.1 Visual Studio </a:t>
             </a:r>
             <a:r>
-              <a:rPr lang="ko-KR" altLang="en-US" b="0" dirty="0"/>
+              <a:rPr lang="ko-KR" altLang="en-US" dirty="0"/>
               <a:t>기능</a:t>
             </a:r>
-            <a:endParaRPr lang="ko-KR" altLang="en-US" dirty="0"/>
           </a:p>
         </p:txBody>
       </p:sp>
@@ -7342,97 +7346,97 @@
           <a:lstStyle/>
           <a:p>
             <a:r>
-              <a:rPr lang="en-US" altLang="ko-KR" b="0" dirty="0"/>
+              <a:rPr lang="en-US" altLang="ko-KR" dirty="0"/>
               <a:t>IDE (Integrated Development Environment)</a:t>
             </a:r>
           </a:p>
           <a:p>
             <a:pPr lvl="1"/>
             <a:r>
-              <a:rPr lang="ko-KR" altLang="en-US" b="0" dirty="0"/>
+              <a:rPr lang="ko-KR" altLang="en-US" dirty="0"/>
               <a:t>소스 코드 작성</a:t>
             </a:r>
             <a:r>
-              <a:rPr lang="en-US" altLang="ko-KR" b="0" dirty="0"/>
+              <a:rPr lang="en-US" altLang="ko-KR" dirty="0"/>
               <a:t>, </a:t>
             </a:r>
             <a:r>
-              <a:rPr lang="ko-KR" altLang="en-US" b="0" dirty="0"/>
+              <a:rPr lang="ko-KR" altLang="en-US" dirty="0"/>
               <a:t>컴파일</a:t>
             </a:r>
             <a:r>
-              <a:rPr lang="en-US" altLang="ko-KR" b="0" dirty="0"/>
+              <a:rPr lang="en-US" altLang="ko-KR" dirty="0"/>
               <a:t>, </a:t>
             </a:r>
             <a:r>
-              <a:rPr lang="ko-KR" altLang="en-US" b="0" dirty="0"/>
+              <a:rPr lang="ko-KR" altLang="en-US" dirty="0"/>
               <a:t>디버깅 등을 하나의 환경에서 수행할 수 있는 개발 도구</a:t>
             </a:r>
-            <a:endParaRPr lang="en-US" altLang="ko-KR" b="0" dirty="0"/>
+            <a:endParaRPr lang="en-US" altLang="ko-KR" dirty="0"/>
           </a:p>
           <a:p>
             <a:pPr lvl="1"/>
             <a:r>
-              <a:rPr lang="en-US" altLang="ko-KR" b="0" dirty="0"/>
+              <a:rPr lang="en-US" altLang="ko-KR" dirty="0"/>
               <a:t>Editor</a:t>
             </a:r>
             <a:r>
-              <a:rPr lang="ko-KR" altLang="en-US" b="0" dirty="0"/>
+              <a:rPr lang="ko-KR" altLang="en-US" dirty="0"/>
               <a:t> </a:t>
             </a:r>
             <a:r>
-              <a:rPr lang="en-US" altLang="ko-KR" b="0" dirty="0"/>
+              <a:rPr lang="en-US" altLang="ko-KR" dirty="0"/>
               <a:t>+</a:t>
             </a:r>
             <a:r>
-              <a:rPr lang="ko-KR" altLang="en-US" b="0" dirty="0"/>
+              <a:rPr lang="ko-KR" altLang="en-US" dirty="0"/>
               <a:t> 전처리기 </a:t>
             </a:r>
             <a:r>
-              <a:rPr lang="en-US" altLang="ko-KR" b="0" dirty="0"/>
+              <a:rPr lang="en-US" altLang="ko-KR" dirty="0"/>
               <a:t>+ </a:t>
             </a:r>
             <a:r>
-              <a:rPr lang="ko-KR" altLang="en-US" b="0" dirty="0"/>
+              <a:rPr lang="ko-KR" altLang="en-US" dirty="0"/>
               <a:t>컴파일러 </a:t>
             </a:r>
             <a:r>
-              <a:rPr lang="en-US" altLang="ko-KR" b="0" dirty="0"/>
+              <a:rPr lang="en-US" altLang="ko-KR" dirty="0"/>
               <a:t>+ </a:t>
             </a:r>
             <a:r>
-              <a:rPr lang="ko-KR" altLang="en-US" b="0" dirty="0"/>
+              <a:rPr lang="ko-KR" altLang="en-US" dirty="0"/>
               <a:t>링크 </a:t>
             </a:r>
             <a:r>
-              <a:rPr lang="en-US" altLang="ko-KR" b="0" dirty="0"/>
+              <a:rPr lang="en-US" altLang="ko-KR" dirty="0"/>
               <a:t>+ </a:t>
             </a:r>
             <a:r>
-              <a:rPr lang="ko-KR" altLang="en-US" b="0" dirty="0"/>
+              <a:rPr lang="ko-KR" altLang="en-US" dirty="0"/>
               <a:t>디버깅 기능</a:t>
             </a:r>
-            <a:endParaRPr lang="en-US" altLang="ko-KR" b="0" dirty="0"/>
+            <a:endParaRPr lang="en-US" altLang="ko-KR" dirty="0"/>
           </a:p>
           <a:p>
             <a:pPr lvl="1"/>
-            <a:endParaRPr lang="ko-KR" altLang="en-US" b="0" dirty="0"/>
-          </a:p>
-          <a:p>
-            <a:r>
-              <a:rPr lang="en-US" altLang="ko-KR" b="0" dirty="0"/>
+            <a:endParaRPr lang="ko-KR" altLang="en-US" dirty="0"/>
+          </a:p>
+          <a:p>
+            <a:r>
+              <a:rPr lang="en-US" altLang="ko-KR" dirty="0"/>
               <a:t>Visual studio </a:t>
             </a:r>
             <a:r>
-              <a:rPr lang="ko-KR" altLang="en-US" b="0" dirty="0"/>
+              <a:rPr lang="ko-KR" altLang="en-US" dirty="0"/>
               <a:t>솔루션 빌드 </a:t>
             </a:r>
             <a:r>
-              <a:rPr lang="en-US" altLang="ko-KR" b="0" dirty="0"/>
+              <a:rPr lang="en-US" altLang="ko-KR" dirty="0"/>
               <a:t>/ </a:t>
             </a:r>
             <a:r>
-              <a:rPr lang="ko-KR" altLang="en-US" b="0" dirty="0"/>
+              <a:rPr lang="ko-KR" altLang="en-US" dirty="0"/>
               <a:t>컴파일</a:t>
             </a:r>
           </a:p>
@@ -7575,15 +7579,15 @@
           <a:lstStyle/>
           <a:p>
             <a:r>
-              <a:rPr lang="en-US" altLang="ko-KR" b="0" dirty="0"/>
+              <a:rPr lang="en-US" altLang="ko-KR" dirty="0"/>
               <a:t>2.6 </a:t>
             </a:r>
             <a:r>
-              <a:rPr lang="ko-KR" altLang="en-US" b="0" dirty="0"/>
+              <a:rPr lang="ko-KR" altLang="en-US" dirty="0"/>
               <a:t>주석</a:t>
             </a:r>
             <a:r>
-              <a:rPr lang="en-US" altLang="ko-KR" b="0" dirty="0"/>
+              <a:rPr lang="en-US" altLang="ko-KR" dirty="0"/>
               <a:t>(Comment)</a:t>
             </a:r>
             <a:endParaRPr lang="ko-KR" altLang="en-US" dirty="0"/>
@@ -7612,116 +7616,116 @@
           <a:lstStyle/>
           <a:p>
             <a:r>
-              <a:rPr lang="ko-KR" altLang="en-US" b="0" dirty="0"/>
+              <a:rPr lang="ko-KR" altLang="en-US" dirty="0"/>
               <a:t>주석</a:t>
             </a:r>
-            <a:endParaRPr lang="en-US" altLang="ko-KR" b="0" dirty="0"/>
+            <a:endParaRPr lang="en-US" altLang="ko-KR" dirty="0"/>
           </a:p>
           <a:p>
             <a:pPr lvl="1"/>
             <a:r>
-              <a:rPr lang="ko-KR" altLang="en-US" b="0" dirty="0"/>
+              <a:rPr lang="ko-KR" altLang="en-US" dirty="0"/>
               <a:t>프로그램에 대한 설명을 작성하는 문장</a:t>
             </a:r>
-            <a:endParaRPr lang="en-US" altLang="ko-KR" b="0" dirty="0"/>
+            <a:endParaRPr lang="en-US" altLang="ko-KR" dirty="0"/>
           </a:p>
           <a:p>
             <a:pPr lvl="1"/>
             <a:r>
-              <a:rPr lang="ko-KR" altLang="en-US" b="0" dirty="0"/>
+              <a:rPr lang="ko-KR" altLang="en-US" dirty="0"/>
               <a:t>코드 의도 설명 → 가독성 및 유지보수 향상</a:t>
             </a:r>
           </a:p>
           <a:p>
             <a:pPr lvl="1"/>
             <a:r>
-              <a:rPr lang="ko-KR" altLang="en-US" b="0" dirty="0"/>
+              <a:rPr lang="ko-KR" altLang="en-US" dirty="0"/>
               <a:t>컴파일러는 주석을 무시</a:t>
             </a:r>
-            <a:endParaRPr lang="en-US" altLang="ko-KR" b="0" dirty="0"/>
-          </a:p>
-          <a:p>
-            <a:endParaRPr lang="en-US" altLang="ko-KR" b="0" dirty="0"/>
-          </a:p>
-          <a:p>
-            <a:r>
-              <a:rPr lang="ko-KR" altLang="en-US" b="0" dirty="0"/>
+            <a:endParaRPr lang="en-US" altLang="ko-KR" dirty="0"/>
+          </a:p>
+          <a:p>
+            <a:endParaRPr lang="en-US" altLang="ko-KR" dirty="0"/>
+          </a:p>
+          <a:p>
+            <a:r>
+              <a:rPr lang="ko-KR" altLang="en-US" dirty="0"/>
               <a:t>라인 주석 </a:t>
             </a:r>
             <a:r>
-              <a:rPr lang="en-US" altLang="ko-KR" b="0" dirty="0"/>
+              <a:rPr lang="en-US" altLang="ko-KR" dirty="0"/>
               <a:t>(Line Comment)</a:t>
             </a:r>
           </a:p>
           <a:p>
             <a:pPr lvl="1"/>
             <a:r>
-              <a:rPr lang="ko-KR" altLang="en-US" b="0" dirty="0"/>
+              <a:rPr lang="ko-KR" altLang="en-US" dirty="0"/>
               <a:t>한 줄 주석</a:t>
             </a:r>
-            <a:endParaRPr lang="en-US" altLang="ko-KR" b="0" dirty="0"/>
+            <a:endParaRPr lang="en-US" altLang="ko-KR" dirty="0"/>
           </a:p>
           <a:p>
             <a:pPr lvl="1"/>
             <a:r>
-              <a:rPr lang="en-US" altLang="ko-KR" b="0" dirty="0"/>
+              <a:rPr lang="en-US" altLang="ko-KR" dirty="0"/>
               <a:t>// </a:t>
             </a:r>
             <a:r>
-              <a:rPr lang="ko-KR" altLang="en-US" b="0" dirty="0"/>
+              <a:rPr lang="ko-KR" altLang="en-US" dirty="0"/>
               <a:t>로 시작</a:t>
             </a:r>
-            <a:endParaRPr lang="en-US" altLang="ko-KR" b="0" dirty="0"/>
+            <a:endParaRPr lang="en-US" altLang="ko-KR" dirty="0"/>
           </a:p>
           <a:p>
             <a:pPr lvl="1"/>
-            <a:endParaRPr lang="en-US" altLang="ko-KR" b="0" dirty="0"/>
-          </a:p>
-          <a:p>
-            <a:r>
-              <a:rPr lang="ko-KR" altLang="en-US" b="0" dirty="0"/>
+            <a:endParaRPr lang="en-US" altLang="ko-KR" dirty="0"/>
+          </a:p>
+          <a:p>
+            <a:r>
+              <a:rPr lang="ko-KR" altLang="en-US" dirty="0"/>
               <a:t>블록 주석</a:t>
             </a:r>
             <a:r>
-              <a:rPr lang="en-US" altLang="ko-KR" b="0" dirty="0"/>
+              <a:rPr lang="en-US" altLang="ko-KR" dirty="0"/>
               <a:t>(Block Comment)</a:t>
             </a:r>
           </a:p>
           <a:p>
             <a:pPr lvl="1"/>
             <a:r>
-              <a:rPr lang="ko-KR" altLang="en-US" b="0" dirty="0"/>
+              <a:rPr lang="ko-KR" altLang="en-US" dirty="0"/>
               <a:t>여러 줄 주석</a:t>
             </a:r>
-            <a:endParaRPr lang="en-US" altLang="ko-KR" b="0" dirty="0"/>
+            <a:endParaRPr lang="en-US" altLang="ko-KR" dirty="0"/>
           </a:p>
           <a:p>
             <a:pPr lvl="1"/>
             <a:r>
-              <a:rPr lang="en-US" altLang="ko-KR" b="0" dirty="0"/>
+              <a:rPr lang="en-US" altLang="ko-KR" dirty="0"/>
               <a:t>/* </a:t>
             </a:r>
             <a:r>
-              <a:rPr lang="ko-KR" altLang="en-US" b="0" dirty="0"/>
+              <a:rPr lang="ko-KR" altLang="en-US" dirty="0"/>
               <a:t>로 시작</a:t>
             </a:r>
             <a:r>
-              <a:rPr lang="en-US" altLang="ko-KR" b="0" dirty="0"/>
+              <a:rPr lang="en-US" altLang="ko-KR" dirty="0"/>
               <a:t>, */</a:t>
             </a:r>
             <a:r>
-              <a:rPr lang="ko-KR" altLang="en-US" b="0" dirty="0"/>
+              <a:rPr lang="ko-KR" altLang="en-US" dirty="0"/>
               <a:t>로</a:t>
             </a:r>
             <a:r>
-              <a:rPr lang="en-US" altLang="ko-KR" b="0" dirty="0"/>
+              <a:rPr lang="en-US" altLang="ko-KR" dirty="0"/>
               <a:t> </a:t>
             </a:r>
             <a:r>
-              <a:rPr lang="ko-KR" altLang="en-US" b="0" dirty="0"/>
+              <a:rPr lang="ko-KR" altLang="en-US" dirty="0"/>
               <a:t>종결</a:t>
             </a:r>
-            <a:endParaRPr lang="en-US" altLang="ko-KR" b="0" dirty="0"/>
+            <a:endParaRPr lang="en-US" altLang="ko-KR" dirty="0"/>
           </a:p>
         </p:txBody>
       </p:sp>
@@ -7814,15 +7818,15 @@
           <a:lstStyle/>
           <a:p>
             <a:r>
-              <a:rPr lang="en-US" altLang="ko-KR" b="0" dirty="0"/>
+              <a:rPr lang="en-US" altLang="ko-KR" dirty="0"/>
               <a:t>2.6 </a:t>
             </a:r>
             <a:r>
-              <a:rPr lang="ko-KR" altLang="en-US" b="0" dirty="0"/>
+              <a:rPr lang="ko-KR" altLang="en-US" dirty="0"/>
               <a:t>주석</a:t>
             </a:r>
             <a:r>
-              <a:rPr lang="en-US" altLang="ko-KR" b="0" dirty="0"/>
+              <a:rPr lang="en-US" altLang="ko-KR" dirty="0"/>
               <a:t>(Comment)</a:t>
             </a:r>
             <a:endParaRPr lang="ko-KR" altLang="en-US" dirty="0"/>
@@ -8216,14 +8220,13 @@
           <a:lstStyle/>
           <a:p>
             <a:r>
-              <a:rPr lang="en-US" altLang="ko-KR" b="0" dirty="0"/>
+              <a:rPr lang="en-US" altLang="ko-KR" dirty="0"/>
               <a:t>2.7 </a:t>
             </a:r>
             <a:r>
-              <a:rPr lang="ko-KR" altLang="en-US" b="0" dirty="0"/>
+              <a:rPr lang="ko-KR" altLang="en-US" dirty="0"/>
               <a:t>프로그램 구성 요소와 기본 출력</a:t>
             </a:r>
-            <a:endParaRPr lang="ko-KR" altLang="en-US" dirty="0"/>
           </a:p>
         </p:txBody>
       </p:sp>
@@ -8330,7 +8333,7 @@
           <a:lstStyle/>
           <a:p>
             <a:r>
-              <a:rPr lang="en-US" altLang="ko-KR" sz="1800" b="0" i="0" u="none" strike="noStrike" dirty="0">
+              <a:rPr lang="en-US" altLang="ko-KR" sz="1800" b="1" i="0" u="none" strike="noStrike" dirty="0">
                 <a:solidFill>
                   <a:srgbClr val="4078F2"/>
                 </a:solidFill>
@@ -8340,7 +8343,7 @@
               <a:t>#include </a:t>
             </a:r>
             <a:r>
-              <a:rPr lang="en-US" altLang="ko-KR" sz="1800" b="0" i="0" u="none" strike="noStrike" dirty="0">
+              <a:rPr lang="en-US" altLang="ko-KR" sz="1800" b="1" i="0" u="none" strike="noStrike" dirty="0">
                 <a:solidFill>
                   <a:srgbClr val="50A14F"/>
                 </a:solidFill>
@@ -8350,7 +8353,7 @@
               <a:t>&lt;stdio.h&gt;</a:t>
             </a:r>
             <a:br>
-              <a:rPr lang="en-US" altLang="ko-KR" sz="1800" b="0" i="0" u="none" strike="noStrike" dirty="0">
+              <a:rPr lang="en-US" altLang="ko-KR" sz="1800" b="1" i="0" u="none" strike="noStrike" dirty="0">
                 <a:solidFill>
                   <a:srgbClr val="383A42"/>
                 </a:solidFill>
@@ -8359,7 +8362,7 @@
               </a:rPr>
             </a:br>
             <a:br>
-              <a:rPr lang="en-US" altLang="ko-KR" sz="1800" b="0" i="0" u="none" strike="noStrike" dirty="0">
+              <a:rPr lang="en-US" altLang="ko-KR" sz="1800" b="1" i="0" u="none" strike="noStrike" dirty="0">
                 <a:solidFill>
                   <a:srgbClr val="383A42"/>
                 </a:solidFill>
@@ -8368,7 +8371,7 @@
               </a:rPr>
             </a:br>
             <a:r>
-              <a:rPr lang="en-US" altLang="ko-KR" sz="1800" b="0" i="0" u="none" strike="noStrike" dirty="0">
+              <a:rPr lang="en-US" altLang="ko-KR" sz="1800" b="1" i="0" u="none" strike="noStrike" dirty="0">
                 <a:solidFill>
                   <a:srgbClr val="A626A4"/>
                 </a:solidFill>
@@ -8378,7 +8381,7 @@
               <a:t>int</a:t>
             </a:r>
             <a:r>
-              <a:rPr lang="en-US" altLang="ko-KR" sz="1800" b="0" i="0" u="none" strike="noStrike" dirty="0">
+              <a:rPr lang="en-US" altLang="ko-KR" sz="1800" b="1" i="0" u="none" strike="noStrike" dirty="0">
                 <a:solidFill>
                   <a:srgbClr val="383A42"/>
                 </a:solidFill>
@@ -8388,7 +8391,7 @@
               <a:t> </a:t>
             </a:r>
             <a:r>
-              <a:rPr lang="en-US" altLang="ko-KR" sz="1800" b="0" i="0" u="none" strike="noStrike" dirty="0">
+              <a:rPr lang="en-US" altLang="ko-KR" sz="1800" b="1" i="0" u="none" strike="noStrike" dirty="0">
                 <a:solidFill>
                   <a:srgbClr val="4078F2"/>
                 </a:solidFill>
@@ -8398,7 +8401,7 @@
               <a:t>main</a:t>
             </a:r>
             <a:r>
-              <a:rPr lang="en-US" altLang="ko-KR" sz="1800" b="0" i="0" u="none" strike="noStrike" dirty="0">
+              <a:rPr lang="en-US" altLang="ko-KR" sz="1800" b="1" i="0" u="none" strike="noStrike" dirty="0">
                 <a:solidFill>
                   <a:srgbClr val="383A42"/>
                 </a:solidFill>
@@ -8408,7 +8411,7 @@
               <a:t>(</a:t>
             </a:r>
             <a:r>
-              <a:rPr lang="en-US" altLang="ko-KR" sz="1800" b="0" i="0" u="none" strike="noStrike" dirty="0">
+              <a:rPr lang="en-US" altLang="ko-KR" sz="1800" b="1" i="0" u="none" strike="noStrike" dirty="0">
                 <a:solidFill>
                   <a:srgbClr val="A626A4"/>
                 </a:solidFill>
@@ -8418,7 +8421,7 @@
               <a:t>void</a:t>
             </a:r>
             <a:r>
-              <a:rPr lang="en-US" altLang="ko-KR" sz="1800" b="0" i="0" u="none" strike="noStrike" dirty="0">
+              <a:rPr lang="en-US" altLang="ko-KR" sz="1800" b="1" i="0" u="none" strike="noStrike" dirty="0">
                 <a:solidFill>
                   <a:srgbClr val="383A42"/>
                 </a:solidFill>
@@ -8428,7 +8431,7 @@
               <a:t>)</a:t>
             </a:r>
             <a:br>
-              <a:rPr lang="en-US" altLang="ko-KR" sz="1800" b="0" i="0" u="none" strike="noStrike" dirty="0">
+              <a:rPr lang="en-US" altLang="ko-KR" sz="1800" b="1" i="0" u="none" strike="noStrike" dirty="0">
                 <a:solidFill>
                   <a:srgbClr val="383A42"/>
                 </a:solidFill>
@@ -8437,7 +8440,7 @@
               </a:rPr>
             </a:br>
             <a:r>
-              <a:rPr lang="en-US" altLang="ko-KR" sz="1800" b="0" i="0" u="none" strike="noStrike" dirty="0">
+              <a:rPr lang="en-US" altLang="ko-KR" sz="1800" b="1" i="0" u="none" strike="noStrike" dirty="0">
                 <a:solidFill>
                   <a:srgbClr val="383A42"/>
                 </a:solidFill>
@@ -8447,7 +8450,7 @@
               <a:t>{</a:t>
             </a:r>
             <a:br>
-              <a:rPr lang="en-US" altLang="ko-KR" sz="1800" b="0" i="0" u="none" strike="noStrike" dirty="0">
+              <a:rPr lang="en-US" altLang="ko-KR" sz="1800" b="1" i="0" u="none" strike="noStrike" dirty="0">
                 <a:solidFill>
                   <a:srgbClr val="383A42"/>
                 </a:solidFill>
@@ -8456,7 +8459,7 @@
               </a:rPr>
             </a:br>
             <a:r>
-              <a:rPr lang="en-US" altLang="ko-KR" sz="1800" b="0" i="0" u="none" strike="noStrike" dirty="0">
+              <a:rPr lang="en-US" altLang="ko-KR" sz="1800" b="1" i="0" u="none" strike="noStrike" dirty="0">
                 <a:solidFill>
                   <a:srgbClr val="383A42"/>
                 </a:solidFill>
@@ -8466,7 +8469,7 @@
               <a:t>    </a:t>
             </a:r>
             <a:r>
-              <a:rPr lang="en-US" altLang="ko-KR" sz="1800" b="0" i="0" u="none" strike="noStrike" dirty="0">
+              <a:rPr lang="en-US" altLang="ko-KR" sz="1800" b="1" i="0" u="none" strike="noStrike" dirty="0">
                 <a:solidFill>
                   <a:srgbClr val="C18401"/>
                 </a:solidFill>
@@ -8476,7 +8479,7 @@
               <a:t>printf</a:t>
             </a:r>
             <a:r>
-              <a:rPr lang="en-US" altLang="ko-KR" sz="1800" b="0" i="0" u="none" strike="noStrike" dirty="0">
+              <a:rPr lang="en-US" altLang="ko-KR" sz="1800" b="1" i="0" u="none" strike="noStrike" dirty="0">
                 <a:solidFill>
                   <a:srgbClr val="383A42"/>
                 </a:solidFill>
@@ -8486,7 +8489,7 @@
               <a:t>(</a:t>
             </a:r>
             <a:r>
-              <a:rPr lang="en-US" altLang="ko-KR" sz="1800" b="0" i="0" u="none" strike="noStrike" dirty="0">
+              <a:rPr lang="en-US" altLang="ko-KR" sz="1800" b="1" i="0" u="none" strike="noStrike" dirty="0">
                 <a:solidFill>
                   <a:srgbClr val="50A14F"/>
                 </a:solidFill>
@@ -8496,7 +8499,7 @@
               <a:t>"++++++++++++++++++++++++++++++++++++++++++++++++\n"</a:t>
             </a:r>
             <a:r>
-              <a:rPr lang="en-US" altLang="ko-KR" sz="1800" b="0" i="0" u="none" strike="noStrike" dirty="0">
+              <a:rPr lang="en-US" altLang="ko-KR" sz="1800" b="1" i="0" u="none" strike="noStrike" dirty="0">
                 <a:solidFill>
                   <a:srgbClr val="383A42"/>
                 </a:solidFill>
@@ -8506,7 +8509,7 @@
               <a:t>);</a:t>
             </a:r>
             <a:br>
-              <a:rPr lang="en-US" altLang="ko-KR" sz="1800" b="0" i="0" u="none" strike="noStrike" dirty="0">
+              <a:rPr lang="en-US" altLang="ko-KR" sz="1800" b="1" i="0" u="none" strike="noStrike" dirty="0">
                 <a:solidFill>
                   <a:srgbClr val="383A42"/>
                 </a:solidFill>
@@ -8515,7 +8518,7 @@
               </a:rPr>
             </a:br>
             <a:r>
-              <a:rPr lang="en-US" altLang="ko-KR" sz="1800" b="0" i="0" u="none" strike="noStrike" dirty="0">
+              <a:rPr lang="en-US" altLang="ko-KR" sz="1800" b="1" i="0" u="none" strike="noStrike" dirty="0">
                 <a:solidFill>
                   <a:srgbClr val="383A42"/>
                 </a:solidFill>
@@ -8525,7 +8528,7 @@
               <a:t>    </a:t>
             </a:r>
             <a:r>
-              <a:rPr lang="en-US" altLang="ko-KR" sz="1800" b="0" i="0" u="none" strike="noStrike" dirty="0">
+              <a:rPr lang="en-US" altLang="ko-KR" sz="1800" b="1" i="0" u="none" strike="noStrike" dirty="0">
                 <a:solidFill>
                   <a:srgbClr val="C18401"/>
                 </a:solidFill>
@@ -8535,7 +8538,7 @@
               <a:t>printf</a:t>
             </a:r>
             <a:r>
-              <a:rPr lang="en-US" altLang="ko-KR" sz="1800" b="0" i="0" u="none" strike="noStrike" dirty="0">
+              <a:rPr lang="en-US" altLang="ko-KR" sz="1800" b="1" i="0" u="none" strike="noStrike" dirty="0">
                 <a:solidFill>
                   <a:srgbClr val="383A42"/>
                 </a:solidFill>
@@ -8545,7 +8548,7 @@
               <a:t>(</a:t>
             </a:r>
             <a:r>
-              <a:rPr lang="en-US" altLang="ko-KR" sz="1800" b="0" i="0" u="none" strike="noStrike" dirty="0">
+              <a:rPr lang="en-US" altLang="ko-KR" sz="1800" b="1" i="0" u="none" strike="noStrike" dirty="0">
                 <a:solidFill>
                   <a:srgbClr val="50A14F"/>
                 </a:solidFill>
@@ -8555,7 +8558,7 @@
               <a:t>"</a:t>
             </a:r>
             <a:r>
-              <a:rPr lang="ko-KR" altLang="en-US" sz="1800" b="0" i="0" u="none" strike="noStrike" dirty="0">
+              <a:rPr lang="ko-KR" altLang="en-US" sz="1800" b="1" i="0" u="none" strike="noStrike" dirty="0">
                 <a:solidFill>
                   <a:srgbClr val="50A14F"/>
                 </a:solidFill>
@@ -8565,7 +8568,7 @@
               <a:t>이력서</a:t>
             </a:r>
             <a:r>
-              <a:rPr lang="en-US" altLang="ko-KR" sz="1800" b="0" i="0" u="none" strike="noStrike" dirty="0">
+              <a:rPr lang="en-US" altLang="ko-KR" sz="1800" b="1" i="0" u="none" strike="noStrike" dirty="0">
                 <a:solidFill>
                   <a:srgbClr val="50A14F"/>
                 </a:solidFill>
@@ -8575,7 +8578,7 @@
               <a:t>\n"</a:t>
             </a:r>
             <a:r>
-              <a:rPr lang="en-US" altLang="ko-KR" sz="1800" b="0" i="0" u="none" strike="noStrike" dirty="0">
+              <a:rPr lang="en-US" altLang="ko-KR" sz="1800" b="1" i="0" u="none" strike="noStrike" dirty="0">
                 <a:solidFill>
                   <a:srgbClr val="383A42"/>
                 </a:solidFill>
@@ -8585,7 +8588,7 @@
               <a:t>);</a:t>
             </a:r>
             <a:br>
-              <a:rPr lang="en-US" altLang="ko-KR" sz="1800" b="0" i="0" u="none" strike="noStrike" dirty="0">
+              <a:rPr lang="en-US" altLang="ko-KR" sz="1800" b="1" i="0" u="none" strike="noStrike" dirty="0">
                 <a:solidFill>
                   <a:srgbClr val="383A42"/>
                 </a:solidFill>
@@ -8594,7 +8597,7 @@
               </a:rPr>
             </a:br>
             <a:r>
-              <a:rPr lang="en-US" altLang="ko-KR" sz="1800" b="0" i="0" u="none" strike="noStrike" dirty="0">
+              <a:rPr lang="en-US" altLang="ko-KR" sz="1800" b="1" i="0" u="none" strike="noStrike" dirty="0">
                 <a:solidFill>
                   <a:srgbClr val="383A42"/>
                 </a:solidFill>
@@ -8604,7 +8607,7 @@
               <a:t>    </a:t>
             </a:r>
             <a:r>
-              <a:rPr lang="en-US" altLang="ko-KR" sz="1800" b="0" i="0" u="none" strike="noStrike" dirty="0">
+              <a:rPr lang="en-US" altLang="ko-KR" sz="1800" b="1" i="0" u="none" strike="noStrike" dirty="0">
                 <a:solidFill>
                   <a:srgbClr val="C18401"/>
                 </a:solidFill>
@@ -8614,7 +8617,7 @@
               <a:t>printf</a:t>
             </a:r>
             <a:r>
-              <a:rPr lang="en-US" altLang="ko-KR" sz="1800" b="0" i="0" u="none" strike="noStrike" dirty="0">
+              <a:rPr lang="en-US" altLang="ko-KR" sz="1800" b="1" i="0" u="none" strike="noStrike" dirty="0">
                 <a:solidFill>
                   <a:srgbClr val="383A42"/>
                 </a:solidFill>
@@ -8624,7 +8627,7 @@
               <a:t>(</a:t>
             </a:r>
             <a:r>
-              <a:rPr lang="en-US" altLang="ko-KR" sz="1800" b="0" i="0" u="none" strike="noStrike" dirty="0">
+              <a:rPr lang="en-US" altLang="ko-KR" sz="1800" b="1" i="0" u="none" strike="noStrike" dirty="0">
                 <a:solidFill>
                   <a:srgbClr val="50A14F"/>
                 </a:solidFill>
@@ -8634,7 +8637,7 @@
               <a:t>"++++++++++++++++++++++++++++++++++++++++++++++++\n"</a:t>
             </a:r>
             <a:r>
-              <a:rPr lang="en-US" altLang="ko-KR" sz="1800" b="0" i="0" u="none" strike="noStrike" dirty="0">
+              <a:rPr lang="en-US" altLang="ko-KR" sz="1800" b="1" i="0" u="none" strike="noStrike" dirty="0">
                 <a:solidFill>
                   <a:srgbClr val="383A42"/>
                 </a:solidFill>
@@ -8644,7 +8647,7 @@
               <a:t>); </a:t>
             </a:r>
             <a:br>
-              <a:rPr lang="en-US" altLang="ko-KR" sz="1800" b="0" i="0" u="none" strike="noStrike" dirty="0">
+              <a:rPr lang="en-US" altLang="ko-KR" sz="1800" b="1" i="0" u="none" strike="noStrike" dirty="0">
                 <a:solidFill>
                   <a:srgbClr val="383A42"/>
                 </a:solidFill>
@@ -8653,7 +8656,7 @@
               </a:rPr>
             </a:br>
             <a:r>
-              <a:rPr lang="en-US" altLang="ko-KR" sz="1800" b="0" i="0" u="none" strike="noStrike" dirty="0">
+              <a:rPr lang="en-US" altLang="ko-KR" sz="1800" b="1" i="0" u="none" strike="noStrike" dirty="0">
                 <a:solidFill>
                   <a:srgbClr val="383A42"/>
                 </a:solidFill>
@@ -8663,7 +8666,7 @@
               <a:t>    </a:t>
             </a:r>
             <a:br>
-              <a:rPr lang="en-US" altLang="ko-KR" sz="1800" b="0" i="0" u="none" strike="noStrike" dirty="0">
+              <a:rPr lang="en-US" altLang="ko-KR" sz="1800" b="1" i="0" u="none" strike="noStrike" dirty="0">
                 <a:solidFill>
                   <a:srgbClr val="383A42"/>
                 </a:solidFill>
@@ -8672,7 +8675,7 @@
               </a:rPr>
             </a:br>
             <a:r>
-              <a:rPr lang="en-US" altLang="ko-KR" sz="1800" b="0" i="0" u="none" strike="noStrike" dirty="0">
+              <a:rPr lang="en-US" altLang="ko-KR" sz="1800" b="1" i="0" u="none" strike="noStrike" dirty="0">
                 <a:solidFill>
                   <a:srgbClr val="383A42"/>
                 </a:solidFill>
@@ -8682,7 +8685,7 @@
               <a:t>    </a:t>
             </a:r>
             <a:r>
-              <a:rPr lang="en-US" altLang="ko-KR" sz="1800" b="0" i="0" u="none" strike="noStrike" dirty="0">
+              <a:rPr lang="en-US" altLang="ko-KR" sz="1800" b="1" i="0" u="none" strike="noStrike" dirty="0">
                 <a:solidFill>
                   <a:srgbClr val="C18401"/>
                 </a:solidFill>
@@ -8692,7 +8695,7 @@
               <a:t>printf</a:t>
             </a:r>
             <a:r>
-              <a:rPr lang="en-US" altLang="ko-KR" sz="1800" b="0" i="0" u="none" strike="noStrike" dirty="0">
+              <a:rPr lang="en-US" altLang="ko-KR" sz="1800" b="1" i="0" u="none" strike="noStrike" dirty="0">
                 <a:solidFill>
                   <a:srgbClr val="383A42"/>
                 </a:solidFill>
@@ -8702,7 +8705,7 @@
               <a:t>(</a:t>
             </a:r>
             <a:r>
-              <a:rPr lang="en-US" altLang="ko-KR" sz="1800" b="0" i="0" u="none" strike="noStrike" dirty="0">
+              <a:rPr lang="en-US" altLang="ko-KR" sz="1800" b="1" i="0" u="none" strike="noStrike" dirty="0">
                 <a:solidFill>
                   <a:srgbClr val="50A14F"/>
                 </a:solidFill>
@@ -8712,7 +8715,7 @@
               <a:t>"</a:t>
             </a:r>
             <a:r>
-              <a:rPr lang="ko-KR" altLang="en-US" sz="1800" b="0" i="0" u="none" strike="noStrike" dirty="0">
+              <a:rPr lang="ko-KR" altLang="en-US" sz="1800" b="1" i="0" u="none" strike="noStrike" dirty="0">
                 <a:solidFill>
                   <a:srgbClr val="50A14F"/>
                 </a:solidFill>
@@ -8722,7 +8725,7 @@
               <a:t>성  명</a:t>
             </a:r>
             <a:r>
-              <a:rPr lang="en-US" altLang="ko-KR" sz="1800" b="0" i="0" u="none" strike="noStrike" dirty="0">
+              <a:rPr lang="en-US" altLang="ko-KR" sz="1800" b="1" i="0" u="none" strike="noStrike" dirty="0">
                 <a:solidFill>
                   <a:srgbClr val="50A14F"/>
                 </a:solidFill>
@@ -8732,7 +8735,7 @@
               <a:t>: %s \n"</a:t>
             </a:r>
             <a:r>
-              <a:rPr lang="en-US" altLang="ko-KR" sz="1800" b="0" i="0" u="none" strike="noStrike" dirty="0">
+              <a:rPr lang="en-US" altLang="ko-KR" sz="1800" b="1" i="0" u="none" strike="noStrike" dirty="0">
                 <a:solidFill>
                   <a:srgbClr val="383A42"/>
                 </a:solidFill>
@@ -8742,7 +8745,7 @@
               <a:t>, </a:t>
             </a:r>
             <a:r>
-              <a:rPr lang="en-US" altLang="ko-KR" sz="1800" b="0" i="0" u="none" strike="noStrike" dirty="0">
+              <a:rPr lang="en-US" altLang="ko-KR" sz="1800" b="1" i="0" u="none" strike="noStrike" dirty="0">
                 <a:solidFill>
                   <a:srgbClr val="50A14F"/>
                 </a:solidFill>
@@ -8752,7 +8755,7 @@
               <a:t>"</a:t>
             </a:r>
             <a:r>
-              <a:rPr lang="ko-KR" altLang="en-US" sz="1800" b="0" i="0" u="none" strike="noStrike" dirty="0">
+              <a:rPr lang="ko-KR" altLang="en-US" sz="1800" b="1" i="0" u="none" strike="noStrike" dirty="0">
                 <a:solidFill>
                   <a:srgbClr val="50A14F"/>
                 </a:solidFill>
@@ -8762,7 +8765,7 @@
               <a:t>오세명</a:t>
             </a:r>
             <a:r>
-              <a:rPr lang="en-US" altLang="ko-KR" sz="1800" b="0" i="0" u="none" strike="noStrike" dirty="0">
+              <a:rPr lang="en-US" altLang="ko-KR" sz="1800" b="1" i="0" u="none" strike="noStrike" dirty="0">
                 <a:solidFill>
                   <a:srgbClr val="50A14F"/>
                 </a:solidFill>
@@ -8772,7 +8775,7 @@
               <a:t>"</a:t>
             </a:r>
             <a:r>
-              <a:rPr lang="en-US" altLang="ko-KR" sz="1800" b="0" i="0" u="none" strike="noStrike" dirty="0">
+              <a:rPr lang="en-US" altLang="ko-KR" sz="1800" b="1" i="0" u="none" strike="noStrike" dirty="0">
                 <a:solidFill>
                   <a:srgbClr val="383A42"/>
                 </a:solidFill>
@@ -8782,7 +8785,7 @@
               <a:t>);</a:t>
             </a:r>
             <a:br>
-              <a:rPr lang="en-US" altLang="ko-KR" sz="1800" b="0" i="0" u="none" strike="noStrike" dirty="0">
+              <a:rPr lang="en-US" altLang="ko-KR" sz="1800" b="1" i="0" u="none" strike="noStrike" dirty="0">
                 <a:solidFill>
                   <a:srgbClr val="383A42"/>
                 </a:solidFill>
@@ -8791,7 +8794,7 @@
               </a:rPr>
             </a:br>
             <a:r>
-              <a:rPr lang="en-US" altLang="ko-KR" sz="1800" b="0" i="0" u="none" strike="noStrike" dirty="0">
+              <a:rPr lang="en-US" altLang="ko-KR" sz="1800" b="1" i="0" u="none" strike="noStrike" dirty="0">
                 <a:solidFill>
                   <a:srgbClr val="383A42"/>
                 </a:solidFill>
@@ -8801,7 +8804,7 @@
               <a:t>    </a:t>
             </a:r>
             <a:r>
-              <a:rPr lang="en-US" altLang="ko-KR" sz="1800" b="0" i="0" u="none" strike="noStrike" dirty="0">
+              <a:rPr lang="en-US" altLang="ko-KR" sz="1800" b="1" i="0" u="none" strike="noStrike" dirty="0">
                 <a:solidFill>
                   <a:srgbClr val="C18401"/>
                 </a:solidFill>
@@ -8811,7 +8814,7 @@
               <a:t>printf</a:t>
             </a:r>
             <a:r>
-              <a:rPr lang="en-US" altLang="ko-KR" sz="1800" b="0" i="0" u="none" strike="noStrike" dirty="0">
+              <a:rPr lang="en-US" altLang="ko-KR" sz="1800" b="1" i="0" u="none" strike="noStrike" dirty="0">
                 <a:solidFill>
                   <a:srgbClr val="383A42"/>
                 </a:solidFill>
@@ -8821,7 +8824,7 @@
               <a:t>(</a:t>
             </a:r>
             <a:r>
-              <a:rPr lang="en-US" altLang="ko-KR" sz="1800" b="0" i="0" u="none" strike="noStrike" dirty="0">
+              <a:rPr lang="en-US" altLang="ko-KR" sz="1800" b="1" i="0" u="none" strike="noStrike" dirty="0">
                 <a:solidFill>
                   <a:srgbClr val="50A14F"/>
                 </a:solidFill>
@@ -8831,7 +8834,7 @@
               <a:t>"</a:t>
             </a:r>
             <a:r>
-              <a:rPr lang="ko-KR" altLang="en-US" sz="1800" b="0" i="0" u="none" strike="noStrike" dirty="0">
+              <a:rPr lang="ko-KR" altLang="en-US" sz="1800" b="1" i="0" u="none" strike="noStrike" dirty="0">
                 <a:solidFill>
                   <a:srgbClr val="50A14F"/>
                 </a:solidFill>
@@ -8841,7 +8844,7 @@
               <a:t>나  이</a:t>
             </a:r>
             <a:r>
-              <a:rPr lang="en-US" altLang="ko-KR" sz="1800" b="0" i="0" u="none" strike="noStrike" dirty="0">
+              <a:rPr lang="en-US" altLang="ko-KR" sz="1800" b="1" i="0" u="none" strike="noStrike" dirty="0">
                 <a:solidFill>
                   <a:srgbClr val="50A14F"/>
                 </a:solidFill>
@@ -8851,7 +8854,7 @@
               <a:t>: %d \n"</a:t>
             </a:r>
             <a:r>
-              <a:rPr lang="en-US" altLang="ko-KR" sz="1800" b="0" i="0" u="none" strike="noStrike" dirty="0">
+              <a:rPr lang="en-US" altLang="ko-KR" sz="1800" b="1" i="0" u="none" strike="noStrike" dirty="0">
                 <a:solidFill>
                   <a:srgbClr val="383A42"/>
                 </a:solidFill>
@@ -8861,7 +8864,7 @@
               <a:t>, </a:t>
             </a:r>
             <a:r>
-              <a:rPr lang="en-US" altLang="ko-KR" sz="1800" b="0" i="0" u="none" strike="noStrike" dirty="0">
+              <a:rPr lang="en-US" altLang="ko-KR" sz="1800" b="1" i="0" u="none" strike="noStrike" dirty="0">
                 <a:solidFill>
                   <a:srgbClr val="986801"/>
                 </a:solidFill>
@@ -8871,7 +8874,7 @@
               <a:t>20</a:t>
             </a:r>
             <a:r>
-              <a:rPr lang="en-US" altLang="ko-KR" sz="1800" b="0" i="0" u="none" strike="noStrike" dirty="0">
+              <a:rPr lang="en-US" altLang="ko-KR" sz="1800" b="1" i="0" u="none" strike="noStrike" dirty="0">
                 <a:solidFill>
                   <a:srgbClr val="383A42"/>
                 </a:solidFill>
@@ -8881,7 +8884,7 @@
               <a:t>);</a:t>
             </a:r>
             <a:br>
-              <a:rPr lang="en-US" altLang="ko-KR" sz="1800" b="0" i="0" u="none" strike="noStrike" dirty="0">
+              <a:rPr lang="en-US" altLang="ko-KR" sz="1800" b="1" i="0" u="none" strike="noStrike" dirty="0">
                 <a:solidFill>
                   <a:srgbClr val="383A42"/>
                 </a:solidFill>
@@ -8890,7 +8893,7 @@
               </a:rPr>
             </a:br>
             <a:r>
-              <a:rPr lang="en-US" altLang="ko-KR" sz="1800" b="0" i="0" u="none" strike="noStrike" dirty="0">
+              <a:rPr lang="en-US" altLang="ko-KR" sz="1800" b="1" i="0" u="none" strike="noStrike" dirty="0">
                 <a:solidFill>
                   <a:srgbClr val="383A42"/>
                 </a:solidFill>
@@ -8900,7 +8903,7 @@
               <a:t>    </a:t>
             </a:r>
             <a:r>
-              <a:rPr lang="en-US" altLang="ko-KR" sz="1800" b="0" i="0" u="none" strike="noStrike" dirty="0">
+              <a:rPr lang="en-US" altLang="ko-KR" sz="1800" b="1" i="0" u="none" strike="noStrike" dirty="0">
                 <a:solidFill>
                   <a:srgbClr val="C18401"/>
                 </a:solidFill>
@@ -8910,7 +8913,7 @@
               <a:t>printf</a:t>
             </a:r>
             <a:r>
-              <a:rPr lang="en-US" altLang="ko-KR" sz="1800" b="0" i="0" u="none" strike="noStrike" dirty="0">
+              <a:rPr lang="en-US" altLang="ko-KR" sz="1800" b="1" i="0" u="none" strike="noStrike" dirty="0">
                 <a:solidFill>
                   <a:srgbClr val="383A42"/>
                 </a:solidFill>
@@ -8920,7 +8923,7 @@
               <a:t>(</a:t>
             </a:r>
             <a:r>
-              <a:rPr lang="en-US" altLang="ko-KR" sz="1800" b="0" i="0" u="none" strike="noStrike" dirty="0">
+              <a:rPr lang="en-US" altLang="ko-KR" sz="1800" b="1" i="0" u="none" strike="noStrike" dirty="0">
                 <a:solidFill>
                   <a:srgbClr val="50A14F"/>
                 </a:solidFill>
@@ -8930,7 +8933,7 @@
               <a:t>"</a:t>
             </a:r>
             <a:r>
-              <a:rPr lang="ko-KR" altLang="en-US" sz="1800" b="0" i="0" u="none" strike="noStrike" dirty="0">
+              <a:rPr lang="ko-KR" altLang="en-US" sz="1800" b="1" i="0" u="none" strike="noStrike" dirty="0">
                 <a:solidFill>
                   <a:srgbClr val="50A14F"/>
                 </a:solidFill>
@@ -8940,7 +8943,7 @@
               <a:t>주  소</a:t>
             </a:r>
             <a:r>
-              <a:rPr lang="en-US" altLang="ko-KR" sz="1800" b="0" i="0" u="none" strike="noStrike" dirty="0">
+              <a:rPr lang="en-US" altLang="ko-KR" sz="1800" b="1" i="0" u="none" strike="noStrike" dirty="0">
                 <a:solidFill>
                   <a:srgbClr val="50A14F"/>
                 </a:solidFill>
@@ -8950,7 +8953,7 @@
               <a:t>: %s \n"</a:t>
             </a:r>
             <a:r>
-              <a:rPr lang="en-US" altLang="ko-KR" sz="1800" b="0" i="0" u="none" strike="noStrike" dirty="0">
+              <a:rPr lang="en-US" altLang="ko-KR" sz="1800" b="1" i="0" u="none" strike="noStrike" dirty="0">
                 <a:solidFill>
                   <a:srgbClr val="383A42"/>
                 </a:solidFill>
@@ -8960,7 +8963,7 @@
               <a:t>, </a:t>
             </a:r>
             <a:r>
-              <a:rPr lang="en-US" altLang="ko-KR" sz="1800" b="0" i="0" u="none" strike="noStrike" dirty="0">
+              <a:rPr lang="en-US" altLang="ko-KR" sz="1800" b="1" i="0" u="none" strike="noStrike" dirty="0">
                 <a:solidFill>
                   <a:srgbClr val="50A14F"/>
                 </a:solidFill>
@@ -8970,7 +8973,7 @@
               <a:t>"</a:t>
             </a:r>
             <a:r>
-              <a:rPr lang="ko-KR" altLang="en-US" sz="1800" b="0" i="0" u="none" strike="noStrike" dirty="0">
+              <a:rPr lang="ko-KR" altLang="en-US" sz="1800" b="1" i="0" u="none" strike="noStrike" dirty="0">
                 <a:solidFill>
                   <a:srgbClr val="50A14F"/>
                 </a:solidFill>
@@ -8980,7 +8983,7 @@
               <a:t>서울시 개발구 게임동</a:t>
             </a:r>
             <a:r>
-              <a:rPr lang="en-US" altLang="ko-KR" sz="1800" b="0" i="0" u="none" strike="noStrike" dirty="0">
+              <a:rPr lang="en-US" altLang="ko-KR" sz="1800" b="1" i="0" u="none" strike="noStrike" dirty="0">
                 <a:solidFill>
                   <a:srgbClr val="50A14F"/>
                 </a:solidFill>
@@ -8990,7 +8993,7 @@
               <a:t>"</a:t>
             </a:r>
             <a:r>
-              <a:rPr lang="en-US" altLang="ko-KR" sz="1800" b="0" i="0" u="none" strike="noStrike" dirty="0">
+              <a:rPr lang="en-US" altLang="ko-KR" sz="1800" b="1" i="0" u="none" strike="noStrike" dirty="0">
                 <a:solidFill>
                   <a:srgbClr val="383A42"/>
                 </a:solidFill>
@@ -9000,7 +9003,7 @@
               <a:t>);</a:t>
             </a:r>
             <a:br>
-              <a:rPr lang="en-US" altLang="ko-KR" sz="1800" b="0" i="0" u="none" strike="noStrike" dirty="0">
+              <a:rPr lang="en-US" altLang="ko-KR" sz="1800" b="1" i="0" u="none" strike="noStrike" dirty="0">
                 <a:solidFill>
                   <a:srgbClr val="383A42"/>
                 </a:solidFill>
@@ -9009,7 +9012,7 @@
               </a:rPr>
             </a:br>
             <a:r>
-              <a:rPr lang="en-US" altLang="ko-KR" sz="1800" b="0" i="0" u="none" strike="noStrike" dirty="0">
+              <a:rPr lang="en-US" altLang="ko-KR" sz="1800" b="1" i="0" u="none" strike="noStrike" dirty="0">
                 <a:solidFill>
                   <a:srgbClr val="383A42"/>
                 </a:solidFill>
@@ -9019,7 +9022,7 @@
               <a:t>    </a:t>
             </a:r>
             <a:r>
-              <a:rPr lang="en-US" altLang="ko-KR" sz="1800" b="0" i="0" u="none" strike="noStrike" dirty="0">
+              <a:rPr lang="en-US" altLang="ko-KR" sz="1800" b="1" i="0" u="none" strike="noStrike" dirty="0">
                 <a:solidFill>
                   <a:srgbClr val="C18401"/>
                 </a:solidFill>
@@ -9029,7 +9032,7 @@
               <a:t>printf</a:t>
             </a:r>
             <a:r>
-              <a:rPr lang="en-US" altLang="ko-KR" sz="1800" b="0" i="0" u="none" strike="noStrike" dirty="0">
+              <a:rPr lang="en-US" altLang="ko-KR" sz="1800" b="1" i="0" u="none" strike="noStrike" dirty="0">
                 <a:solidFill>
                   <a:srgbClr val="383A42"/>
                 </a:solidFill>
@@ -9039,7 +9042,7 @@
               <a:t>(</a:t>
             </a:r>
             <a:r>
-              <a:rPr lang="en-US" altLang="ko-KR" sz="1800" b="0" i="0" u="none" strike="noStrike" dirty="0">
+              <a:rPr lang="en-US" altLang="ko-KR" sz="1800" b="1" i="0" u="none" strike="noStrike" dirty="0">
                 <a:solidFill>
                   <a:srgbClr val="50A14F"/>
                 </a:solidFill>
@@ -9049,7 +9052,7 @@
               <a:t>"</a:t>
             </a:r>
             <a:r>
-              <a:rPr lang="ko-KR" altLang="en-US" sz="1800" b="0" i="0" u="none" strike="noStrike" dirty="0">
+              <a:rPr lang="ko-KR" altLang="en-US" sz="1800" b="1" i="0" u="none" strike="noStrike" dirty="0">
                 <a:solidFill>
                   <a:srgbClr val="50A14F"/>
                 </a:solidFill>
@@ -9059,7 +9062,7 @@
               <a:t>연락처</a:t>
             </a:r>
             <a:r>
-              <a:rPr lang="en-US" altLang="ko-KR" sz="1800" b="0" i="0" u="none" strike="noStrike" dirty="0">
+              <a:rPr lang="en-US" altLang="ko-KR" sz="1800" b="1" i="0" u="none" strike="noStrike" dirty="0">
                 <a:solidFill>
                   <a:srgbClr val="50A14F"/>
                 </a:solidFill>
@@ -9069,7 +9072,7 @@
               <a:t>: %s-%s-%s \n"</a:t>
             </a:r>
             <a:r>
-              <a:rPr lang="en-US" altLang="ko-KR" sz="1800" b="0" i="0" u="none" strike="noStrike" dirty="0">
+              <a:rPr lang="en-US" altLang="ko-KR" sz="1800" b="1" i="0" u="none" strike="noStrike" dirty="0">
                 <a:solidFill>
                   <a:srgbClr val="383A42"/>
                 </a:solidFill>
@@ -9079,7 +9082,7 @@
               <a:t>, </a:t>
             </a:r>
             <a:r>
-              <a:rPr lang="en-US" altLang="ko-KR" sz="1800" b="0" i="0" u="none" strike="noStrike" dirty="0">
+              <a:rPr lang="en-US" altLang="ko-KR" sz="1800" b="1" i="0" u="none" strike="noStrike" dirty="0">
                 <a:solidFill>
                   <a:srgbClr val="50A14F"/>
                 </a:solidFill>
@@ -9089,7 +9092,7 @@
               <a:t>"010"</a:t>
             </a:r>
             <a:r>
-              <a:rPr lang="en-US" altLang="ko-KR" sz="1800" b="0" i="0" u="none" strike="noStrike" dirty="0">
+              <a:rPr lang="en-US" altLang="ko-KR" sz="1800" b="1" i="0" u="none" strike="noStrike" dirty="0">
                 <a:solidFill>
                   <a:srgbClr val="383A42"/>
                 </a:solidFill>
@@ -9099,7 +9102,7 @@
               <a:t>, </a:t>
             </a:r>
             <a:r>
-              <a:rPr lang="en-US" altLang="ko-KR" sz="1800" b="0" i="0" u="none" strike="noStrike" dirty="0">
+              <a:rPr lang="en-US" altLang="ko-KR" sz="1800" b="1" i="0" u="none" strike="noStrike" dirty="0">
                 <a:solidFill>
                   <a:srgbClr val="50A14F"/>
                 </a:solidFill>
@@ -9109,7 +9112,7 @@
               <a:t>"1245"</a:t>
             </a:r>
             <a:r>
-              <a:rPr lang="en-US" altLang="ko-KR" sz="1800" b="0" i="0" u="none" strike="noStrike" dirty="0">
+              <a:rPr lang="en-US" altLang="ko-KR" sz="1800" b="1" i="0" u="none" strike="noStrike" dirty="0">
                 <a:solidFill>
                   <a:srgbClr val="383A42"/>
                 </a:solidFill>
@@ -9119,7 +9122,7 @@
               <a:t>, </a:t>
             </a:r>
             <a:r>
-              <a:rPr lang="en-US" altLang="ko-KR" sz="1800" b="0" i="0" u="none" strike="noStrike" dirty="0">
+              <a:rPr lang="en-US" altLang="ko-KR" sz="1800" b="1" i="0" u="none" strike="noStrike" dirty="0">
                 <a:solidFill>
                   <a:srgbClr val="50A14F"/>
                 </a:solidFill>
@@ -9129,7 +9132,7 @@
               <a:t>"6789"</a:t>
             </a:r>
             <a:r>
-              <a:rPr lang="en-US" altLang="ko-KR" sz="1800" b="0" i="0" u="none" strike="noStrike" dirty="0">
+              <a:rPr lang="en-US" altLang="ko-KR" sz="1800" b="1" i="0" u="none" strike="noStrike" dirty="0">
                 <a:solidFill>
                   <a:srgbClr val="383A42"/>
                 </a:solidFill>
@@ -9139,7 +9142,7 @@
               <a:t>);</a:t>
             </a:r>
             <a:br>
-              <a:rPr lang="en-US" altLang="ko-KR" sz="1800" b="0" i="0" u="none" strike="noStrike" dirty="0">
+              <a:rPr lang="en-US" altLang="ko-KR" sz="1800" b="1" i="0" u="none" strike="noStrike" dirty="0">
                 <a:solidFill>
                   <a:srgbClr val="383A42"/>
                 </a:solidFill>
@@ -9148,7 +9151,7 @@
               </a:rPr>
             </a:br>
             <a:br>
-              <a:rPr lang="en-US" altLang="ko-KR" sz="1800" b="0" i="0" u="none" strike="noStrike" dirty="0">
+              <a:rPr lang="en-US" altLang="ko-KR" sz="1800" b="1" i="0" u="none" strike="noStrike" dirty="0">
                 <a:solidFill>
                   <a:srgbClr val="383A42"/>
                 </a:solidFill>
@@ -9157,7 +9160,7 @@
               </a:rPr>
             </a:br>
             <a:r>
-              <a:rPr lang="en-US" altLang="ko-KR" sz="1800" b="0" i="0" u="none" strike="noStrike" dirty="0">
+              <a:rPr lang="en-US" altLang="ko-KR" sz="1800" b="1" i="0" u="none" strike="noStrike" dirty="0">
                 <a:solidFill>
                   <a:srgbClr val="383A42"/>
                 </a:solidFill>
@@ -9167,7 +9170,7 @@
               <a:t>    </a:t>
             </a:r>
             <a:r>
-              <a:rPr lang="en-US" altLang="ko-KR" sz="1800" b="0" i="0" u="none" strike="noStrike" dirty="0">
+              <a:rPr lang="en-US" altLang="ko-KR" sz="1800" b="1" i="0" u="none" strike="noStrike" dirty="0">
                 <a:solidFill>
                   <a:srgbClr val="A626A4"/>
                 </a:solidFill>
@@ -9177,7 +9180,7 @@
               <a:t>return</a:t>
             </a:r>
             <a:r>
-              <a:rPr lang="en-US" altLang="ko-KR" sz="1800" b="0" i="0" u="none" strike="noStrike" dirty="0">
+              <a:rPr lang="en-US" altLang="ko-KR" sz="1800" b="1" i="0" u="none" strike="noStrike" dirty="0">
                 <a:solidFill>
                   <a:srgbClr val="383A42"/>
                 </a:solidFill>
@@ -9187,7 +9190,7 @@
               <a:t> </a:t>
             </a:r>
             <a:r>
-              <a:rPr lang="en-US" altLang="ko-KR" sz="1800" b="0" i="0" u="none" strike="noStrike" dirty="0">
+              <a:rPr lang="en-US" altLang="ko-KR" sz="1800" b="1" i="0" u="none" strike="noStrike" dirty="0">
                 <a:solidFill>
                   <a:srgbClr val="986801"/>
                 </a:solidFill>
@@ -9197,7 +9200,7 @@
               <a:t>0</a:t>
             </a:r>
             <a:r>
-              <a:rPr lang="en-US" altLang="ko-KR" sz="1800" b="0" i="0" u="none" strike="noStrike" dirty="0">
+              <a:rPr lang="en-US" altLang="ko-KR" sz="1800" b="1" i="0" u="none" strike="noStrike" dirty="0">
                 <a:solidFill>
                   <a:srgbClr val="383A42"/>
                 </a:solidFill>
@@ -9207,7 +9210,7 @@
               <a:t>;</a:t>
             </a:r>
             <a:br>
-              <a:rPr lang="en-US" altLang="ko-KR" sz="1800" b="0" i="0" u="none" strike="noStrike" dirty="0">
+              <a:rPr lang="en-US" altLang="ko-KR" sz="1800" b="1" i="0" u="none" strike="noStrike" dirty="0">
                 <a:solidFill>
                   <a:srgbClr val="383A42"/>
                 </a:solidFill>
@@ -9216,7 +9219,7 @@
               </a:rPr>
             </a:br>
             <a:r>
-              <a:rPr lang="en-US" altLang="ko-KR" sz="1800" b="0" i="0" u="none" strike="noStrike" dirty="0">
+              <a:rPr lang="en-US" altLang="ko-KR" sz="1800" b="1" i="0" u="none" strike="noStrike" dirty="0">
                 <a:solidFill>
                   <a:srgbClr val="383A42"/>
                 </a:solidFill>
@@ -9225,7 +9228,7 @@
               </a:rPr>
               <a:t>}</a:t>
             </a:r>
-            <a:endParaRPr lang="ko-KR" altLang="en-US" sz="1800" dirty="0">
+            <a:endParaRPr lang="ko-KR" altLang="en-US" sz="1800" b="1" dirty="0">
               <a:latin typeface="Consolas" panose="020B0609020204030204" pitchFamily="49" charset="0"/>
             </a:endParaRPr>
           </a:p>
@@ -9283,15 +9286,15 @@
           <a:lstStyle/>
           <a:p>
             <a:r>
-              <a:rPr lang="en-US" altLang="ko-KR" b="0" dirty="0"/>
+              <a:rPr lang="en-US" altLang="ko-KR" dirty="0"/>
               <a:t>2.7.1 </a:t>
             </a:r>
             <a:r>
-              <a:rPr lang="ko-KR" altLang="en-US" b="0" dirty="0"/>
+              <a:rPr lang="ko-KR" altLang="en-US" dirty="0"/>
               <a:t>전처리 지시문 </a:t>
             </a:r>
             <a:r>
-              <a:rPr lang="en-US" altLang="ko-KR" b="0" dirty="0"/>
+              <a:rPr lang="en-US" altLang="ko-KR" dirty="0"/>
               <a:t>#include</a:t>
             </a:r>
             <a:endParaRPr lang="ko-KR" altLang="en-US" dirty="0"/>
@@ -9320,152 +9323,152 @@
           <a:lstStyle/>
           <a:p>
             <a:r>
-              <a:rPr lang="en-US" altLang="ko-KR" sz="2400" b="0" dirty="0"/>
+              <a:rPr lang="en-US" altLang="ko-KR" sz="2400" dirty="0"/>
               <a:t>C </a:t>
             </a:r>
             <a:r>
-              <a:rPr lang="ko-KR" altLang="en-US" sz="2400" b="0" dirty="0"/>
+              <a:rPr lang="ko-KR" altLang="en-US" sz="2400" dirty="0"/>
               <a:t>언어 함수 사용 규칙</a:t>
             </a:r>
-            <a:endParaRPr lang="en-US" altLang="ko-KR" sz="2400" b="0" dirty="0"/>
+            <a:endParaRPr lang="en-US" altLang="ko-KR" sz="2400" dirty="0"/>
           </a:p>
           <a:p>
             <a:pPr lvl="1"/>
             <a:r>
-              <a:rPr lang="ko-KR" altLang="en-US" sz="2000" b="0" dirty="0"/>
+              <a:rPr lang="ko-KR" altLang="en-US" sz="2000" dirty="0"/>
               <a:t>함수 사용 시 함수 원형</a:t>
             </a:r>
             <a:r>
-              <a:rPr lang="en-US" altLang="ko-KR" sz="2000" b="0" dirty="0"/>
+              <a:rPr lang="en-US" altLang="ko-KR" sz="2000" dirty="0"/>
               <a:t>(Function Prototype) </a:t>
             </a:r>
             <a:r>
-              <a:rPr lang="ko-KR" altLang="en-US" sz="2000" b="0" dirty="0"/>
+              <a:rPr lang="ko-KR" altLang="en-US" sz="2000" dirty="0"/>
               <a:t>필요</a:t>
             </a:r>
           </a:p>
           <a:p>
             <a:pPr lvl="1"/>
             <a:r>
-              <a:rPr lang="en-US" altLang="ko-KR" sz="2000" b="0" dirty="0"/>
+              <a:rPr lang="en-US" altLang="ko-KR" sz="2000" dirty="0"/>
               <a:t>#include : </a:t>
             </a:r>
             <a:r>
-              <a:rPr lang="ko-KR" altLang="en-US" sz="2000" b="0" dirty="0"/>
+              <a:rPr lang="ko-KR" altLang="en-US" sz="2000" dirty="0"/>
               <a:t>함수 선언이 있는 헤더 파일</a:t>
             </a:r>
             <a:r>
-              <a:rPr lang="en-US" altLang="ko-KR" sz="2000" b="0" dirty="0"/>
+              <a:rPr lang="en-US" altLang="ko-KR" sz="2000" dirty="0"/>
               <a:t>(.h) </a:t>
             </a:r>
             <a:r>
-              <a:rPr lang="ko-KR" altLang="en-US" sz="2000" b="0" dirty="0"/>
+              <a:rPr lang="ko-KR" altLang="en-US" sz="2000" dirty="0"/>
               <a:t>포함</a:t>
             </a:r>
-            <a:endParaRPr lang="en-US" altLang="ko-KR" sz="2000" b="0" dirty="0"/>
+            <a:endParaRPr lang="en-US" altLang="ko-KR" sz="2000" dirty="0"/>
           </a:p>
           <a:p>
             <a:pPr lvl="2"/>
-            <a:endParaRPr lang="ko-KR" altLang="en-US" sz="1600" b="0" dirty="0"/>
-          </a:p>
-          <a:p>
-            <a:r>
-              <a:rPr lang="en-US" altLang="ko-KR" sz="2400" b="0" dirty="0"/>
+            <a:endParaRPr lang="ko-KR" altLang="en-US" sz="1600" dirty="0"/>
+          </a:p>
+          <a:p>
+            <a:r>
+              <a:rPr lang="en-US" altLang="ko-KR" sz="2400" dirty="0"/>
               <a:t>#include</a:t>
             </a:r>
           </a:p>
           <a:p>
             <a:pPr lvl="1"/>
             <a:r>
-              <a:rPr lang="ko-KR" altLang="en-US" sz="2000" b="0" dirty="0"/>
+              <a:rPr lang="ko-KR" altLang="en-US" sz="2000" dirty="0"/>
               <a:t>해당 파일을 소스 코드에 포함</a:t>
             </a:r>
           </a:p>
           <a:p>
             <a:pPr lvl="1"/>
             <a:r>
-              <a:rPr lang="en-US" altLang="ko-KR" sz="2000" b="0" dirty="0"/>
+              <a:rPr lang="en-US" altLang="ko-KR" sz="2000" dirty="0"/>
               <a:t>#include &lt;</a:t>
             </a:r>
             <a:r>
-              <a:rPr lang="ko-KR" altLang="en-US" sz="2000" b="0" dirty="0"/>
+              <a:rPr lang="ko-KR" altLang="en-US" sz="2000" dirty="0"/>
               <a:t>파일명</a:t>
             </a:r>
             <a:r>
-              <a:rPr lang="en-US" altLang="ko-KR" sz="2000" b="0" dirty="0"/>
+              <a:rPr lang="en-US" altLang="ko-KR" sz="2000" dirty="0"/>
               <a:t>&gt;</a:t>
             </a:r>
           </a:p>
           <a:p>
             <a:pPr lvl="2"/>
             <a:r>
-              <a:rPr lang="ko-KR" altLang="en-US" sz="1600" b="0" dirty="0"/>
+              <a:rPr lang="ko-KR" altLang="en-US" sz="1600" dirty="0"/>
               <a:t>전처리기가 표준 라이브러리 경로에서 파일을 찾음</a:t>
             </a:r>
           </a:p>
           <a:p>
             <a:pPr lvl="1"/>
             <a:r>
-              <a:rPr lang="en-US" altLang="ko-KR" sz="2000" b="0" dirty="0"/>
+              <a:rPr lang="en-US" altLang="ko-KR" sz="2000" dirty="0"/>
               <a:t>#include "</a:t>
             </a:r>
             <a:r>
-              <a:rPr lang="ko-KR" altLang="en-US" sz="2000" b="0" dirty="0"/>
+              <a:rPr lang="ko-KR" altLang="en-US" sz="2000" dirty="0"/>
               <a:t>파일명</a:t>
             </a:r>
             <a:r>
-              <a:rPr lang="en-US" altLang="ko-KR" sz="2000" b="0" dirty="0"/>
+              <a:rPr lang="en-US" altLang="ko-KR" sz="2000" dirty="0"/>
               <a:t>"</a:t>
             </a:r>
           </a:p>
           <a:p>
             <a:pPr lvl="2"/>
             <a:r>
-              <a:rPr lang="ko-KR" altLang="en-US" sz="1600" b="0" dirty="0"/>
+              <a:rPr lang="ko-KR" altLang="en-US" sz="1600" dirty="0"/>
               <a:t>전처리기가 현재 프로젝트 폴더 또는 사용자 지정 경로에서 파일을 찾음</a:t>
             </a:r>
           </a:p>
           <a:p>
-            <a:endParaRPr lang="ko-KR" altLang="en-US" sz="2400" b="0" dirty="0"/>
-          </a:p>
-          <a:p>
-            <a:r>
-              <a:rPr lang="en-US" altLang="ko-KR" sz="2400" b="0" dirty="0"/>
+            <a:endParaRPr lang="ko-KR" altLang="en-US" sz="2400" dirty="0"/>
+          </a:p>
+          <a:p>
+            <a:r>
+              <a:rPr lang="en-US" altLang="ko-KR" sz="2400" dirty="0"/>
               <a:t>#include &lt;stdio.h&gt;</a:t>
             </a:r>
           </a:p>
           <a:p>
             <a:pPr lvl="1"/>
             <a:r>
-              <a:rPr lang="ko-KR" altLang="en-US" sz="2000" b="0" dirty="0"/>
+              <a:rPr lang="ko-KR" altLang="en-US" sz="2000" dirty="0"/>
               <a:t>표준 라이브러리 경로의 </a:t>
             </a:r>
             <a:r>
-              <a:rPr lang="en-US" altLang="ko-KR" sz="2000" b="0" dirty="0"/>
+              <a:rPr lang="en-US" altLang="ko-KR" sz="2000" dirty="0"/>
               <a:t>stdio.h</a:t>
             </a:r>
             <a:r>
-              <a:rPr lang="ko-KR" altLang="en-US" sz="2000" b="0" dirty="0"/>
+              <a:rPr lang="ko-KR" altLang="en-US" sz="2000" dirty="0"/>
               <a:t>를 소스 코드에 포함</a:t>
             </a:r>
-            <a:endParaRPr lang="en-US" altLang="ko-KR" sz="2000" b="0" dirty="0"/>
+            <a:endParaRPr lang="en-US" altLang="ko-KR" sz="2000" dirty="0"/>
           </a:p>
           <a:p>
             <a:pPr lvl="1"/>
             <a:r>
-              <a:rPr lang="en-US" altLang="ko-KR" sz="2000" b="0" dirty="0"/>
+              <a:rPr lang="en-US" altLang="ko-KR" sz="2000" dirty="0"/>
               <a:t>stdio.h : </a:t>
             </a:r>
             <a:r>
-              <a:rPr lang="ko-KR" altLang="en-US" sz="2000" b="0" dirty="0"/>
+              <a:rPr lang="ko-KR" altLang="en-US" sz="2000" dirty="0"/>
               <a:t>표준 입출력</a:t>
             </a:r>
             <a:r>
-              <a:rPr lang="en-US" altLang="ko-KR" sz="2000" b="0" dirty="0"/>
+              <a:rPr lang="en-US" altLang="ko-KR" sz="2000" dirty="0"/>
               <a:t>(standard input output)</a:t>
             </a:r>
             <a:r>
-              <a:rPr lang="ko-KR" altLang="en-US" sz="2000" b="0" dirty="0"/>
+              <a:rPr lang="ko-KR" altLang="en-US" sz="2000" dirty="0"/>
               <a:t> 헤더파일</a:t>
             </a:r>
           </a:p>
@@ -9560,14 +9563,13 @@
           <a:lstStyle/>
           <a:p>
             <a:r>
-              <a:rPr lang="en-US" altLang="ko-KR" b="0" dirty="0"/>
+              <a:rPr lang="en-US" altLang="ko-KR" dirty="0"/>
               <a:t>2.7.1.1 #include "" &lt;&gt;  </a:t>
             </a:r>
             <a:r>
-              <a:rPr lang="ko-KR" altLang="en-US" b="0" dirty="0"/>
+              <a:rPr lang="ko-KR" altLang="en-US" dirty="0"/>
               <a:t>검색 순서</a:t>
             </a:r>
-            <a:endParaRPr lang="ko-KR" altLang="en-US" dirty="0"/>
           </a:p>
         </p:txBody>
       </p:sp>
@@ -9593,48 +9595,88 @@
           <a:lstStyle/>
           <a:p>
             <a:r>
-              <a:rPr lang="en-US" altLang="ko-KR" b="0" dirty="0"/>
-              <a:t>#include "", &lt;&gt; </a:t>
-            </a:r>
-            <a:r>
-              <a:rPr lang="ko-KR" altLang="en-US" b="0" dirty="0"/>
+              <a:rPr lang="en-US" altLang="ko-KR" dirty="0">
+                <a:solidFill>
+                  <a:srgbClr val="CC00FF"/>
+                </a:solidFill>
+              </a:rPr>
+              <a:t>#include</a:t>
+            </a:r>
+            <a:r>
+              <a:rPr lang="en-US" altLang="ko-KR" dirty="0"/>
+              <a:t> </a:t>
+            </a:r>
+            <a:r>
+              <a:rPr lang="en-US" altLang="ko-KR" dirty="0">
+                <a:solidFill>
+                  <a:srgbClr val="CC00FF"/>
+                </a:solidFill>
+              </a:rPr>
+              <a:t>""</a:t>
+            </a:r>
+            <a:r>
+              <a:rPr lang="en-US" altLang="ko-KR" dirty="0"/>
+              <a:t>, </a:t>
+            </a:r>
+            <a:r>
+              <a:rPr lang="en-US" altLang="ko-KR" dirty="0">
+                <a:solidFill>
+                  <a:srgbClr val="CC00FF"/>
+                </a:solidFill>
+              </a:rPr>
+              <a:t>&lt;&gt;</a:t>
+            </a:r>
+            <a:r>
+              <a:rPr lang="en-US" altLang="ko-KR" dirty="0"/>
+              <a:t> </a:t>
+            </a:r>
+            <a:r>
+              <a:rPr lang="ko-KR" altLang="en-US" dirty="0"/>
               <a:t>검색 순서</a:t>
             </a:r>
           </a:p>
           <a:p>
             <a:pPr lvl="1"/>
             <a:r>
-              <a:rPr lang="en-US" altLang="ko-KR" b="0" dirty="0"/>
+              <a:rPr lang="en-US" altLang="ko-KR" dirty="0"/>
               <a:t>#include "file.h"</a:t>
             </a:r>
           </a:p>
           <a:p>
             <a:pPr lvl="1"/>
             <a:r>
-              <a:rPr lang="ko-KR" altLang="en-US" b="0" dirty="0"/>
+              <a:rPr lang="ko-KR" altLang="en-US" dirty="0"/>
               <a:t>현재 소스 파일 폴더에서 먼저 검색</a:t>
             </a:r>
           </a:p>
           <a:p>
             <a:pPr lvl="1"/>
             <a:r>
-              <a:rPr lang="ko-KR" altLang="en-US" b="0" dirty="0"/>
+              <a:rPr lang="ko-KR" altLang="en-US" dirty="0"/>
               <a:t>없으면 표준 라이브러리 경로에서 검색</a:t>
             </a:r>
           </a:p>
           <a:p>
-            <a:endParaRPr lang="ko-KR" altLang="en-US" b="0" dirty="0"/>
-          </a:p>
-          <a:p>
-            <a:r>
-              <a:rPr lang="en-US" altLang="ko-KR" b="0" dirty="0"/>
-              <a:t>#include &lt;file.h&gt;</a:t>
+            <a:endParaRPr lang="ko-KR" altLang="en-US" dirty="0"/>
+          </a:p>
+          <a:p>
+            <a:r>
+              <a:rPr lang="en-US" altLang="ko-KR" dirty="0">
+                <a:solidFill>
+                  <a:srgbClr val="CC00FF"/>
+                </a:solidFill>
+              </a:rPr>
+              <a:t>#include</a:t>
+            </a:r>
+            <a:r>
+              <a:rPr lang="en-US" altLang="ko-KR" dirty="0"/>
+              <a:t> &lt;file.h&gt;</a:t>
             </a:r>
           </a:p>
           <a:p>
             <a:pPr lvl="1"/>
             <a:r>
-              <a:rPr lang="ko-KR" altLang="en-US" b="0" dirty="0"/>
+              <a:rPr lang="ko-KR" altLang="en-US" dirty="0"/>
               <a:t>표준 라이브러리 경로에서 검색</a:t>
             </a:r>
           </a:p>
@@ -9723,14 +9765,13 @@
           <a:lstStyle/>
           <a:p>
             <a:r>
-              <a:rPr lang="en-US" altLang="ko-KR" b="0" dirty="0"/>
+              <a:rPr lang="en-US" altLang="ko-KR" dirty="0"/>
               <a:t>2.7.2 printf() </a:t>
             </a:r>
             <a:r>
-              <a:rPr lang="ko-KR" altLang="en-US" b="0" dirty="0"/>
+              <a:rPr lang="ko-KR" altLang="en-US" dirty="0"/>
               <a:t>함수</a:t>
             </a:r>
-            <a:endParaRPr lang="ko-KR" altLang="en-US" dirty="0"/>
           </a:p>
         </p:txBody>
       </p:sp>
@@ -9931,14 +9972,13 @@
           <a:lstStyle/>
           <a:p>
             <a:r>
-              <a:rPr lang="en-US" altLang="ko-KR" b="0" dirty="0"/>
+              <a:rPr lang="en-US" altLang="ko-KR" dirty="0"/>
               <a:t>2.7.3 </a:t>
             </a:r>
             <a:r>
-              <a:rPr lang="ko-KR" altLang="en-US" b="0" dirty="0"/>
+              <a:rPr lang="ko-KR" altLang="en-US" dirty="0"/>
               <a:t>형식 지정자</a:t>
             </a:r>
-            <a:endParaRPr lang="ko-KR" altLang="en-US" dirty="0"/>
           </a:p>
         </p:txBody>
       </p:sp>
@@ -10211,14 +10251,13 @@
           <a:lstStyle/>
           <a:p>
             <a:r>
-              <a:rPr lang="en-US" altLang="ko-KR" b="0" dirty="0"/>
+              <a:rPr lang="en-US" altLang="ko-KR" dirty="0"/>
               <a:t>2.7.3 </a:t>
             </a:r>
             <a:r>
-              <a:rPr lang="ko-KR" altLang="en-US" b="0" dirty="0"/>
+              <a:rPr lang="ko-KR" altLang="en-US" dirty="0"/>
               <a:t>형식 지정자</a:t>
             </a:r>
-            <a:endParaRPr lang="ko-KR" altLang="en-US" dirty="0"/>
           </a:p>
         </p:txBody>
       </p:sp>
@@ -10330,7 +10369,7 @@
           <a:lstStyle/>
           <a:p>
             <a:r>
-              <a:rPr lang="en-US" altLang="ko-KR" sz="2400" b="0" i="0" u="none" strike="noStrike" dirty="0">
+              <a:rPr lang="en-US" altLang="ko-KR" sz="2400" b="1" i="0" u="none" strike="noStrike" dirty="0">
                 <a:solidFill>
                   <a:srgbClr val="C18401"/>
                 </a:solidFill>
@@ -10340,7 +10379,7 @@
               <a:t>printf</a:t>
             </a:r>
             <a:r>
-              <a:rPr lang="en-US" altLang="ko-KR" sz="2400" b="0" i="0" u="none" strike="noStrike" dirty="0">
+              <a:rPr lang="en-US" altLang="ko-KR" sz="2400" b="1" i="0" u="none" strike="noStrike" dirty="0">
                 <a:solidFill>
                   <a:srgbClr val="383A42"/>
                 </a:solidFill>
@@ -10350,7 +10389,7 @@
               <a:t>(</a:t>
             </a:r>
             <a:r>
-              <a:rPr lang="en-US" altLang="ko-KR" sz="2400" b="0" i="0" u="none" strike="noStrike" dirty="0">
+              <a:rPr lang="en-US" altLang="ko-KR" sz="2400" b="1" i="0" u="none" strike="noStrike" dirty="0">
                 <a:solidFill>
                   <a:srgbClr val="50A14F"/>
                 </a:solidFill>
@@ -10360,7 +10399,7 @@
               <a:t>"</a:t>
             </a:r>
             <a:r>
-              <a:rPr lang="ko-KR" altLang="en-US" sz="2400" b="0" i="0" u="none" strike="noStrike" dirty="0">
+              <a:rPr lang="ko-KR" altLang="en-US" sz="2400" b="1" i="0" u="none" strike="noStrike" dirty="0">
                 <a:solidFill>
                   <a:srgbClr val="50A14F"/>
                 </a:solidFill>
@@ -10370,7 +10409,7 @@
               <a:t>성  명</a:t>
             </a:r>
             <a:r>
-              <a:rPr lang="en-US" altLang="ko-KR" sz="2400" b="0" i="0" u="none" strike="noStrike" dirty="0">
+              <a:rPr lang="en-US" altLang="ko-KR" sz="2400" b="1" i="0" u="none" strike="noStrike" dirty="0">
                 <a:solidFill>
                   <a:srgbClr val="50A14F"/>
                 </a:solidFill>
@@ -10382,7 +10421,7 @@
           </a:p>
           <a:p>
             <a:r>
-              <a:rPr lang="en-US" altLang="ko-KR" dirty="0">
+              <a:rPr lang="en-US" altLang="ko-KR" b="1" dirty="0">
                 <a:solidFill>
                   <a:srgbClr val="50A14F"/>
                 </a:solidFill>
@@ -10391,7 +10430,7 @@
               <a:t>            </a:t>
             </a:r>
             <a:r>
-              <a:rPr lang="en-US" altLang="ko-KR" sz="2400" b="0" i="0" u="none" strike="noStrike" dirty="0">
+              <a:rPr lang="en-US" altLang="ko-KR" sz="2400" b="1" i="0" u="none" strike="noStrike" dirty="0">
                 <a:solidFill>
                   <a:srgbClr val="383A42"/>
                 </a:solidFill>
@@ -10401,7 +10440,7 @@
               <a:t>, </a:t>
             </a:r>
             <a:r>
-              <a:rPr lang="en-US" altLang="ko-KR" sz="2400" b="0" i="0" u="none" strike="noStrike" dirty="0">
+              <a:rPr lang="en-US" altLang="ko-KR" sz="2400" b="1" i="0" u="none" strike="noStrike" dirty="0">
                 <a:solidFill>
                   <a:srgbClr val="50A14F"/>
                 </a:solidFill>
@@ -10411,7 +10450,7 @@
               <a:t>"</a:t>
             </a:r>
             <a:r>
-              <a:rPr lang="ko-KR" altLang="en-US" sz="2400" b="0" i="0" u="none" strike="noStrike" dirty="0">
+              <a:rPr lang="ko-KR" altLang="en-US" sz="2400" b="1" i="0" u="none" strike="noStrike" dirty="0">
                 <a:solidFill>
                   <a:srgbClr val="50A14F"/>
                 </a:solidFill>
@@ -10421,7 +10460,7 @@
               <a:t>오세명</a:t>
             </a:r>
             <a:r>
-              <a:rPr lang="en-US" altLang="ko-KR" sz="2400" b="0" i="0" u="none" strike="noStrike" dirty="0">
+              <a:rPr lang="en-US" altLang="ko-KR" sz="2400" b="1" i="0" u="none" strike="noStrike" dirty="0">
                 <a:solidFill>
                   <a:srgbClr val="50A14F"/>
                 </a:solidFill>
@@ -10431,7 +10470,7 @@
               <a:t>"    </a:t>
             </a:r>
             <a:r>
-              <a:rPr lang="en-US" altLang="ko-KR" sz="2400" b="0" i="0" u="none" strike="noStrike" dirty="0">
+              <a:rPr lang="en-US" altLang="ko-KR" sz="2400" b="1" i="0" u="none" strike="noStrike" dirty="0">
                 <a:solidFill>
                   <a:srgbClr val="383A42"/>
                 </a:solidFill>
@@ -10440,7 +10479,7 @@
               </a:rPr>
               <a:t>);</a:t>
             </a:r>
-            <a:endParaRPr lang="ko-KR" altLang="en-US" dirty="0"/>
+            <a:endParaRPr lang="ko-KR" altLang="en-US" b="1" dirty="0"/>
           </a:p>
         </p:txBody>
       </p:sp>
@@ -10481,7 +10520,7 @@
           <a:lstStyle/>
           <a:p>
             <a:r>
-              <a:rPr lang="en-US" altLang="ko-KR" sz="2400" b="0" i="0" u="none" strike="noStrike" dirty="0">
+              <a:rPr lang="en-US" altLang="ko-KR" sz="2400" b="1" i="0" u="none" strike="noStrike" dirty="0">
                 <a:solidFill>
                   <a:srgbClr val="C18401"/>
                 </a:solidFill>
@@ -10491,7 +10530,7 @@
               <a:t>printf</a:t>
             </a:r>
             <a:r>
-              <a:rPr lang="en-US" altLang="ko-KR" sz="2400" b="0" i="0" u="none" strike="noStrike" dirty="0">
+              <a:rPr lang="en-US" altLang="ko-KR" sz="2400" b="1" i="0" u="none" strike="noStrike" dirty="0">
                 <a:solidFill>
                   <a:srgbClr val="383A42"/>
                 </a:solidFill>
@@ -10501,7 +10540,7 @@
               <a:t>(</a:t>
             </a:r>
             <a:r>
-              <a:rPr lang="en-US" altLang="ko-KR" sz="2400" b="0" i="0" u="none" strike="noStrike" dirty="0">
+              <a:rPr lang="en-US" altLang="ko-KR" sz="2400" b="1" i="0" u="none" strike="noStrike" dirty="0">
                 <a:solidFill>
                   <a:srgbClr val="50A14F"/>
                 </a:solidFill>
@@ -10511,7 +10550,7 @@
               <a:t>"</a:t>
             </a:r>
             <a:r>
-              <a:rPr lang="ko-KR" altLang="en-US" sz="2400" b="0" i="0" u="none" strike="noStrike" dirty="0">
+              <a:rPr lang="ko-KR" altLang="en-US" sz="2400" b="1" i="0" u="none" strike="noStrike" dirty="0">
                 <a:solidFill>
                   <a:srgbClr val="50A14F"/>
                 </a:solidFill>
@@ -10521,7 +10560,7 @@
               <a:t>나  이</a:t>
             </a:r>
             <a:r>
-              <a:rPr lang="en-US" altLang="ko-KR" sz="2400" b="0" i="0" u="none" strike="noStrike" dirty="0">
+              <a:rPr lang="en-US" altLang="ko-KR" sz="2400" b="1" i="0" u="none" strike="noStrike" dirty="0">
                 <a:solidFill>
                   <a:srgbClr val="50A14F"/>
                 </a:solidFill>
@@ -10533,7 +10572,7 @@
           </a:p>
           <a:p>
             <a:r>
-              <a:rPr lang="en-US" altLang="ko-KR" dirty="0">
+              <a:rPr lang="en-US" altLang="ko-KR" b="1" dirty="0">
                 <a:solidFill>
                   <a:srgbClr val="50A14F"/>
                 </a:solidFill>
@@ -10542,7 +10581,7 @@
               <a:t>            </a:t>
             </a:r>
             <a:r>
-              <a:rPr lang="en-US" altLang="ko-KR" sz="2400" b="0" i="0" u="none" strike="noStrike" dirty="0">
+              <a:rPr lang="en-US" altLang="ko-KR" sz="2400" b="1" i="0" u="none" strike="noStrike" dirty="0">
                 <a:solidFill>
                   <a:srgbClr val="383A42"/>
                 </a:solidFill>
@@ -10552,7 +10591,7 @@
               <a:t>,   </a:t>
             </a:r>
             <a:r>
-              <a:rPr lang="en-US" altLang="ko-KR" sz="2400" b="0" i="0" u="none" strike="noStrike" dirty="0">
+              <a:rPr lang="en-US" altLang="ko-KR" sz="2400" b="1" i="0" u="none" strike="noStrike" dirty="0">
                 <a:solidFill>
                   <a:srgbClr val="986801"/>
                 </a:solidFill>
@@ -10562,7 +10601,7 @@
               <a:t>20       </a:t>
             </a:r>
             <a:r>
-              <a:rPr lang="en-US" altLang="ko-KR" sz="2400" b="0" i="0" u="none" strike="noStrike" dirty="0">
+              <a:rPr lang="en-US" altLang="ko-KR" sz="2400" b="1" i="0" u="none" strike="noStrike" dirty="0">
                 <a:solidFill>
                   <a:srgbClr val="383A42"/>
                 </a:solidFill>
@@ -10571,7 +10610,7 @@
               </a:rPr>
               <a:t>);</a:t>
             </a:r>
-            <a:endParaRPr lang="ko-KR" altLang="en-US" dirty="0"/>
+            <a:endParaRPr lang="ko-KR" altLang="en-US" b="1" dirty="0"/>
           </a:p>
         </p:txBody>
       </p:sp>
@@ -10612,7 +10651,7 @@
           <a:lstStyle/>
           <a:p>
             <a:r>
-              <a:rPr lang="en-US" altLang="ko-KR" sz="2400" b="0" i="0" u="none" strike="noStrike" dirty="0">
+              <a:rPr lang="en-US" altLang="ko-KR" sz="2400" b="1" i="0" u="none" strike="noStrike" dirty="0">
                 <a:solidFill>
                   <a:srgbClr val="C18401"/>
                 </a:solidFill>
@@ -10622,7 +10661,7 @@
               <a:t>printf</a:t>
             </a:r>
             <a:r>
-              <a:rPr lang="en-US" altLang="ko-KR" sz="2400" b="0" i="0" u="none" strike="noStrike" dirty="0">
+              <a:rPr lang="en-US" altLang="ko-KR" sz="2400" b="1" i="0" u="none" strike="noStrike" dirty="0">
                 <a:solidFill>
                   <a:srgbClr val="383A42"/>
                 </a:solidFill>
@@ -10632,7 +10671,7 @@
               <a:t>(</a:t>
             </a:r>
             <a:r>
-              <a:rPr lang="en-US" altLang="ko-KR" sz="2400" b="0" i="0" u="none" strike="noStrike" dirty="0">
+              <a:rPr lang="en-US" altLang="ko-KR" sz="2400" b="1" i="0" u="none" strike="noStrike" dirty="0">
                 <a:solidFill>
                   <a:srgbClr val="50A14F"/>
                 </a:solidFill>
@@ -10642,7 +10681,7 @@
               <a:t>"</a:t>
             </a:r>
             <a:r>
-              <a:rPr lang="ko-KR" altLang="en-US" sz="2400" b="0" i="0" u="none" strike="noStrike" dirty="0">
+              <a:rPr lang="ko-KR" altLang="en-US" sz="2400" b="1" i="0" u="none" strike="noStrike" dirty="0">
                 <a:solidFill>
                   <a:srgbClr val="50A14F"/>
                 </a:solidFill>
@@ -10652,7 +10691,7 @@
               <a:t>연락처</a:t>
             </a:r>
             <a:r>
-              <a:rPr lang="en-US" altLang="ko-KR" sz="2400" b="0" i="0" u="none" strike="noStrike" dirty="0">
+              <a:rPr lang="en-US" altLang="ko-KR" sz="2400" b="1" i="0" u="none" strike="noStrike" dirty="0">
                 <a:solidFill>
                   <a:srgbClr val="50A14F"/>
                 </a:solidFill>
@@ -10664,7 +10703,7 @@
           </a:p>
           <a:p>
             <a:r>
-              <a:rPr lang="en-US" altLang="ko-KR" dirty="0">
+              <a:rPr lang="en-US" altLang="ko-KR" b="1" dirty="0">
                 <a:solidFill>
                   <a:srgbClr val="50A14F"/>
                 </a:solidFill>
@@ -10673,7 +10712,7 @@
               <a:t>            </a:t>
             </a:r>
             <a:r>
-              <a:rPr lang="en-US" altLang="ko-KR" sz="2400" b="0" i="0" u="none" strike="noStrike" dirty="0">
+              <a:rPr lang="en-US" altLang="ko-KR" sz="2400" b="1" i="0" u="none" strike="noStrike" dirty="0">
                 <a:solidFill>
                   <a:srgbClr val="383A42"/>
                 </a:solidFill>
@@ -10683,7 +10722,7 @@
               <a:t>, </a:t>
             </a:r>
             <a:r>
-              <a:rPr lang="en-US" altLang="ko-KR" sz="2400" b="0" i="0" u="none" strike="noStrike" dirty="0">
+              <a:rPr lang="en-US" altLang="ko-KR" sz="2400" b="1" i="0" u="none" strike="noStrike" dirty="0">
                 <a:solidFill>
                   <a:srgbClr val="50A14F"/>
                 </a:solidFill>
@@ -10693,7 +10732,7 @@
               <a:t>"010"</a:t>
             </a:r>
             <a:r>
-              <a:rPr lang="en-US" altLang="ko-KR" sz="2400" b="0" i="0" u="none" strike="noStrike" dirty="0">
+              <a:rPr lang="en-US" altLang="ko-KR" sz="2400" b="1" i="0" u="none" strike="noStrike" dirty="0">
                 <a:solidFill>
                   <a:srgbClr val="383A42"/>
                 </a:solidFill>
@@ -10703,7 +10742,7 @@
               <a:t>, </a:t>
             </a:r>
             <a:r>
-              <a:rPr lang="en-US" altLang="ko-KR" sz="2400" b="0" i="0" u="none" strike="noStrike" dirty="0">
+              <a:rPr lang="en-US" altLang="ko-KR" sz="2400" b="1" i="0" u="none" strike="noStrike" dirty="0">
                 <a:solidFill>
                   <a:srgbClr val="50A14F"/>
                 </a:solidFill>
@@ -10713,7 +10752,7 @@
               <a:t>"1245"</a:t>
             </a:r>
             <a:r>
-              <a:rPr lang="en-US" altLang="ko-KR" sz="2400" b="0" i="0" u="none" strike="noStrike" dirty="0">
+              <a:rPr lang="en-US" altLang="ko-KR" sz="2400" b="1" i="0" u="none" strike="noStrike" dirty="0">
                 <a:solidFill>
                   <a:srgbClr val="383A42"/>
                 </a:solidFill>
@@ -10723,7 +10762,7 @@
               <a:t>, </a:t>
             </a:r>
             <a:r>
-              <a:rPr lang="en-US" altLang="ko-KR" sz="2400" b="0" i="0" u="none" strike="noStrike" dirty="0">
+              <a:rPr lang="en-US" altLang="ko-KR" sz="2400" b="1" i="0" u="none" strike="noStrike" dirty="0">
                 <a:solidFill>
                   <a:srgbClr val="50A14F"/>
                 </a:solidFill>
@@ -10733,7 +10772,7 @@
               <a:t>"6789"</a:t>
             </a:r>
             <a:r>
-              <a:rPr lang="en-US" altLang="ko-KR" sz="2400" b="0" i="0" u="none" strike="noStrike" dirty="0">
+              <a:rPr lang="en-US" altLang="ko-KR" sz="2400" b="1" i="0" u="none" strike="noStrike" dirty="0">
                 <a:solidFill>
                   <a:srgbClr val="383A42"/>
                 </a:solidFill>
@@ -10742,7 +10781,7 @@
               </a:rPr>
               <a:t>);</a:t>
             </a:r>
-            <a:endParaRPr lang="ko-KR" altLang="en-US" dirty="0"/>
+            <a:endParaRPr lang="ko-KR" altLang="en-US" b="1" dirty="0"/>
           </a:p>
         </p:txBody>
       </p:sp>
@@ -10798,14 +10837,13 @@
           <a:lstStyle/>
           <a:p>
             <a:r>
-              <a:rPr lang="en-US" altLang="ko-KR" b="0" dirty="0"/>
+              <a:rPr lang="en-US" altLang="ko-KR" dirty="0"/>
               <a:t>2.2 main </a:t>
             </a:r>
             <a:r>
-              <a:rPr lang="ko-KR" altLang="en-US" b="0" dirty="0"/>
+              <a:rPr lang="ko-KR" altLang="en-US" dirty="0"/>
               <a:t>함수의 다양한 형태</a:t>
             </a:r>
-            <a:endParaRPr lang="ko-KR" altLang="en-US" dirty="0"/>
           </a:p>
         </p:txBody>
       </p:sp>
@@ -10831,58 +10869,58 @@
           <a:lstStyle/>
           <a:p>
             <a:r>
-              <a:rPr lang="en-US" altLang="ko-KR" b="0" dirty="0"/>
+              <a:rPr lang="en-US" altLang="ko-KR" dirty="0"/>
               <a:t>C </a:t>
             </a:r>
             <a:r>
-              <a:rPr lang="ko-KR" altLang="en-US" b="0" dirty="0"/>
+              <a:rPr lang="ko-KR" altLang="en-US" dirty="0"/>
               <a:t>표준 </a:t>
             </a:r>
             <a:r>
-              <a:rPr lang="en-US" altLang="ko-KR" b="0" dirty="0"/>
+              <a:rPr lang="en-US" altLang="ko-KR" dirty="0"/>
               <a:t>main </a:t>
             </a:r>
             <a:r>
-              <a:rPr lang="ko-KR" altLang="en-US" b="0" dirty="0"/>
+              <a:rPr lang="ko-KR" altLang="en-US" dirty="0"/>
               <a:t>함수</a:t>
             </a:r>
-            <a:endParaRPr lang="en-US" altLang="ko-KR" b="0" dirty="0"/>
-          </a:p>
-          <a:p>
-            <a:endParaRPr lang="en-US" altLang="ko-KR" b="0" dirty="0"/>
-          </a:p>
-          <a:p>
-            <a:endParaRPr lang="en-US" altLang="ko-KR" b="0" dirty="0"/>
-          </a:p>
-          <a:p>
-            <a:endParaRPr lang="en-US" altLang="ko-KR" b="0" dirty="0"/>
-          </a:p>
-          <a:p>
-            <a:endParaRPr lang="en-US" altLang="ko-KR" b="0" dirty="0"/>
-          </a:p>
-          <a:p>
-            <a:r>
-              <a:rPr lang="ko-KR" altLang="en-US" b="0" dirty="0"/>
+            <a:endParaRPr lang="en-US" altLang="ko-KR" dirty="0"/>
+          </a:p>
+          <a:p>
+            <a:endParaRPr lang="en-US" altLang="ko-KR" dirty="0"/>
+          </a:p>
+          <a:p>
+            <a:endParaRPr lang="en-US" altLang="ko-KR" dirty="0"/>
+          </a:p>
+          <a:p>
+            <a:endParaRPr lang="en-US" altLang="ko-KR" dirty="0"/>
+          </a:p>
+          <a:p>
+            <a:endParaRPr lang="en-US" altLang="ko-KR" dirty="0"/>
+          </a:p>
+          <a:p>
+            <a:r>
+              <a:rPr lang="ko-KR" altLang="en-US" dirty="0"/>
               <a:t>비 표준 </a:t>
             </a:r>
             <a:r>
-              <a:rPr lang="en-US" altLang="ko-KR" b="0" dirty="0"/>
+              <a:rPr lang="en-US" altLang="ko-KR" dirty="0"/>
               <a:t>main</a:t>
             </a:r>
             <a:r>
-              <a:rPr lang="ko-KR" altLang="en-US" b="0" dirty="0"/>
+              <a:rPr lang="ko-KR" altLang="en-US" dirty="0"/>
               <a:t> 함수</a:t>
             </a:r>
-            <a:endParaRPr lang="en-US" altLang="ko-KR" b="0" dirty="0"/>
-          </a:p>
-          <a:p>
-            <a:endParaRPr lang="en-US" altLang="ko-KR" b="0" dirty="0"/>
-          </a:p>
-          <a:p>
-            <a:endParaRPr lang="en-US" altLang="ko-KR" b="0" dirty="0"/>
-          </a:p>
-          <a:p>
-            <a:endParaRPr lang="en-US" altLang="ko-KR" b="0" dirty="0"/>
+            <a:endParaRPr lang="en-US" altLang="ko-KR" dirty="0"/>
+          </a:p>
+          <a:p>
+            <a:endParaRPr lang="en-US" altLang="ko-KR" dirty="0"/>
+          </a:p>
+          <a:p>
+            <a:endParaRPr lang="en-US" altLang="ko-KR" dirty="0"/>
+          </a:p>
+          <a:p>
+            <a:endParaRPr lang="en-US" altLang="ko-KR" dirty="0"/>
           </a:p>
           <a:p>
             <a:endParaRPr lang="ko-KR" altLang="en-US" dirty="0"/>
@@ -10956,7 +10994,7 @@
           <a:lstStyle/>
           <a:p>
             <a:r>
-              <a:rPr lang="en-US" altLang="ko-KR" sz="2400" b="0" i="0" u="none" strike="noStrike" dirty="0">
+              <a:rPr lang="en-US" altLang="ko-KR" sz="2400" b="1" i="0" u="none" strike="noStrike" dirty="0">
                 <a:solidFill>
                   <a:srgbClr val="A626A4"/>
                 </a:solidFill>
@@ -10966,7 +11004,7 @@
               <a:t>int</a:t>
             </a:r>
             <a:r>
-              <a:rPr lang="en-US" altLang="ko-KR" sz="2400" b="0" i="0" u="none" strike="noStrike" dirty="0">
+              <a:rPr lang="en-US" altLang="ko-KR" sz="2400" b="1" i="0" u="none" strike="noStrike" dirty="0">
                 <a:solidFill>
                   <a:srgbClr val="383A42"/>
                 </a:solidFill>
@@ -10976,7 +11014,7 @@
               <a:t> </a:t>
             </a:r>
             <a:r>
-              <a:rPr lang="en-US" altLang="ko-KR" sz="2400" b="0" i="0" u="none" strike="noStrike" dirty="0">
+              <a:rPr lang="en-US" altLang="ko-KR" sz="2400" b="1" i="0" u="none" strike="noStrike" dirty="0">
                 <a:solidFill>
                   <a:srgbClr val="4078F2"/>
                 </a:solidFill>
@@ -10986,7 +11024,7 @@
               <a:t>main</a:t>
             </a:r>
             <a:r>
-              <a:rPr lang="en-US" altLang="ko-KR" sz="2400" b="0" i="0" u="none" strike="noStrike" dirty="0">
+              <a:rPr lang="en-US" altLang="ko-KR" sz="2400" b="1" i="0" u="none" strike="noStrike" dirty="0">
                 <a:solidFill>
                   <a:srgbClr val="383A42"/>
                 </a:solidFill>
@@ -10996,7 +11034,7 @@
               <a:t>(</a:t>
             </a:r>
             <a:r>
-              <a:rPr lang="en-US" altLang="ko-KR" sz="2400" b="0" i="0" u="none" strike="noStrike" dirty="0">
+              <a:rPr lang="en-US" altLang="ko-KR" sz="2400" b="1" i="0" u="none" strike="noStrike" dirty="0">
                 <a:solidFill>
                   <a:srgbClr val="A626A4"/>
                 </a:solidFill>
@@ -11006,7 +11044,7 @@
               <a:t>void</a:t>
             </a:r>
             <a:r>
-              <a:rPr lang="en-US" altLang="ko-KR" sz="2400" b="0" i="0" u="none" strike="noStrike" dirty="0">
+              <a:rPr lang="en-US" altLang="ko-KR" sz="2400" b="1" i="0" u="none" strike="noStrike" dirty="0">
                 <a:solidFill>
                   <a:srgbClr val="383A42"/>
                 </a:solidFill>
@@ -11016,7 +11054,7 @@
               <a:t>)</a:t>
             </a:r>
             <a:br>
-              <a:rPr lang="en-US" altLang="ko-KR" sz="2400" b="0" i="0" u="none" strike="noStrike" dirty="0">
+              <a:rPr lang="en-US" altLang="ko-KR" sz="2400" b="1" i="0" u="none" strike="noStrike" dirty="0">
                 <a:solidFill>
                   <a:srgbClr val="383A42"/>
                 </a:solidFill>
@@ -11025,7 +11063,7 @@
               </a:rPr>
             </a:br>
             <a:r>
-              <a:rPr lang="en-US" altLang="ko-KR" sz="2400" b="0" i="0" u="none" strike="noStrike" dirty="0">
+              <a:rPr lang="en-US" altLang="ko-KR" sz="2400" b="1" i="0" u="none" strike="noStrike" dirty="0">
                 <a:solidFill>
                   <a:srgbClr val="A626A4"/>
                 </a:solidFill>
@@ -11035,7 +11073,7 @@
               <a:t>int</a:t>
             </a:r>
             <a:r>
-              <a:rPr lang="en-US" altLang="ko-KR" sz="2400" b="0" i="0" u="none" strike="noStrike" dirty="0">
+              <a:rPr lang="en-US" altLang="ko-KR" sz="2400" b="1" i="0" u="none" strike="noStrike" dirty="0">
                 <a:solidFill>
                   <a:srgbClr val="383A42"/>
                 </a:solidFill>
@@ -11045,7 +11083,7 @@
               <a:t> </a:t>
             </a:r>
             <a:r>
-              <a:rPr lang="en-US" altLang="ko-KR" sz="2400" b="0" i="0" u="none" strike="noStrike" dirty="0">
+              <a:rPr lang="en-US" altLang="ko-KR" sz="2400" b="1" i="0" u="none" strike="noStrike" dirty="0">
                 <a:solidFill>
                   <a:srgbClr val="4078F2"/>
                 </a:solidFill>
@@ -11055,7 +11093,7 @@
               <a:t>main</a:t>
             </a:r>
             <a:r>
-              <a:rPr lang="en-US" altLang="ko-KR" sz="2400" b="0" i="0" u="none" strike="noStrike" dirty="0">
+              <a:rPr lang="en-US" altLang="ko-KR" sz="2400" b="1" i="0" u="none" strike="noStrike" dirty="0">
                 <a:solidFill>
                   <a:srgbClr val="383A42"/>
                 </a:solidFill>
@@ -11065,7 +11103,7 @@
               <a:t>(</a:t>
             </a:r>
             <a:r>
-              <a:rPr lang="en-US" altLang="ko-KR" sz="2400" b="0" i="0" u="none" strike="noStrike" dirty="0">
+              <a:rPr lang="en-US" altLang="ko-KR" sz="2400" b="1" i="0" u="none" strike="noStrike" dirty="0">
                 <a:solidFill>
                   <a:srgbClr val="A626A4"/>
                 </a:solidFill>
@@ -11075,7 +11113,7 @@
               <a:t>int</a:t>
             </a:r>
             <a:r>
-              <a:rPr lang="en-US" altLang="ko-KR" sz="2400" b="0" i="0" u="none" strike="noStrike" dirty="0">
+              <a:rPr lang="en-US" altLang="ko-KR" sz="2400" b="1" i="0" u="none" strike="noStrike" dirty="0">
                 <a:solidFill>
                   <a:srgbClr val="383A42"/>
                 </a:solidFill>
@@ -11085,7 +11123,7 @@
               <a:t> argc, </a:t>
             </a:r>
             <a:r>
-              <a:rPr lang="en-US" altLang="ko-KR" sz="2400" b="0" i="0" u="none" strike="noStrike" dirty="0">
+              <a:rPr lang="en-US" altLang="ko-KR" sz="2400" b="1" i="0" u="none" strike="noStrike" dirty="0">
                 <a:solidFill>
                   <a:srgbClr val="A626A4"/>
                 </a:solidFill>
@@ -11095,7 +11133,7 @@
               <a:t>char</a:t>
             </a:r>
             <a:r>
-              <a:rPr lang="en-US" altLang="ko-KR" sz="2400" b="0" i="0" u="none" strike="noStrike" dirty="0">
+              <a:rPr lang="en-US" altLang="ko-KR" sz="2400" b="1" i="0" u="none" strike="noStrike" dirty="0">
                 <a:solidFill>
                   <a:srgbClr val="383A42"/>
                 </a:solidFill>
@@ -11105,7 +11143,7 @@
               <a:t>** argv) </a:t>
             </a:r>
             <a:r>
-              <a:rPr lang="ko-KR" altLang="en-US" sz="2400" b="0" i="0" u="none" strike="noStrike" dirty="0">
+              <a:rPr lang="ko-KR" altLang="en-US" sz="2400" b="1" i="0" u="none" strike="noStrike" dirty="0">
                 <a:solidFill>
                   <a:srgbClr val="383A42"/>
                 </a:solidFill>
@@ -11115,7 +11153,7 @@
               <a:t>또는</a:t>
             </a:r>
             <a:br>
-              <a:rPr lang="en-US" altLang="ko-KR" sz="2400" b="0" i="0" u="none" strike="noStrike" dirty="0">
+              <a:rPr lang="en-US" altLang="ko-KR" sz="2400" b="1" i="0" u="none" strike="noStrike" dirty="0">
                 <a:solidFill>
                   <a:srgbClr val="383A42"/>
                 </a:solidFill>
@@ -11124,7 +11162,7 @@
               </a:rPr>
             </a:br>
             <a:r>
-              <a:rPr lang="en-US" altLang="ko-KR" sz="2400" b="0" i="0" u="none" strike="noStrike" dirty="0">
+              <a:rPr lang="en-US" altLang="ko-KR" sz="2400" b="1" i="0" u="none" strike="noStrike" dirty="0">
                 <a:solidFill>
                   <a:srgbClr val="A626A4"/>
                 </a:solidFill>
@@ -11134,7 +11172,7 @@
               <a:t>int</a:t>
             </a:r>
             <a:r>
-              <a:rPr lang="en-US" altLang="ko-KR" sz="2400" b="0" i="0" u="none" strike="noStrike" dirty="0">
+              <a:rPr lang="en-US" altLang="ko-KR" sz="2400" b="1" i="0" u="none" strike="noStrike" dirty="0">
                 <a:solidFill>
                   <a:srgbClr val="383A42"/>
                 </a:solidFill>
@@ -11144,7 +11182,7 @@
               <a:t> </a:t>
             </a:r>
             <a:r>
-              <a:rPr lang="en-US" altLang="ko-KR" sz="2400" b="0" i="0" u="none" strike="noStrike" dirty="0">
+              <a:rPr lang="en-US" altLang="ko-KR" sz="2400" b="1" i="0" u="none" strike="noStrike" dirty="0">
                 <a:solidFill>
                   <a:srgbClr val="4078F2"/>
                 </a:solidFill>
@@ -11154,7 +11192,7 @@
               <a:t>main</a:t>
             </a:r>
             <a:r>
-              <a:rPr lang="en-US" altLang="ko-KR" sz="2400" b="0" i="0" u="none" strike="noStrike" dirty="0">
+              <a:rPr lang="en-US" altLang="ko-KR" sz="2400" b="1" i="0" u="none" strike="noStrike" dirty="0">
                 <a:solidFill>
                   <a:srgbClr val="383A42"/>
                 </a:solidFill>
@@ -11164,7 +11202,7 @@
               <a:t>(</a:t>
             </a:r>
             <a:r>
-              <a:rPr lang="en-US" altLang="ko-KR" sz="2400" b="0" i="0" u="none" strike="noStrike" dirty="0">
+              <a:rPr lang="en-US" altLang="ko-KR" sz="2400" b="1" i="0" u="none" strike="noStrike" dirty="0">
                 <a:solidFill>
                   <a:srgbClr val="A626A4"/>
                 </a:solidFill>
@@ -11174,7 +11212,7 @@
               <a:t>int</a:t>
             </a:r>
             <a:r>
-              <a:rPr lang="en-US" altLang="ko-KR" sz="2400" b="0" i="0" u="none" strike="noStrike" dirty="0">
+              <a:rPr lang="en-US" altLang="ko-KR" sz="2400" b="1" i="0" u="none" strike="noStrike" dirty="0">
                 <a:solidFill>
                   <a:srgbClr val="383A42"/>
                 </a:solidFill>
@@ -11184,7 +11222,7 @@
               <a:t> argc, </a:t>
             </a:r>
             <a:r>
-              <a:rPr lang="en-US" altLang="ko-KR" sz="2400" b="0" i="0" u="none" strike="noStrike" dirty="0">
+              <a:rPr lang="en-US" altLang="ko-KR" sz="2400" b="1" i="0" u="none" strike="noStrike" dirty="0">
                 <a:solidFill>
                   <a:srgbClr val="A626A4"/>
                 </a:solidFill>
@@ -11194,7 +11232,7 @@
               <a:t>char</a:t>
             </a:r>
             <a:r>
-              <a:rPr lang="en-US" altLang="ko-KR" sz="2400" b="0" i="0" u="none" strike="noStrike" dirty="0">
+              <a:rPr lang="en-US" altLang="ko-KR" sz="2400" b="1" i="0" u="none" strike="noStrike" dirty="0">
                 <a:solidFill>
                   <a:srgbClr val="383A42"/>
                 </a:solidFill>
@@ -11203,7 +11241,7 @@
               </a:rPr>
               <a:t>* argv[])</a:t>
             </a:r>
-            <a:endParaRPr lang="ko-KR" altLang="en-US" dirty="0"/>
+            <a:endParaRPr lang="ko-KR" altLang="en-US" b="1" dirty="0"/>
           </a:p>
         </p:txBody>
       </p:sp>
@@ -11246,7 +11284,7 @@
               <a:buNone/>
             </a:pPr>
             <a:r>
-              <a:rPr lang="en-US" altLang="ko-KR" sz="2400" b="0" i="0" u="none" strike="noStrike" dirty="0">
+              <a:rPr lang="en-US" altLang="ko-KR" sz="2400" b="1" i="0" u="none" strike="noStrike" dirty="0">
                 <a:solidFill>
                   <a:srgbClr val="A626A4"/>
                 </a:solidFill>
@@ -11256,7 +11294,7 @@
               <a:t>void</a:t>
             </a:r>
             <a:r>
-              <a:rPr lang="en-US" altLang="ko-KR" sz="2400" b="0" i="0" u="none" strike="noStrike" dirty="0">
+              <a:rPr lang="en-US" altLang="ko-KR" sz="2400" b="1" i="0" u="none" strike="noStrike" dirty="0">
                 <a:solidFill>
                   <a:srgbClr val="383A42"/>
                 </a:solidFill>
@@ -11266,7 +11304,7 @@
               <a:t> </a:t>
             </a:r>
             <a:r>
-              <a:rPr lang="en-US" altLang="ko-KR" sz="2400" b="0" i="0" u="none" strike="noStrike" dirty="0">
+              <a:rPr lang="en-US" altLang="ko-KR" sz="2400" b="1" i="0" u="none" strike="noStrike" dirty="0">
                 <a:solidFill>
                   <a:srgbClr val="4078F2"/>
                 </a:solidFill>
@@ -11276,7 +11314,7 @@
               <a:t>main</a:t>
             </a:r>
             <a:r>
-              <a:rPr lang="en-US" altLang="ko-KR" sz="2400" b="0" i="0" u="none" strike="noStrike" dirty="0">
+              <a:rPr lang="en-US" altLang="ko-KR" sz="2400" b="1" i="0" u="none" strike="noStrike" dirty="0">
                 <a:solidFill>
                   <a:srgbClr val="383A42"/>
                 </a:solidFill>
@@ -11286,7 +11324,7 @@
               <a:t>(</a:t>
             </a:r>
             <a:r>
-              <a:rPr lang="en-US" altLang="ko-KR" sz="2400" b="0" i="0" u="none" strike="noStrike" dirty="0">
+              <a:rPr lang="en-US" altLang="ko-KR" sz="2400" b="1" i="0" u="none" strike="noStrike" dirty="0">
                 <a:solidFill>
                   <a:srgbClr val="A626A4"/>
                 </a:solidFill>
@@ -11296,7 +11334,7 @@
               <a:t>void</a:t>
             </a:r>
             <a:r>
-              <a:rPr lang="en-US" altLang="ko-KR" sz="2400" b="0" i="0" u="none" strike="noStrike" dirty="0">
+              <a:rPr lang="en-US" altLang="ko-KR" sz="2400" b="1" i="0" u="none" strike="noStrike" dirty="0">
                 <a:solidFill>
                   <a:srgbClr val="383A42"/>
                 </a:solidFill>
@@ -11306,7 +11344,7 @@
               <a:t>)</a:t>
             </a:r>
             <a:br>
-              <a:rPr lang="en-US" altLang="ko-KR" sz="2400" b="0" i="0" u="none" strike="noStrike" dirty="0">
+              <a:rPr lang="en-US" altLang="ko-KR" sz="2400" b="1" i="0" u="none" strike="noStrike" dirty="0">
                 <a:solidFill>
                   <a:srgbClr val="383A42"/>
                 </a:solidFill>
@@ -11315,7 +11353,7 @@
               </a:rPr>
             </a:br>
             <a:r>
-              <a:rPr lang="en-US" altLang="ko-KR" sz="2400" b="0" i="0" u="none" strike="noStrike" dirty="0">
+              <a:rPr lang="en-US" altLang="ko-KR" sz="2400" b="1" i="0" u="none" strike="noStrike" dirty="0">
                 <a:solidFill>
                   <a:srgbClr val="A626A4"/>
                 </a:solidFill>
@@ -11325,7 +11363,7 @@
               <a:t>void</a:t>
             </a:r>
             <a:r>
-              <a:rPr lang="en-US" altLang="ko-KR" sz="2400" b="0" i="0" u="none" strike="noStrike" dirty="0">
+              <a:rPr lang="en-US" altLang="ko-KR" sz="2400" b="1" i="0" u="none" strike="noStrike" dirty="0">
                 <a:solidFill>
                   <a:srgbClr val="383A42"/>
                 </a:solidFill>
@@ -11335,7 +11373,7 @@
               <a:t> </a:t>
             </a:r>
             <a:r>
-              <a:rPr lang="en-US" altLang="ko-KR" sz="2400" b="0" i="0" u="none" strike="noStrike" dirty="0">
+              <a:rPr lang="en-US" altLang="ko-KR" sz="2400" b="1" i="0" u="none" strike="noStrike" dirty="0">
                 <a:solidFill>
                   <a:srgbClr val="4078F2"/>
                 </a:solidFill>
@@ -11345,7 +11383,7 @@
               <a:t>main</a:t>
             </a:r>
             <a:r>
-              <a:rPr lang="en-US" altLang="ko-KR" sz="2400" b="0" i="0" u="none" strike="noStrike" dirty="0">
+              <a:rPr lang="en-US" altLang="ko-KR" sz="2400" b="1" i="0" u="none" strike="noStrike" dirty="0">
                 <a:solidFill>
                   <a:srgbClr val="383A42"/>
                 </a:solidFill>
@@ -11355,7 +11393,7 @@
               <a:t>(</a:t>
             </a:r>
             <a:r>
-              <a:rPr lang="en-US" altLang="ko-KR" sz="2400" b="0" i="0" u="none" strike="noStrike" dirty="0">
+              <a:rPr lang="en-US" altLang="ko-KR" sz="2400" b="1" i="0" u="none" strike="noStrike" dirty="0">
                 <a:solidFill>
                   <a:srgbClr val="A626A4"/>
                 </a:solidFill>
@@ -11365,7 +11403,7 @@
               <a:t>int</a:t>
             </a:r>
             <a:r>
-              <a:rPr lang="en-US" altLang="ko-KR" sz="2400" b="0" i="0" u="none" strike="noStrike" dirty="0">
+              <a:rPr lang="en-US" altLang="ko-KR" sz="2400" b="1" i="0" u="none" strike="noStrike" dirty="0">
                 <a:solidFill>
                   <a:srgbClr val="383A42"/>
                 </a:solidFill>
@@ -11375,7 +11413,7 @@
               <a:t> argc, </a:t>
             </a:r>
             <a:r>
-              <a:rPr lang="en-US" altLang="ko-KR" sz="2400" b="0" i="0" u="none" strike="noStrike" dirty="0">
+              <a:rPr lang="en-US" altLang="ko-KR" sz="2400" b="1" i="0" u="none" strike="noStrike" dirty="0">
                 <a:solidFill>
                   <a:srgbClr val="A626A4"/>
                 </a:solidFill>
@@ -11385,7 +11423,7 @@
               <a:t>char</a:t>
             </a:r>
             <a:r>
-              <a:rPr lang="en-US" altLang="ko-KR" sz="2400" b="0" i="0" u="none" strike="noStrike" dirty="0">
+              <a:rPr lang="en-US" altLang="ko-KR" sz="2400" b="1" i="0" u="none" strike="noStrike" dirty="0">
                 <a:solidFill>
                   <a:srgbClr val="50A14F"/>
                 </a:solidFill>
@@ -11395,7 +11433,7 @@
               <a:t>" </a:t>
             </a:r>
             <a:r>
-              <a:rPr lang="en-US" altLang="ko-KR" sz="2400" b="0" i="0" u="none" strike="noStrike" dirty="0">
+              <a:rPr lang="en-US" altLang="ko-KR" sz="2400" b="1" i="0" u="none" strike="noStrike" dirty="0">
                 <a:solidFill>
                   <a:srgbClr val="383A42"/>
                 </a:solidFill>
@@ -11405,7 +11443,7 @@
               <a:t>argv) </a:t>
             </a:r>
             <a:r>
-              <a:rPr lang="ko-KR" altLang="en-US" sz="2400" b="0" i="0" u="none" strike="noStrike" dirty="0">
+              <a:rPr lang="ko-KR" altLang="en-US" sz="2400" b="1" i="0" u="none" strike="noStrike" dirty="0">
                 <a:solidFill>
                   <a:srgbClr val="383A42"/>
                 </a:solidFill>
@@ -11414,7 +11452,7 @@
               </a:rPr>
               <a:t>또는</a:t>
             </a:r>
-            <a:endParaRPr lang="ko-KR" altLang="en-US" b="0" dirty="0">
+            <a:endParaRPr lang="ko-KR" altLang="en-US" b="1" dirty="0">
               <a:effectLst/>
             </a:endParaRPr>
           </a:p>
@@ -11423,7 +11461,7 @@
               <a:buNone/>
             </a:pPr>
             <a:r>
-              <a:rPr lang="en-US" altLang="ko-KR" sz="2400" b="0" i="0" u="none" strike="noStrike" dirty="0">
+              <a:rPr lang="en-US" altLang="ko-KR" sz="2400" b="1" i="0" u="none" strike="noStrike" dirty="0">
                 <a:solidFill>
                   <a:srgbClr val="A626A4"/>
                 </a:solidFill>
@@ -11433,7 +11471,7 @@
               <a:t>void</a:t>
             </a:r>
             <a:r>
-              <a:rPr lang="en-US" altLang="ko-KR" sz="2400" b="0" i="0" u="none" strike="noStrike" dirty="0">
+              <a:rPr lang="en-US" altLang="ko-KR" sz="2400" b="1" i="0" u="none" strike="noStrike" dirty="0">
                 <a:solidFill>
                   <a:srgbClr val="383A42"/>
                 </a:solidFill>
@@ -11443,7 +11481,7 @@
               <a:t> </a:t>
             </a:r>
             <a:r>
-              <a:rPr lang="en-US" altLang="ko-KR" sz="2400" b="0" i="0" u="none" strike="noStrike" dirty="0">
+              <a:rPr lang="en-US" altLang="ko-KR" sz="2400" b="1" i="0" u="none" strike="noStrike" dirty="0">
                 <a:solidFill>
                   <a:srgbClr val="4078F2"/>
                 </a:solidFill>
@@ -11453,7 +11491,7 @@
               <a:t>main</a:t>
             </a:r>
             <a:r>
-              <a:rPr lang="en-US" altLang="ko-KR" sz="2400" b="0" i="0" u="none" strike="noStrike" dirty="0">
+              <a:rPr lang="en-US" altLang="ko-KR" sz="2400" b="1" i="0" u="none" strike="noStrike" dirty="0">
                 <a:solidFill>
                   <a:srgbClr val="383A42"/>
                 </a:solidFill>
@@ -11463,7 +11501,7 @@
               <a:t>(</a:t>
             </a:r>
             <a:r>
-              <a:rPr lang="en-US" altLang="ko-KR" sz="2400" b="0" i="0" u="none" strike="noStrike" dirty="0">
+              <a:rPr lang="en-US" altLang="ko-KR" sz="2400" b="1" i="0" u="none" strike="noStrike" dirty="0">
                 <a:solidFill>
                   <a:srgbClr val="A626A4"/>
                 </a:solidFill>
@@ -11473,7 +11511,7 @@
               <a:t>int</a:t>
             </a:r>
             <a:r>
-              <a:rPr lang="en-US" altLang="ko-KR" sz="2400" b="0" i="0" u="none" strike="noStrike" dirty="0">
+              <a:rPr lang="en-US" altLang="ko-KR" sz="2400" b="1" i="0" u="none" strike="noStrike" dirty="0">
                 <a:solidFill>
                   <a:srgbClr val="383A42"/>
                 </a:solidFill>
@@ -11483,7 +11521,7 @@
               <a:t> argc, </a:t>
             </a:r>
             <a:r>
-              <a:rPr lang="en-US" altLang="ko-KR" sz="2400" b="0" i="0" u="none" strike="noStrike" dirty="0">
+              <a:rPr lang="en-US" altLang="ko-KR" sz="2400" b="1" i="0" u="none" strike="noStrike" dirty="0">
                 <a:solidFill>
                   <a:srgbClr val="A626A4"/>
                 </a:solidFill>
@@ -11493,7 +11531,7 @@
               <a:t>char</a:t>
             </a:r>
             <a:r>
-              <a:rPr lang="en-US" altLang="ko-KR" sz="2400" b="0" i="0" u="none" strike="noStrike" dirty="0">
+              <a:rPr lang="en-US" altLang="ko-KR" sz="2400" b="1" i="0" u="none" strike="noStrike" dirty="0">
                 <a:solidFill>
                   <a:srgbClr val="383A42"/>
                 </a:solidFill>
@@ -11502,7 +11540,7 @@
               </a:rPr>
               <a:t>* argv[])</a:t>
             </a:r>
-            <a:endParaRPr lang="ko-KR" altLang="en-US" dirty="0"/>
+            <a:endParaRPr lang="ko-KR" altLang="en-US" b="1" dirty="0"/>
           </a:p>
         </p:txBody>
       </p:sp>
@@ -11558,15 +11596,15 @@
           <a:lstStyle/>
           <a:p>
             <a:r>
-              <a:rPr lang="en-US" altLang="ko-KR" b="0" dirty="0"/>
+              <a:rPr lang="en-US" altLang="ko-KR" dirty="0"/>
               <a:t>2.7.4 </a:t>
             </a:r>
             <a:r>
-              <a:rPr lang="ko-KR" altLang="en-US" b="0" dirty="0"/>
+              <a:rPr lang="ko-KR" altLang="en-US" dirty="0"/>
               <a:t>출력 옵션 </a:t>
             </a:r>
             <a:r>
-              <a:rPr lang="en-US" altLang="ko-KR" b="0" dirty="0"/>
+              <a:rPr lang="en-US" altLang="ko-KR" dirty="0"/>
               <a:t>(Format Options)</a:t>
             </a:r>
             <a:endParaRPr lang="ko-KR" altLang="en-US" dirty="0"/>
@@ -11780,15 +11818,15 @@
           <a:lstStyle/>
           <a:p>
             <a:r>
-              <a:rPr lang="en-US" altLang="ko-KR" b="0" dirty="0"/>
+              <a:rPr lang="en-US" altLang="ko-KR" dirty="0"/>
               <a:t>2.7.4 </a:t>
             </a:r>
             <a:r>
-              <a:rPr lang="ko-KR" altLang="en-US" b="0" dirty="0"/>
+              <a:rPr lang="ko-KR" altLang="en-US" dirty="0"/>
               <a:t>출력 옵션 </a:t>
             </a:r>
             <a:r>
-              <a:rPr lang="en-US" altLang="ko-KR" b="0" dirty="0"/>
+              <a:rPr lang="en-US" altLang="ko-KR" dirty="0"/>
               <a:t>(Format Options)</a:t>
             </a:r>
             <a:endParaRPr lang="ko-KR" altLang="en-US" dirty="0"/>
@@ -14839,10 +14877,9 @@
           <a:lstStyle/>
           <a:p>
             <a:r>
-              <a:rPr lang="ko-KR" altLang="en-US" b="0" dirty="0"/>
+              <a:rPr lang="ko-KR" altLang="en-US" dirty="0"/>
               <a:t>실습 과제</a:t>
             </a:r>
-            <a:endParaRPr lang="ko-KR" altLang="en-US" dirty="0"/>
           </a:p>
         </p:txBody>
       </p:sp>
@@ -15211,20 +15248,16 @@
           <a:lstStyle/>
           <a:p>
             <a:r>
-              <a:rPr lang="en-US" altLang="ko-KR" b="0" dirty="0"/>
+              <a:rPr lang="en-US" altLang="ko-KR" dirty="0"/>
               <a:t>2.3 </a:t>
             </a:r>
             <a:r>
-              <a:rPr lang="ko-KR" altLang="en-US" b="0" dirty="0"/>
+              <a:rPr lang="ko-KR" altLang="en-US" dirty="0"/>
               <a:t>프로젝트 생성</a:t>
             </a:r>
             <a:r>
-              <a:rPr lang="en-US" altLang="ko-KR" b="0" dirty="0"/>
-              <a:t>: </a:t>
-            </a:r>
-            <a:r>
               <a:rPr lang="en-US" altLang="ko-KR" dirty="0"/>
-              <a:t>myLesson</a:t>
+              <a:t>: myLesson</a:t>
             </a:r>
             <a:endParaRPr lang="ko-KR" altLang="en-US" dirty="0"/>
           </a:p>
@@ -15260,72 +15293,72 @@
           <a:p>
             <a:pPr lvl="1"/>
             <a:r>
-              <a:rPr lang="en-US" altLang="ko-KR" b="0" dirty="0"/>
+              <a:rPr lang="en-US" altLang="ko-KR" dirty="0"/>
               <a:t>[</a:t>
             </a:r>
             <a:r>
-              <a:rPr lang="ko-KR" altLang="en-US" b="0" dirty="0"/>
+              <a:rPr lang="ko-KR" altLang="en-US" dirty="0"/>
               <a:t>메뉴</a:t>
             </a:r>
             <a:r>
-              <a:rPr lang="en-US" altLang="ko-KR" b="0" dirty="0"/>
+              <a:rPr lang="en-US" altLang="ko-KR" dirty="0"/>
               <a:t>] → [</a:t>
             </a:r>
             <a:r>
-              <a:rPr lang="ko-KR" altLang="en-US" b="0" dirty="0"/>
+              <a:rPr lang="ko-KR" altLang="en-US" dirty="0"/>
               <a:t>파일</a:t>
             </a:r>
             <a:r>
-              <a:rPr lang="en-US" altLang="ko-KR" b="0" dirty="0"/>
+              <a:rPr lang="en-US" altLang="ko-KR" dirty="0"/>
               <a:t>] → [</a:t>
             </a:r>
             <a:r>
-              <a:rPr lang="ko-KR" altLang="en-US" b="0" dirty="0"/>
+              <a:rPr lang="ko-KR" altLang="en-US" dirty="0"/>
               <a:t>새로 만들기</a:t>
             </a:r>
             <a:r>
-              <a:rPr lang="en-US" altLang="ko-KR" b="0" dirty="0"/>
+              <a:rPr lang="en-US" altLang="ko-KR" dirty="0"/>
               <a:t>] → [</a:t>
             </a:r>
             <a:r>
-              <a:rPr lang="ko-KR" altLang="en-US" b="0" dirty="0"/>
+              <a:rPr lang="ko-KR" altLang="en-US" dirty="0"/>
               <a:t>프로젝트</a:t>
             </a:r>
             <a:r>
-              <a:rPr lang="en-US" altLang="ko-KR" b="0" dirty="0"/>
+              <a:rPr lang="en-US" altLang="ko-KR" dirty="0"/>
               <a:t>]</a:t>
             </a:r>
           </a:p>
           <a:p>
             <a:pPr lvl="1"/>
-            <a:endParaRPr lang="en-US" altLang="ko-KR" b="0" dirty="0"/>
+            <a:endParaRPr lang="en-US" altLang="ko-KR" dirty="0"/>
           </a:p>
           <a:p>
             <a:pPr lvl="1"/>
-            <a:endParaRPr lang="en-US" altLang="ko-KR" b="0" dirty="0"/>
+            <a:endParaRPr lang="en-US" altLang="ko-KR" dirty="0"/>
           </a:p>
           <a:p>
             <a:pPr lvl="1"/>
-            <a:endParaRPr lang="en-US" altLang="ko-KR" b="0" dirty="0"/>
+            <a:endParaRPr lang="en-US" altLang="ko-KR" dirty="0"/>
           </a:p>
           <a:p>
             <a:pPr lvl="1"/>
-            <a:endParaRPr lang="en-US" altLang="ko-KR" b="0" dirty="0"/>
-          </a:p>
-          <a:p>
-            <a:r>
-              <a:rPr lang="ko-KR" altLang="en-US" b="0" dirty="0"/>
+            <a:endParaRPr lang="en-US" altLang="ko-KR" dirty="0"/>
+          </a:p>
+          <a:p>
+            <a:r>
+              <a:rPr lang="ko-KR" altLang="en-US" dirty="0"/>
               <a:t>새 프로젝트 생성</a:t>
             </a:r>
-            <a:endParaRPr lang="en-US" altLang="ko-KR" b="0" dirty="0"/>
+            <a:endParaRPr lang="en-US" altLang="ko-KR" dirty="0"/>
           </a:p>
           <a:p>
             <a:pPr lvl="1"/>
             <a:r>
-              <a:rPr lang="ko-KR" altLang="en-US" b="0" dirty="0"/>
+              <a:rPr lang="ko-KR" altLang="en-US" dirty="0"/>
               <a:t>시작 파일 없는 프로젝트 선택</a:t>
             </a:r>
-            <a:endParaRPr lang="en-US" altLang="ko-KR" b="0" dirty="0"/>
+            <a:endParaRPr lang="en-US" altLang="ko-KR" dirty="0"/>
           </a:p>
           <a:p>
             <a:pPr lvl="1"/>
@@ -15530,20 +15563,16 @@
           <a:lstStyle/>
           <a:p>
             <a:r>
-              <a:rPr lang="en-US" altLang="ko-KR" b="0" dirty="0"/>
+              <a:rPr lang="en-US" altLang="ko-KR" dirty="0"/>
               <a:t>2.3 </a:t>
             </a:r>
             <a:r>
-              <a:rPr lang="ko-KR" altLang="en-US" b="0" dirty="0"/>
+              <a:rPr lang="ko-KR" altLang="en-US" dirty="0"/>
               <a:t>프로젝트 생성</a:t>
             </a:r>
             <a:r>
-              <a:rPr lang="en-US" altLang="ko-KR" b="0" dirty="0"/>
-              <a:t>: </a:t>
-            </a:r>
-            <a:r>
               <a:rPr lang="en-US" altLang="ko-KR" dirty="0"/>
-              <a:t>myLesson</a:t>
+              <a:t>: myLesson</a:t>
             </a:r>
             <a:endParaRPr lang="ko-KR" altLang="en-US" dirty="0"/>
           </a:p>
@@ -15725,20 +15754,16 @@
           <a:lstStyle/>
           <a:p>
             <a:r>
-              <a:rPr lang="en-US" altLang="ko-KR" b="0" dirty="0"/>
+              <a:rPr lang="en-US" altLang="ko-KR" dirty="0"/>
               <a:t>2.3 </a:t>
             </a:r>
             <a:r>
-              <a:rPr lang="ko-KR" altLang="en-US" b="0" dirty="0"/>
+              <a:rPr lang="ko-KR" altLang="en-US" dirty="0"/>
               <a:t>프로젝트 생성</a:t>
             </a:r>
             <a:r>
-              <a:rPr lang="en-US" altLang="ko-KR" b="0" dirty="0"/>
-              <a:t>: </a:t>
-            </a:r>
-            <a:r>
               <a:rPr lang="en-US" altLang="ko-KR" dirty="0"/>
-              <a:t>myLesson</a:t>
+              <a:t>: myLesson</a:t>
             </a:r>
             <a:endParaRPr lang="ko-KR" altLang="en-US" dirty="0"/>
           </a:p>
@@ -16318,20 +16343,16 @@
           <a:lstStyle/>
           <a:p>
             <a:r>
-              <a:rPr lang="en-US" altLang="ko-KR" b="0" dirty="0"/>
+              <a:rPr lang="en-US" altLang="ko-KR" dirty="0"/>
               <a:t>2.3 </a:t>
             </a:r>
             <a:r>
-              <a:rPr lang="ko-KR" altLang="en-US" b="0" dirty="0"/>
+              <a:rPr lang="ko-KR" altLang="en-US" dirty="0"/>
               <a:t>프로젝트 생성</a:t>
             </a:r>
             <a:r>
-              <a:rPr lang="en-US" altLang="ko-KR" b="0" dirty="0"/>
-              <a:t>: </a:t>
-            </a:r>
-            <a:r>
               <a:rPr lang="en-US" altLang="ko-KR" dirty="0"/>
-              <a:t>myLesson</a:t>
+              <a:t>: myLesson</a:t>
             </a:r>
             <a:endParaRPr lang="ko-KR" altLang="en-US" dirty="0"/>
           </a:p>
@@ -16425,12 +16446,13 @@
             <a:avLst/>
           </a:prstGeom>
           <a:noFill/>
-          <a:ln w="38100">
+          <a:ln w="25400">
             <a:solidFill>
               <a:schemeClr val="bg1">
-                <a:lumMod val="50000"/>
+                <a:lumMod val="75000"/>
               </a:schemeClr>
             </a:solidFill>
+            <a:prstDash val="sysDot"/>
           </a:ln>
         </p:spPr>
         <p:txBody>
@@ -16440,7 +16462,7 @@
           <a:lstStyle/>
           <a:p>
             <a:r>
-              <a:rPr lang="en-US" altLang="ko-KR" sz="2400" b="0" i="0" u="none" strike="noStrike" dirty="0">
+              <a:rPr lang="en-US" altLang="ko-KR" sz="2400" b="1" i="0" u="none" strike="noStrike" dirty="0">
                 <a:solidFill>
                   <a:srgbClr val="A626A4"/>
                 </a:solidFill>
@@ -16450,7 +16472,7 @@
               <a:t>int</a:t>
             </a:r>
             <a:r>
-              <a:rPr lang="en-US" altLang="ko-KR" sz="2400" b="0" i="0" u="none" strike="noStrike" dirty="0">
+              <a:rPr lang="en-US" altLang="ko-KR" sz="2400" b="1" i="0" u="none" strike="noStrike" dirty="0">
                 <a:solidFill>
                   <a:srgbClr val="383A42"/>
                 </a:solidFill>
@@ -16460,7 +16482,7 @@
               <a:t> </a:t>
             </a:r>
             <a:r>
-              <a:rPr lang="en-US" altLang="ko-KR" sz="2400" b="0" i="0" u="none" strike="noStrike" dirty="0">
+              <a:rPr lang="en-US" altLang="ko-KR" sz="2400" b="1" i="0" u="none" strike="noStrike" dirty="0">
                 <a:solidFill>
                   <a:srgbClr val="4078F2"/>
                 </a:solidFill>
@@ -16470,7 +16492,7 @@
               <a:t>main</a:t>
             </a:r>
             <a:r>
-              <a:rPr lang="en-US" altLang="ko-KR" sz="2400" b="0" i="0" u="none" strike="noStrike" dirty="0">
+              <a:rPr lang="en-US" altLang="ko-KR" sz="2400" b="1" i="0" u="none" strike="noStrike" dirty="0">
                 <a:solidFill>
                   <a:srgbClr val="383A42"/>
                 </a:solidFill>
@@ -16480,7 +16502,7 @@
               <a:t>(</a:t>
             </a:r>
             <a:r>
-              <a:rPr lang="en-US" altLang="ko-KR" sz="2400" b="0" i="0" u="none" strike="noStrike" dirty="0">
+              <a:rPr lang="en-US" altLang="ko-KR" sz="2400" b="1" i="0" u="none" strike="noStrike" dirty="0">
                 <a:solidFill>
                   <a:srgbClr val="A626A4"/>
                 </a:solidFill>
@@ -16490,7 +16512,7 @@
               <a:t>void</a:t>
             </a:r>
             <a:r>
-              <a:rPr lang="en-US" altLang="ko-KR" sz="2400" b="0" i="0" u="none" strike="noStrike" dirty="0">
+              <a:rPr lang="en-US" altLang="ko-KR" sz="2400" b="1" i="0" u="none" strike="noStrike" dirty="0">
                 <a:solidFill>
                   <a:srgbClr val="383A42"/>
                 </a:solidFill>
@@ -16500,7 +16522,7 @@
               <a:t>)</a:t>
             </a:r>
             <a:br>
-              <a:rPr lang="en-US" altLang="ko-KR" sz="2400" b="0" i="0" u="none" strike="noStrike" dirty="0">
+              <a:rPr lang="en-US" altLang="ko-KR" sz="2400" b="1" i="0" u="none" strike="noStrike" dirty="0">
                 <a:solidFill>
                   <a:srgbClr val="383A42"/>
                 </a:solidFill>
@@ -16509,7 +16531,7 @@
               </a:rPr>
             </a:br>
             <a:r>
-              <a:rPr lang="en-US" altLang="ko-KR" sz="2400" b="0" i="0" u="none" strike="noStrike" dirty="0">
+              <a:rPr lang="en-US" altLang="ko-KR" sz="2400" b="1" i="0" u="none" strike="noStrike" dirty="0">
                 <a:solidFill>
                   <a:srgbClr val="383A42"/>
                 </a:solidFill>
@@ -16519,7 +16541,7 @@
               <a:t>{</a:t>
             </a:r>
             <a:br>
-              <a:rPr lang="en-US" altLang="ko-KR" sz="2400" b="0" i="0" u="none" strike="noStrike" dirty="0">
+              <a:rPr lang="en-US" altLang="ko-KR" sz="2400" b="1" i="0" u="none" strike="noStrike" dirty="0">
                 <a:solidFill>
                   <a:srgbClr val="383A42"/>
                 </a:solidFill>
@@ -16528,7 +16550,7 @@
               </a:rPr>
             </a:br>
             <a:r>
-              <a:rPr lang="en-US" altLang="ko-KR" sz="2400" b="0" i="0" u="none" strike="noStrike" dirty="0">
+              <a:rPr lang="en-US" altLang="ko-KR" sz="2400" b="1" i="0" u="none" strike="noStrike" dirty="0">
                 <a:solidFill>
                   <a:srgbClr val="383A42"/>
                 </a:solidFill>
@@ -16538,7 +16560,7 @@
               <a:t>    </a:t>
             </a:r>
             <a:r>
-              <a:rPr lang="en-US" altLang="ko-KR" sz="2400" b="0" i="0" u="none" strike="noStrike" dirty="0">
+              <a:rPr lang="en-US" altLang="ko-KR" sz="2400" b="1" i="0" u="none" strike="noStrike" dirty="0">
                 <a:solidFill>
                   <a:srgbClr val="A626A4"/>
                 </a:solidFill>
@@ -16548,7 +16570,7 @@
               <a:t>return</a:t>
             </a:r>
             <a:r>
-              <a:rPr lang="en-US" altLang="ko-KR" sz="2400" b="0" i="0" u="none" strike="noStrike" dirty="0">
+              <a:rPr lang="en-US" altLang="ko-KR" sz="2400" b="1" i="0" u="none" strike="noStrike" dirty="0">
                 <a:solidFill>
                   <a:srgbClr val="383A42"/>
                 </a:solidFill>
@@ -16558,7 +16580,7 @@
               <a:t> </a:t>
             </a:r>
             <a:r>
-              <a:rPr lang="en-US" altLang="ko-KR" sz="2400" b="0" i="0" u="none" strike="noStrike" dirty="0">
+              <a:rPr lang="en-US" altLang="ko-KR" sz="2400" b="1" i="0" u="none" strike="noStrike" dirty="0">
                 <a:solidFill>
                   <a:srgbClr val="986801"/>
                 </a:solidFill>
@@ -16568,7 +16590,7 @@
               <a:t>0</a:t>
             </a:r>
             <a:r>
-              <a:rPr lang="en-US" altLang="ko-KR" sz="2400" b="0" i="0" u="none" strike="noStrike" dirty="0">
+              <a:rPr lang="en-US" altLang="ko-KR" sz="2400" b="1" i="0" u="none" strike="noStrike" dirty="0">
                 <a:solidFill>
                   <a:srgbClr val="383A42"/>
                 </a:solidFill>
@@ -16578,7 +16600,7 @@
               <a:t>;</a:t>
             </a:r>
             <a:br>
-              <a:rPr lang="en-US" altLang="ko-KR" sz="2400" b="0" i="0" u="none" strike="noStrike" dirty="0">
+              <a:rPr lang="en-US" altLang="ko-KR" sz="2400" b="1" i="0" u="none" strike="noStrike" dirty="0">
                 <a:solidFill>
                   <a:srgbClr val="383A42"/>
                 </a:solidFill>
@@ -16587,7 +16609,7 @@
               </a:rPr>
             </a:br>
             <a:r>
-              <a:rPr lang="en-US" altLang="ko-KR" sz="2400" b="0" i="0" u="none" strike="noStrike" dirty="0">
+              <a:rPr lang="en-US" altLang="ko-KR" sz="2400" b="1" i="0" u="none" strike="noStrike" dirty="0">
                 <a:solidFill>
                   <a:srgbClr val="383A42"/>
                 </a:solidFill>
@@ -16596,7 +16618,7 @@
               </a:rPr>
               <a:t>}</a:t>
             </a:r>
-            <a:endParaRPr lang="ko-KR" altLang="en-US" dirty="0"/>
+            <a:endParaRPr lang="ko-KR" altLang="en-US" b="1" dirty="0"/>
           </a:p>
         </p:txBody>
       </p:sp>
@@ -16621,12 +16643,13 @@
             <a:avLst/>
           </a:prstGeom>
           <a:noFill/>
-          <a:ln w="38100">
+          <a:ln w="25400">
             <a:solidFill>
               <a:schemeClr val="bg1">
-                <a:lumMod val="50000"/>
+                <a:lumMod val="75000"/>
               </a:schemeClr>
             </a:solidFill>
+            <a:prstDash val="sysDot"/>
           </a:ln>
         </p:spPr>
         <p:txBody>
@@ -16636,7 +16659,7 @@
           <a:lstStyle/>
           <a:p>
             <a:r>
-              <a:rPr lang="en-US" altLang="ko-KR" sz="2400" b="0" i="0" u="none" strike="noStrike" dirty="0">
+              <a:rPr lang="en-US" altLang="ko-KR" sz="2400" b="1" i="0" u="none" strike="noStrike" dirty="0">
                 <a:solidFill>
                   <a:srgbClr val="A626A4"/>
                 </a:solidFill>
@@ -16646,7 +16669,7 @@
               <a:t>int</a:t>
             </a:r>
             <a:r>
-              <a:rPr lang="en-US" altLang="ko-KR" sz="2400" b="0" i="0" u="none" strike="noStrike" dirty="0">
+              <a:rPr lang="en-US" altLang="ko-KR" sz="2400" b="1" i="0" u="none" strike="noStrike" dirty="0">
                 <a:solidFill>
                   <a:srgbClr val="383A42"/>
                 </a:solidFill>
@@ -16656,7 +16679,7 @@
               <a:t> </a:t>
             </a:r>
             <a:r>
-              <a:rPr lang="en-US" altLang="ko-KR" sz="2400" b="0" i="0" u="none" strike="noStrike" dirty="0">
+              <a:rPr lang="en-US" altLang="ko-KR" sz="2400" b="1" i="0" u="none" strike="noStrike" dirty="0">
                 <a:solidFill>
                   <a:srgbClr val="4078F2"/>
                 </a:solidFill>
@@ -16666,7 +16689,7 @@
               <a:t>main</a:t>
             </a:r>
             <a:r>
-              <a:rPr lang="en-US" altLang="ko-KR" sz="2400" b="0" i="0" u="none" strike="noStrike" dirty="0">
+              <a:rPr lang="en-US" altLang="ko-KR" sz="2400" b="1" i="0" u="none" strike="noStrike" dirty="0">
                 <a:solidFill>
                   <a:srgbClr val="383A42"/>
                 </a:solidFill>
@@ -16676,7 +16699,7 @@
               <a:t>(</a:t>
             </a:r>
             <a:r>
-              <a:rPr lang="en-US" altLang="ko-KR" sz="2400" b="0" i="0" u="none" strike="noStrike" dirty="0">
+              <a:rPr lang="en-US" altLang="ko-KR" sz="2400" b="1" i="0" u="none" strike="noStrike" dirty="0">
                 <a:solidFill>
                   <a:srgbClr val="A626A4"/>
                 </a:solidFill>
@@ -16686,7 +16709,7 @@
               <a:t>int</a:t>
             </a:r>
             <a:r>
-              <a:rPr lang="en-US" altLang="ko-KR" sz="2400" b="0" i="0" u="none" strike="noStrike" dirty="0">
+              <a:rPr lang="en-US" altLang="ko-KR" sz="2400" b="1" i="0" u="none" strike="noStrike" dirty="0">
                 <a:solidFill>
                   <a:srgbClr val="383A42"/>
                 </a:solidFill>
@@ -16696,7 +16719,7 @@
               <a:t> argc, </a:t>
             </a:r>
             <a:r>
-              <a:rPr lang="en-US" altLang="ko-KR" sz="2400" b="0" i="0" u="none" strike="noStrike" dirty="0">
+              <a:rPr lang="en-US" altLang="ko-KR" sz="2400" b="1" i="0" u="none" strike="noStrike" dirty="0">
                 <a:solidFill>
                   <a:srgbClr val="A626A4"/>
                 </a:solidFill>
@@ -16706,7 +16729,7 @@
               <a:t>char</a:t>
             </a:r>
             <a:r>
-              <a:rPr lang="en-US" altLang="ko-KR" sz="2400" b="0" i="0" u="none" strike="noStrike" dirty="0">
+              <a:rPr lang="en-US" altLang="ko-KR" sz="2400" b="1" i="0" u="none" strike="noStrike" dirty="0">
                 <a:solidFill>
                   <a:srgbClr val="383A42"/>
                 </a:solidFill>
@@ -16716,7 +16739,7 @@
               <a:t>** argv)</a:t>
             </a:r>
             <a:br>
-              <a:rPr lang="en-US" altLang="ko-KR" sz="2400" b="0" i="0" u="none" strike="noStrike" dirty="0">
+              <a:rPr lang="en-US" altLang="ko-KR" sz="2400" b="1" i="0" u="none" strike="noStrike" dirty="0">
                 <a:solidFill>
                   <a:srgbClr val="383A42"/>
                 </a:solidFill>
@@ -16725,7 +16748,7 @@
               </a:rPr>
             </a:br>
             <a:r>
-              <a:rPr lang="en-US" altLang="ko-KR" sz="2400" b="0" i="0" u="none" strike="noStrike" dirty="0">
+              <a:rPr lang="en-US" altLang="ko-KR" sz="2400" b="1" i="0" u="none" strike="noStrike" dirty="0">
                 <a:solidFill>
                   <a:srgbClr val="383A42"/>
                 </a:solidFill>
@@ -16735,7 +16758,7 @@
               <a:t>{</a:t>
             </a:r>
             <a:br>
-              <a:rPr lang="en-US" altLang="ko-KR" sz="2400" b="0" i="0" u="none" strike="noStrike" dirty="0">
+              <a:rPr lang="en-US" altLang="ko-KR" sz="2400" b="1" i="0" u="none" strike="noStrike" dirty="0">
                 <a:solidFill>
                   <a:srgbClr val="383A42"/>
                 </a:solidFill>
@@ -16744,7 +16767,7 @@
               </a:rPr>
             </a:br>
             <a:r>
-              <a:rPr lang="en-US" altLang="ko-KR" sz="2400" b="0" i="0" u="none" strike="noStrike" dirty="0">
+              <a:rPr lang="en-US" altLang="ko-KR" sz="2400" b="1" i="0" u="none" strike="noStrike" dirty="0">
                 <a:solidFill>
                   <a:srgbClr val="383A42"/>
                 </a:solidFill>
@@ -16754,7 +16777,7 @@
               <a:t>    </a:t>
             </a:r>
             <a:r>
-              <a:rPr lang="en-US" altLang="ko-KR" sz="2400" b="0" i="0" u="none" strike="noStrike" dirty="0">
+              <a:rPr lang="en-US" altLang="ko-KR" sz="2400" b="1" i="0" u="none" strike="noStrike" dirty="0">
                 <a:solidFill>
                   <a:srgbClr val="A626A4"/>
                 </a:solidFill>
@@ -16764,7 +16787,7 @@
               <a:t>return</a:t>
             </a:r>
             <a:r>
-              <a:rPr lang="en-US" altLang="ko-KR" sz="2400" b="0" i="0" u="none" strike="noStrike" dirty="0">
+              <a:rPr lang="en-US" altLang="ko-KR" sz="2400" b="1" i="0" u="none" strike="noStrike" dirty="0">
                 <a:solidFill>
                   <a:srgbClr val="383A42"/>
                 </a:solidFill>
@@ -16774,7 +16797,7 @@
               <a:t> </a:t>
             </a:r>
             <a:r>
-              <a:rPr lang="en-US" altLang="ko-KR" sz="2400" b="0" i="0" u="none" strike="noStrike" dirty="0">
+              <a:rPr lang="en-US" altLang="ko-KR" sz="2400" b="1" i="0" u="none" strike="noStrike" dirty="0">
                 <a:solidFill>
                   <a:srgbClr val="986801"/>
                 </a:solidFill>
@@ -16784,7 +16807,7 @@
               <a:t>0</a:t>
             </a:r>
             <a:r>
-              <a:rPr lang="en-US" altLang="ko-KR" sz="2400" b="0" i="0" u="none" strike="noStrike" dirty="0">
+              <a:rPr lang="en-US" altLang="ko-KR" sz="2400" b="1" i="0" u="none" strike="noStrike" dirty="0">
                 <a:solidFill>
                   <a:srgbClr val="383A42"/>
                 </a:solidFill>
@@ -16794,7 +16817,7 @@
               <a:t>;</a:t>
             </a:r>
             <a:br>
-              <a:rPr lang="en-US" altLang="ko-KR" sz="2400" b="0" i="0" u="none" strike="noStrike" dirty="0">
+              <a:rPr lang="en-US" altLang="ko-KR" sz="2400" b="1" i="0" u="none" strike="noStrike" dirty="0">
                 <a:solidFill>
                   <a:srgbClr val="383A42"/>
                 </a:solidFill>
@@ -16803,7 +16826,7 @@
               </a:rPr>
             </a:br>
             <a:r>
-              <a:rPr lang="en-US" altLang="ko-KR" sz="2400" b="0" i="0" u="none" strike="noStrike" dirty="0">
+              <a:rPr lang="en-US" altLang="ko-KR" sz="2400" b="1" i="0" u="none" strike="noStrike" dirty="0">
                 <a:solidFill>
                   <a:srgbClr val="383A42"/>
                 </a:solidFill>
@@ -16812,7 +16835,7 @@
               </a:rPr>
               <a:t>}</a:t>
             </a:r>
-            <a:endParaRPr lang="ko-KR" altLang="en-US" dirty="0"/>
+            <a:endParaRPr lang="ko-KR" altLang="en-US" b="1" dirty="0"/>
           </a:p>
         </p:txBody>
       </p:sp>
@@ -16868,14 +16891,13 @@
           <a:lstStyle/>
           <a:p>
             <a:r>
-              <a:rPr lang="en-US" altLang="ko-KR" b="0" dirty="0"/>
+              <a:rPr lang="en-US" altLang="ko-KR" dirty="0"/>
               <a:t>2.4 </a:t>
             </a:r>
             <a:r>
-              <a:rPr lang="ko-KR" altLang="en-US" b="0" dirty="0"/>
+              <a:rPr lang="ko-KR" altLang="en-US" dirty="0"/>
               <a:t>프로그래밍 구성과 함수</a:t>
             </a:r>
-            <a:endParaRPr lang="ko-KR" altLang="en-US" dirty="0"/>
           </a:p>
         </p:txBody>
       </p:sp>
@@ -17075,19 +17097,20 @@
         </p:blipFill>
         <p:spPr bwMode="auto">
           <a:xfrm>
-            <a:off x="1331640" y="3717032"/>
+            <a:off x="1187624" y="3501008"/>
             <a:ext cx="4900545" cy="2520280"/>
           </a:xfrm>
           <a:prstGeom prst="rect">
             <a:avLst/>
           </a:prstGeom>
           <a:noFill/>
-          <a:ln w="38100">
+          <a:ln w="25400">
             <a:solidFill>
               <a:schemeClr val="bg1">
-                <a:lumMod val="50000"/>
+                <a:lumMod val="75000"/>
               </a:schemeClr>
             </a:solidFill>
+            <a:prstDash val="sysDot"/>
           </a:ln>
           <a:extLst>
             <a:ext uri="{909E8E84-426E-40DD-AFC4-6F175D3DCCD1}">
@@ -17158,14 +17181,13 @@
           <a:lstStyle/>
           <a:p>
             <a:r>
-              <a:rPr lang="en-US" altLang="ko-KR" b="0" dirty="0"/>
+              <a:rPr lang="en-US" altLang="ko-KR" dirty="0"/>
               <a:t>2.4 </a:t>
             </a:r>
             <a:r>
-              <a:rPr lang="ko-KR" altLang="en-US" b="0" dirty="0"/>
+              <a:rPr lang="ko-KR" altLang="en-US" dirty="0"/>
               <a:t>프로그래밍 구성과 함수</a:t>
             </a:r>
-            <a:endParaRPr lang="ko-KR" altLang="en-US" dirty="0"/>
           </a:p>
         </p:txBody>
       </p:sp>
@@ -17191,37 +17213,37 @@
           <a:lstStyle/>
           <a:p>
             <a:r>
-              <a:rPr lang="en-US" altLang="ko-KR" b="0" dirty="0"/>
+              <a:rPr lang="en-US" altLang="ko-KR" dirty="0"/>
               <a:t>C </a:t>
             </a:r>
             <a:r>
-              <a:rPr lang="ko-KR" altLang="en-US" b="0" dirty="0"/>
+              <a:rPr lang="ko-KR" altLang="en-US" dirty="0"/>
               <a:t>언어 함수 원형</a:t>
             </a:r>
-            <a:endParaRPr lang="en-US" altLang="ko-KR" b="0" dirty="0"/>
-          </a:p>
-          <a:p>
-            <a:endParaRPr lang="en-US" altLang="ko-KR" b="0" dirty="0"/>
-          </a:p>
-          <a:p>
-            <a:endParaRPr lang="en-US" altLang="ko-KR" b="0" dirty="0"/>
-          </a:p>
-          <a:p>
-            <a:endParaRPr lang="en-US" altLang="ko-KR" b="0" dirty="0"/>
-          </a:p>
-          <a:p>
-            <a:endParaRPr lang="en-US" altLang="ko-KR" b="0" dirty="0"/>
-          </a:p>
-          <a:p>
-            <a:endParaRPr lang="en-US" altLang="ko-KR" b="0" dirty="0"/>
-          </a:p>
-          <a:p>
-            <a:r>
-              <a:rPr lang="ko-KR" altLang="en-US" b="0" dirty="0"/>
+            <a:endParaRPr lang="en-US" altLang="ko-KR" dirty="0"/>
+          </a:p>
+          <a:p>
+            <a:endParaRPr lang="en-US" altLang="ko-KR" dirty="0"/>
+          </a:p>
+          <a:p>
+            <a:endParaRPr lang="en-US" altLang="ko-KR" dirty="0"/>
+          </a:p>
+          <a:p>
+            <a:endParaRPr lang="en-US" altLang="ko-KR" dirty="0"/>
+          </a:p>
+          <a:p>
+            <a:endParaRPr lang="en-US" altLang="ko-KR" dirty="0"/>
+          </a:p>
+          <a:p>
+            <a:endParaRPr lang="en-US" altLang="ko-KR" dirty="0"/>
+          </a:p>
+          <a:p>
+            <a:r>
+              <a:rPr lang="ko-KR" altLang="en-US" dirty="0"/>
               <a:t>반환 없을 때</a:t>
             </a:r>
             <a:r>
-              <a:rPr lang="en-US" altLang="ko-KR" b="0" dirty="0"/>
+              <a:rPr lang="en-US" altLang="ko-KR" dirty="0"/>
               <a:t>:</a:t>
             </a:r>
             <a:endParaRPr lang="ko-KR" altLang="en-US" dirty="0"/>
@@ -17280,12 +17302,13 @@
             <a:avLst/>
           </a:prstGeom>
           <a:noFill/>
-          <a:ln w="38100">
+          <a:ln w="25400">
             <a:solidFill>
               <a:schemeClr val="bg1">
-                <a:lumMod val="50000"/>
+                <a:lumMod val="75000"/>
               </a:schemeClr>
             </a:solidFill>
+            <a:prstDash val="sysDot"/>
           </a:ln>
         </p:spPr>
         <p:txBody>
@@ -17295,7 +17318,7 @@
           <a:lstStyle/>
           <a:p>
             <a:r>
-              <a:rPr lang="ko-KR" altLang="en-US" sz="2400" b="0" i="0" u="none" strike="noStrike" dirty="0">
+              <a:rPr lang="ko-KR" altLang="en-US" sz="2400" b="1" i="0" u="none" strike="noStrike" dirty="0">
                 <a:solidFill>
                   <a:srgbClr val="383A42"/>
                 </a:solidFill>
@@ -17305,7 +17328,7 @@
               <a:t>반환형 함수</a:t>
             </a:r>
             <a:r>
-              <a:rPr lang="en-US" altLang="ko-KR" sz="2400" b="0" i="0" u="none" strike="noStrike" dirty="0">
+              <a:rPr lang="en-US" altLang="ko-KR" sz="2400" b="1" i="0" u="none" strike="noStrike" dirty="0">
                 <a:solidFill>
                   <a:srgbClr val="383A42"/>
                 </a:solidFill>
@@ -17315,7 +17338,7 @@
               <a:t>_</a:t>
             </a:r>
             <a:r>
-              <a:rPr lang="ko-KR" altLang="en-US" sz="2400" b="0" i="0" u="none" strike="noStrike" dirty="0">
+              <a:rPr lang="ko-KR" altLang="en-US" sz="2400" b="1" i="0" u="none" strike="noStrike" dirty="0">
                 <a:solidFill>
                   <a:srgbClr val="383A42"/>
                 </a:solidFill>
@@ -17325,7 +17348,7 @@
               <a:t>이름</a:t>
             </a:r>
             <a:r>
-              <a:rPr lang="en-US" altLang="ko-KR" sz="2400" b="0" i="0" u="none" strike="noStrike" dirty="0">
+              <a:rPr lang="en-US" altLang="ko-KR" sz="2400" b="1" i="0" u="none" strike="noStrike" dirty="0">
                 <a:solidFill>
                   <a:srgbClr val="383A42"/>
                 </a:solidFill>
@@ -17335,7 +17358,7 @@
               <a:t>(</a:t>
             </a:r>
             <a:r>
-              <a:rPr lang="ko-KR" altLang="en-US" sz="2400" b="0" i="0" u="none" strike="noStrike" dirty="0">
+              <a:rPr lang="ko-KR" altLang="en-US" sz="2400" b="1" i="0" u="none" strike="noStrike" dirty="0">
                 <a:solidFill>
                   <a:srgbClr val="383A42"/>
                 </a:solidFill>
@@ -17345,7 +17368,7 @@
               <a:t>인수 목록</a:t>
             </a:r>
             <a:r>
-              <a:rPr lang="en-US" altLang="ko-KR" sz="2400" b="0" i="0" u="none" strike="noStrike" dirty="0">
+              <a:rPr lang="en-US" altLang="ko-KR" sz="2400" b="1" i="0" u="none" strike="noStrike" dirty="0">
                 <a:solidFill>
                   <a:srgbClr val="383A42"/>
                 </a:solidFill>
@@ -17355,7 +17378,7 @@
               <a:t>)</a:t>
             </a:r>
             <a:br>
-              <a:rPr lang="en-US" altLang="ko-KR" sz="2400" b="0" i="0" u="none" strike="noStrike" dirty="0">
+              <a:rPr lang="en-US" altLang="ko-KR" sz="2400" b="1" i="0" u="none" strike="noStrike" dirty="0">
                 <a:solidFill>
                   <a:srgbClr val="383A42"/>
                 </a:solidFill>
@@ -17364,7 +17387,7 @@
               </a:rPr>
             </a:br>
             <a:r>
-              <a:rPr lang="en-US" altLang="ko-KR" sz="2400" b="0" i="0" u="none" strike="noStrike" dirty="0">
+              <a:rPr lang="en-US" altLang="ko-KR" sz="2400" b="1" i="0" u="none" strike="noStrike" dirty="0">
                 <a:solidFill>
                   <a:srgbClr val="383A42"/>
                 </a:solidFill>
@@ -17374,7 +17397,7 @@
               <a:t>{</a:t>
             </a:r>
             <a:br>
-              <a:rPr lang="en-US" altLang="ko-KR" sz="2400" b="0" i="0" u="none" strike="noStrike" dirty="0">
+              <a:rPr lang="en-US" altLang="ko-KR" sz="2400" b="1" i="0" u="none" strike="noStrike" dirty="0">
                 <a:solidFill>
                   <a:srgbClr val="383A42"/>
                 </a:solidFill>
@@ -17383,7 +17406,7 @@
               </a:rPr>
             </a:br>
             <a:r>
-              <a:rPr lang="en-US" altLang="ko-KR" sz="2400" b="0" i="0" u="none" strike="noStrike" dirty="0">
+              <a:rPr lang="en-US" altLang="ko-KR" sz="2400" b="1" i="0" u="none" strike="noStrike" dirty="0">
                 <a:solidFill>
                   <a:srgbClr val="383A42"/>
                 </a:solidFill>
@@ -17393,7 +17416,7 @@
               <a:t>    </a:t>
             </a:r>
             <a:r>
-              <a:rPr lang="ko-KR" altLang="en-US" sz="2400" b="0" i="0" u="none" strike="noStrike" dirty="0">
+              <a:rPr lang="ko-KR" altLang="en-US" sz="2400" b="1" i="0" u="none" strike="noStrike" dirty="0">
                 <a:solidFill>
                   <a:srgbClr val="383A42"/>
                 </a:solidFill>
@@ -17403,7 +17426,7 @@
               <a:t>명령어</a:t>
             </a:r>
             <a:r>
-              <a:rPr lang="en-US" altLang="ko-KR" sz="2400" b="0" i="0" u="none" strike="noStrike" dirty="0">
+              <a:rPr lang="en-US" altLang="ko-KR" sz="2400" b="1" i="0" u="none" strike="noStrike" dirty="0">
                 <a:solidFill>
                   <a:srgbClr val="383A42"/>
                 </a:solidFill>
@@ -17413,7 +17436,7 @@
               <a:t>;</a:t>
             </a:r>
             <a:br>
-              <a:rPr lang="en-US" altLang="ko-KR" sz="2400" b="0" i="0" u="none" strike="noStrike" dirty="0">
+              <a:rPr lang="en-US" altLang="ko-KR" sz="2400" b="1" i="0" u="none" strike="noStrike" dirty="0">
                 <a:solidFill>
                   <a:srgbClr val="383A42"/>
                 </a:solidFill>
@@ -17422,7 +17445,7 @@
               </a:rPr>
             </a:br>
             <a:r>
-              <a:rPr lang="en-US" altLang="ko-KR" sz="2400" b="0" i="0" u="none" strike="noStrike" dirty="0">
+              <a:rPr lang="en-US" altLang="ko-KR" sz="2400" b="1" i="0" u="none" strike="noStrike" dirty="0">
                 <a:solidFill>
                   <a:srgbClr val="383A42"/>
                 </a:solidFill>
@@ -17432,7 +17455,7 @@
               <a:t>    </a:t>
             </a:r>
             <a:r>
-              <a:rPr lang="en-US" altLang="ko-KR" sz="2400" b="0" i="0" u="none" strike="noStrike" dirty="0">
+              <a:rPr lang="en-US" altLang="ko-KR" sz="2400" b="1" i="0" u="none" strike="noStrike" dirty="0">
                 <a:solidFill>
                   <a:srgbClr val="A626A4"/>
                 </a:solidFill>
@@ -17442,7 +17465,7 @@
               <a:t>return</a:t>
             </a:r>
             <a:r>
-              <a:rPr lang="ko-KR" altLang="en-US" sz="2400" b="0" i="0" u="none" strike="noStrike" dirty="0">
+              <a:rPr lang="ko-KR" altLang="en-US" sz="2400" b="1" i="0" u="none" strike="noStrike" dirty="0">
                 <a:solidFill>
                   <a:srgbClr val="383A42"/>
                 </a:solidFill>
@@ -17452,7 +17475,7 @@
               <a:t> 반환값</a:t>
             </a:r>
             <a:r>
-              <a:rPr lang="en-US" altLang="ko-KR" sz="2400" b="0" i="0" u="none" strike="noStrike" dirty="0">
+              <a:rPr lang="en-US" altLang="ko-KR" sz="2400" b="1" i="0" u="none" strike="noStrike" dirty="0">
                 <a:solidFill>
                   <a:srgbClr val="383A42"/>
                 </a:solidFill>
@@ -17462,7 +17485,7 @@
               <a:t>;</a:t>
             </a:r>
             <a:br>
-              <a:rPr lang="en-US" altLang="ko-KR" sz="2400" b="0" i="0" u="none" strike="noStrike" dirty="0">
+              <a:rPr lang="en-US" altLang="ko-KR" sz="2400" b="1" i="0" u="none" strike="noStrike" dirty="0">
                 <a:solidFill>
                   <a:srgbClr val="383A42"/>
                 </a:solidFill>
@@ -17471,7 +17494,7 @@
               </a:rPr>
             </a:br>
             <a:r>
-              <a:rPr lang="en-US" altLang="ko-KR" sz="2400" b="0" i="0" u="none" strike="noStrike" dirty="0">
+              <a:rPr lang="en-US" altLang="ko-KR" sz="2400" b="1" i="0" u="none" strike="noStrike" dirty="0">
                 <a:solidFill>
                   <a:srgbClr val="383A42"/>
                 </a:solidFill>
@@ -17480,7 +17503,7 @@
               </a:rPr>
               <a:t>}</a:t>
             </a:r>
-            <a:endParaRPr lang="ko-KR" altLang="en-US" dirty="0">
+            <a:endParaRPr lang="ko-KR" altLang="en-US" b="1" dirty="0">
               <a:latin typeface="Consolas" panose="020B0609020204030204" pitchFamily="49" charset="0"/>
             </a:endParaRPr>
           </a:p>
@@ -17507,12 +17530,13 @@
             <a:avLst/>
           </a:prstGeom>
           <a:noFill/>
-          <a:ln w="38100">
+          <a:ln w="25400">
             <a:solidFill>
               <a:schemeClr val="bg1">
-                <a:lumMod val="50000"/>
+                <a:lumMod val="75000"/>
               </a:schemeClr>
             </a:solidFill>
+            <a:prstDash val="sysDot"/>
           </a:ln>
         </p:spPr>
         <p:txBody>
@@ -17522,7 +17546,7 @@
           <a:lstStyle/>
           <a:p>
             <a:r>
-              <a:rPr lang="en-US" altLang="ko-KR" sz="2400" b="0" i="0" u="none" strike="noStrike" dirty="0">
+              <a:rPr lang="en-US" altLang="ko-KR" sz="2400" b="1" i="0" u="none" strike="noStrike" dirty="0">
                 <a:solidFill>
                   <a:srgbClr val="383A42"/>
                 </a:solidFill>
@@ -17532,7 +17556,7 @@
               <a:t>void</a:t>
             </a:r>
             <a:r>
-              <a:rPr lang="ko-KR" altLang="en-US" sz="2400" b="0" i="0" u="none" strike="noStrike" dirty="0">
+              <a:rPr lang="ko-KR" altLang="en-US" sz="2400" b="1" i="0" u="none" strike="noStrike" dirty="0">
                 <a:solidFill>
                   <a:srgbClr val="383A42"/>
                 </a:solidFill>
@@ -17542,7 +17566,7 @@
               <a:t> 함수</a:t>
             </a:r>
             <a:r>
-              <a:rPr lang="en-US" altLang="ko-KR" sz="2400" b="0" i="0" u="none" strike="noStrike" dirty="0">
+              <a:rPr lang="en-US" altLang="ko-KR" sz="2400" b="1" i="0" u="none" strike="noStrike" dirty="0">
                 <a:solidFill>
                   <a:srgbClr val="383A42"/>
                 </a:solidFill>
@@ -17552,7 +17576,7 @@
               <a:t>_</a:t>
             </a:r>
             <a:r>
-              <a:rPr lang="ko-KR" altLang="en-US" sz="2400" b="0" i="0" u="none" strike="noStrike" dirty="0">
+              <a:rPr lang="ko-KR" altLang="en-US" sz="2400" b="1" i="0" u="none" strike="noStrike" dirty="0">
                 <a:solidFill>
                   <a:srgbClr val="383A42"/>
                 </a:solidFill>
@@ -17562,7 +17586,7 @@
               <a:t>이름</a:t>
             </a:r>
             <a:r>
-              <a:rPr lang="en-US" altLang="ko-KR" sz="2400" b="0" i="0" u="none" strike="noStrike" dirty="0">
+              <a:rPr lang="en-US" altLang="ko-KR" sz="2400" b="1" i="0" u="none" strike="noStrike" dirty="0">
                 <a:solidFill>
                   <a:srgbClr val="383A42"/>
                 </a:solidFill>
@@ -17572,7 +17596,7 @@
               <a:t>(</a:t>
             </a:r>
             <a:r>
-              <a:rPr lang="ko-KR" altLang="en-US" sz="2400" b="0" i="0" u="none" strike="noStrike" dirty="0">
+              <a:rPr lang="ko-KR" altLang="en-US" sz="2400" b="1" i="0" u="none" strike="noStrike" dirty="0">
                 <a:solidFill>
                   <a:srgbClr val="383A42"/>
                 </a:solidFill>
@@ -17582,7 +17606,7 @@
               <a:t>인수 목록</a:t>
             </a:r>
             <a:r>
-              <a:rPr lang="en-US" altLang="ko-KR" sz="2400" b="0" i="0" u="none" strike="noStrike" dirty="0">
+              <a:rPr lang="en-US" altLang="ko-KR" sz="2400" b="1" i="0" u="none" strike="noStrike" dirty="0">
                 <a:solidFill>
                   <a:srgbClr val="383A42"/>
                 </a:solidFill>
@@ -17592,7 +17616,7 @@
               <a:t>)</a:t>
             </a:r>
             <a:br>
-              <a:rPr lang="en-US" altLang="ko-KR" sz="2400" b="0" i="0" u="none" strike="noStrike" dirty="0">
+              <a:rPr lang="en-US" altLang="ko-KR" sz="2400" b="1" i="0" u="none" strike="noStrike" dirty="0">
                 <a:solidFill>
                   <a:srgbClr val="383A42"/>
                 </a:solidFill>
@@ -17601,7 +17625,7 @@
               </a:rPr>
             </a:br>
             <a:r>
-              <a:rPr lang="en-US" altLang="ko-KR" sz="2400" b="0" i="0" u="none" strike="noStrike" dirty="0">
+              <a:rPr lang="en-US" altLang="ko-KR" sz="2400" b="1" i="0" u="none" strike="noStrike" dirty="0">
                 <a:solidFill>
                   <a:srgbClr val="383A42"/>
                 </a:solidFill>
@@ -17611,7 +17635,7 @@
               <a:t>{</a:t>
             </a:r>
             <a:br>
-              <a:rPr lang="en-US" altLang="ko-KR" sz="2400" b="0" i="0" u="none" strike="noStrike" dirty="0">
+              <a:rPr lang="en-US" altLang="ko-KR" sz="2400" b="1" i="0" u="none" strike="noStrike" dirty="0">
                 <a:solidFill>
                   <a:srgbClr val="383A42"/>
                 </a:solidFill>
@@ -17620,7 +17644,7 @@
               </a:rPr>
             </a:br>
             <a:r>
-              <a:rPr lang="en-US" altLang="ko-KR" sz="2400" b="0" i="0" u="none" strike="noStrike" dirty="0">
+              <a:rPr lang="en-US" altLang="ko-KR" sz="2400" b="1" i="0" u="none" strike="noStrike" dirty="0">
                 <a:solidFill>
                   <a:srgbClr val="383A42"/>
                 </a:solidFill>
@@ -17630,7 +17654,7 @@
               <a:t>    </a:t>
             </a:r>
             <a:r>
-              <a:rPr lang="ko-KR" altLang="en-US" sz="2400" b="0" i="0" u="none" strike="noStrike" dirty="0">
+              <a:rPr lang="ko-KR" altLang="en-US" sz="2400" b="1" i="0" u="none" strike="noStrike" dirty="0">
                 <a:solidFill>
                   <a:srgbClr val="383A42"/>
                 </a:solidFill>
@@ -17640,7 +17664,7 @@
               <a:t>명령어</a:t>
             </a:r>
             <a:r>
-              <a:rPr lang="en-US" altLang="ko-KR" sz="2400" b="0" i="0" u="none" strike="noStrike" dirty="0">
+              <a:rPr lang="en-US" altLang="ko-KR" sz="2400" b="1" i="0" u="none" strike="noStrike" dirty="0">
                 <a:solidFill>
                   <a:srgbClr val="383A42"/>
                 </a:solidFill>
@@ -17650,7 +17674,7 @@
               <a:t>;</a:t>
             </a:r>
             <a:br>
-              <a:rPr lang="en-US" altLang="ko-KR" sz="2400" b="0" i="0" u="none" strike="noStrike" dirty="0">
+              <a:rPr lang="en-US" altLang="ko-KR" sz="2400" b="1" i="0" u="none" strike="noStrike" dirty="0">
                 <a:solidFill>
                   <a:srgbClr val="383A42"/>
                 </a:solidFill>
@@ -17659,7 +17683,7 @@
               </a:rPr>
             </a:br>
             <a:r>
-              <a:rPr lang="en-US" altLang="ko-KR" sz="2400" b="0" i="0" u="none" strike="noStrike" dirty="0">
+              <a:rPr lang="en-US" altLang="ko-KR" sz="2400" b="1" i="0" u="none" strike="noStrike" dirty="0">
                 <a:solidFill>
                   <a:srgbClr val="383A42"/>
                 </a:solidFill>
@@ -17669,7 +17693,7 @@
               <a:t>    </a:t>
             </a:r>
             <a:r>
-              <a:rPr lang="en-US" altLang="ko-KR" sz="2400" b="0" i="0" u="none" strike="noStrike" dirty="0">
+              <a:rPr lang="en-US" altLang="ko-KR" sz="2400" b="1" i="0" u="none" strike="noStrike" dirty="0">
                 <a:solidFill>
                   <a:srgbClr val="A626A4"/>
                 </a:solidFill>
@@ -17679,7 +17703,7 @@
               <a:t>return</a:t>
             </a:r>
             <a:r>
-              <a:rPr lang="en-US" altLang="ko-KR" sz="2400" b="0" i="0" u="none" strike="noStrike" dirty="0">
+              <a:rPr lang="en-US" altLang="ko-KR" sz="2400" b="1" i="0" u="none" strike="noStrike" dirty="0">
                 <a:solidFill>
                   <a:srgbClr val="383A42"/>
                 </a:solidFill>
@@ -17689,7 +17713,7 @@
               <a:t>; // </a:t>
             </a:r>
             <a:r>
-              <a:rPr lang="ko-KR" altLang="en-US" sz="2400" b="0" i="0" u="none" strike="noStrike" dirty="0">
+              <a:rPr lang="ko-KR" altLang="en-US" sz="2400" b="1" i="0" u="none" strike="noStrike" dirty="0">
                 <a:solidFill>
                   <a:srgbClr val="383A42"/>
                 </a:solidFill>
@@ -17699,7 +17723,7 @@
               <a:t>보통 생략함</a:t>
             </a:r>
             <a:br>
-              <a:rPr lang="en-US" altLang="ko-KR" sz="2400" b="0" i="0" u="none" strike="noStrike" dirty="0">
+              <a:rPr lang="en-US" altLang="ko-KR" sz="2400" b="1" i="0" u="none" strike="noStrike" dirty="0">
                 <a:solidFill>
                   <a:srgbClr val="383A42"/>
                 </a:solidFill>
@@ -17708,7 +17732,7 @@
               </a:rPr>
             </a:br>
             <a:r>
-              <a:rPr lang="en-US" altLang="ko-KR" sz="2400" b="0" i="0" u="none" strike="noStrike" dirty="0">
+              <a:rPr lang="en-US" altLang="ko-KR" sz="2400" b="1" i="0" u="none" strike="noStrike" dirty="0">
                 <a:solidFill>
                   <a:srgbClr val="383A42"/>
                 </a:solidFill>
@@ -17717,7 +17741,7 @@
               </a:rPr>
               <a:t>}</a:t>
             </a:r>
-            <a:endParaRPr lang="ko-KR" altLang="en-US" dirty="0">
+            <a:endParaRPr lang="ko-KR" altLang="en-US" b="1" dirty="0">
               <a:latin typeface="Consolas" panose="020B0609020204030204" pitchFamily="49" charset="0"/>
             </a:endParaRPr>
           </a:p>
@@ -17777,15 +17801,15 @@
         <a:srgbClr val="B2B2B2"/>
       </a:folHlink>
     </a:clrScheme>
-    <a:fontScheme name="기본 디자인">
+    <a:fontScheme name="바른고딕">
       <a:majorFont>
-        <a:latin typeface="가을체"/>
-        <a:ea typeface="가을체"/>
+        <a:latin typeface="나눔바른고딕"/>
+        <a:ea typeface="나눔바른고딕"/>
         <a:cs typeface=""/>
       </a:majorFont>
       <a:minorFont>
-        <a:latin typeface="가을체"/>
-        <a:ea typeface="가을체"/>
+        <a:latin typeface="나눔바른고딕"/>
+        <a:ea typeface="나눔바른고딕"/>
         <a:cs typeface=""/>
       </a:minorFont>
     </a:fontScheme>
@@ -18086,6 +18110,33 @@
         </a:defPPr>
       </a:lstStyle>
     </a:lnDef>
+    <a:txDef>
+      <a:spPr>
+        <a:noFill/>
+        <a:ln w="25400">
+          <a:solidFill>
+            <a:schemeClr val="bg1">
+              <a:lumMod val="75000"/>
+            </a:schemeClr>
+          </a:solidFill>
+          <a:prstDash val="sysDot"/>
+        </a:ln>
+      </a:spPr>
+      <a:bodyPr wrap="square">
+        <a:spAutoFit/>
+      </a:bodyPr>
+      <a:lstStyle>
+        <a:defPPr algn="l">
+          <a:defRPr sz="2400" b="1" i="0" u="none" strike="noStrike" dirty="0">
+            <a:solidFill>
+              <a:srgbClr val="A626A4"/>
+            </a:solidFill>
+            <a:effectLst/>
+            <a:latin typeface="Consolas" panose="020B0609020204030204" pitchFamily="49" charset="0"/>
+          </a:defRPr>
+        </a:defPPr>
+      </a:lstStyle>
+    </a:txDef>
   </a:objectDefaults>
   <a:extraClrSchemeLst>
     <a:extraClrScheme>
